--- a/workshop.pptx
+++ b/workshop.pptx
@@ -2,7 +2,7 @@
 <file path=ppt/presentation.xml><?xml version="1.0" encoding="utf-8"?>
 <p:presentation xmlns:a="http://schemas.openxmlformats.org/drawingml/2006/main" xmlns:r="http://schemas.openxmlformats.org/officeDocument/2006/relationships" xmlns:p="http://schemas.openxmlformats.org/presentationml/2006/main" saveSubsetFonts="1">
   <p:sldMasterIdLst>
-    <p:sldMasterId id="2147483648" r:id="rId1"/>
+    <p:sldMasterId id="2147483678" r:id="rId1"/>
   </p:sldMasterIdLst>
   <p:sldIdLst>
     <p:sldId id="256" r:id="rId2"/>
@@ -15,9 +15,9 @@
   <p:notesSz cx="6858000" cy="9144000"/>
   <p:defaultTextStyle>
     <a:defPPr>
-      <a:defRPr lang="en-BE"/>
+      <a:defRPr lang="en-US"/>
     </a:defPPr>
-    <a:lvl1pPr marL="0" algn="l" defTabSz="914400" rtl="0" eaLnBrk="1" latinLnBrk="0" hangingPunct="1">
+    <a:lvl1pPr marL="0" algn="l" defTabSz="457200" rtl="0" eaLnBrk="1" latinLnBrk="0" hangingPunct="1">
       <a:defRPr sz="1800" kern="1200">
         <a:solidFill>
           <a:schemeClr val="tx1"/>
@@ -27,7 +27,7 @@
         <a:cs typeface="+mn-cs"/>
       </a:defRPr>
     </a:lvl1pPr>
-    <a:lvl2pPr marL="457200" algn="l" defTabSz="914400" rtl="0" eaLnBrk="1" latinLnBrk="0" hangingPunct="1">
+    <a:lvl2pPr marL="457200" algn="l" defTabSz="457200" rtl="0" eaLnBrk="1" latinLnBrk="0" hangingPunct="1">
       <a:defRPr sz="1800" kern="1200">
         <a:solidFill>
           <a:schemeClr val="tx1"/>
@@ -37,7 +37,7 @@
         <a:cs typeface="+mn-cs"/>
       </a:defRPr>
     </a:lvl2pPr>
-    <a:lvl3pPr marL="914400" algn="l" defTabSz="914400" rtl="0" eaLnBrk="1" latinLnBrk="0" hangingPunct="1">
+    <a:lvl3pPr marL="914400" algn="l" defTabSz="457200" rtl="0" eaLnBrk="1" latinLnBrk="0" hangingPunct="1">
       <a:defRPr sz="1800" kern="1200">
         <a:solidFill>
           <a:schemeClr val="tx1"/>
@@ -47,7 +47,7 @@
         <a:cs typeface="+mn-cs"/>
       </a:defRPr>
     </a:lvl3pPr>
-    <a:lvl4pPr marL="1371600" algn="l" defTabSz="914400" rtl="0" eaLnBrk="1" latinLnBrk="0" hangingPunct="1">
+    <a:lvl4pPr marL="1371600" algn="l" defTabSz="457200" rtl="0" eaLnBrk="1" latinLnBrk="0" hangingPunct="1">
       <a:defRPr sz="1800" kern="1200">
         <a:solidFill>
           <a:schemeClr val="tx1"/>
@@ -57,7 +57,7 @@
         <a:cs typeface="+mn-cs"/>
       </a:defRPr>
     </a:lvl4pPr>
-    <a:lvl5pPr marL="1828800" algn="l" defTabSz="914400" rtl="0" eaLnBrk="1" latinLnBrk="0" hangingPunct="1">
+    <a:lvl5pPr marL="1828800" algn="l" defTabSz="457200" rtl="0" eaLnBrk="1" latinLnBrk="0" hangingPunct="1">
       <a:defRPr sz="1800" kern="1200">
         <a:solidFill>
           <a:schemeClr val="tx1"/>
@@ -67,7 +67,7 @@
         <a:cs typeface="+mn-cs"/>
       </a:defRPr>
     </a:lvl5pPr>
-    <a:lvl6pPr marL="2286000" algn="l" defTabSz="914400" rtl="0" eaLnBrk="1" latinLnBrk="0" hangingPunct="1">
+    <a:lvl6pPr marL="2286000" algn="l" defTabSz="457200" rtl="0" eaLnBrk="1" latinLnBrk="0" hangingPunct="1">
       <a:defRPr sz="1800" kern="1200">
         <a:solidFill>
           <a:schemeClr val="tx1"/>
@@ -77,7 +77,7 @@
         <a:cs typeface="+mn-cs"/>
       </a:defRPr>
     </a:lvl6pPr>
-    <a:lvl7pPr marL="2743200" algn="l" defTabSz="914400" rtl="0" eaLnBrk="1" latinLnBrk="0" hangingPunct="1">
+    <a:lvl7pPr marL="2743200" algn="l" defTabSz="457200" rtl="0" eaLnBrk="1" latinLnBrk="0" hangingPunct="1">
       <a:defRPr sz="1800" kern="1200">
         <a:solidFill>
           <a:schemeClr val="tx1"/>
@@ -87,7 +87,7 @@
         <a:cs typeface="+mn-cs"/>
       </a:defRPr>
     </a:lvl7pPr>
-    <a:lvl8pPr marL="3200400" algn="l" defTabSz="914400" rtl="0" eaLnBrk="1" latinLnBrk="0" hangingPunct="1">
+    <a:lvl8pPr marL="3200400" algn="l" defTabSz="457200" rtl="0" eaLnBrk="1" latinLnBrk="0" hangingPunct="1">
       <a:defRPr sz="1800" kern="1200">
         <a:solidFill>
           <a:schemeClr val="tx1"/>
@@ -97,7 +97,7 @@
         <a:cs typeface="+mn-cs"/>
       </a:defRPr>
     </a:lvl8pPr>
-    <a:lvl9pPr marL="3657600" algn="l" defTabSz="914400" rtl="0" eaLnBrk="1" latinLnBrk="0" hangingPunct="1">
+    <a:lvl9pPr marL="3657600" algn="l" defTabSz="457200" rtl="0" eaLnBrk="1" latinLnBrk="0" hangingPunct="1">
       <a:defRPr sz="1800" kern="1200">
         <a:solidFill>
           <a:schemeClr val="tx1"/>
@@ -117,7 +117,7 @@
 </file>
 
 <file path=ppt/slideLayouts/slideLayout1.xml><?xml version="1.0" encoding="utf-8"?>
-<p:sldLayout xmlns:a="http://schemas.openxmlformats.org/drawingml/2006/main" xmlns:r="http://schemas.openxmlformats.org/officeDocument/2006/relationships" xmlns:p="http://schemas.openxmlformats.org/presentationml/2006/main" type="title" preserve="1">
+<p:sldLayout xmlns:a="http://schemas.openxmlformats.org/drawingml/2006/main" xmlns:r="http://schemas.openxmlformats.org/officeDocument/2006/relationships" xmlns:p="http://schemas.openxmlformats.org/presentationml/2006/main" showMasterSp="0" type="title" preserve="1">
   <p:cSld name="Title Slide">
     <p:spTree>
       <p:nvGrpSpPr>
@@ -133,15 +133,539 @@
           <a:chExt cx="0" cy="0"/>
         </a:xfrm>
       </p:grpSpPr>
-      <p:sp>
-        <p:nvSpPr>
-          <p:cNvPr id="2" name="Title 1">
-            <a:extLst>
-              <a:ext uri="{FF2B5EF4-FFF2-40B4-BE49-F238E27FC236}">
-                <a16:creationId xmlns:a16="http://schemas.microsoft.com/office/drawing/2014/main" id="{06B36B51-2508-6F2B-ADC4-05013B79344E}"/>
-              </a:ext>
-            </a:extLst>
-          </p:cNvPr>
+      <p:grpSp>
+        <p:nvGrpSpPr>
+          <p:cNvPr id="7" name="Group 6"/>
+          <p:cNvGrpSpPr/>
+          <p:nvPr/>
+        </p:nvGrpSpPr>
+        <p:grpSpPr>
+          <a:xfrm>
+            <a:off x="0" y="-8467"/>
+            <a:ext cx="12192000" cy="6866467"/>
+            <a:chOff x="0" y="-8467"/>
+            <a:chExt cx="12192000" cy="6866467"/>
+          </a:xfrm>
+        </p:grpSpPr>
+        <p:cxnSp>
+          <p:nvCxnSpPr>
+            <p:cNvPr id="32" name="Straight Connector 31"/>
+            <p:cNvCxnSpPr/>
+            <p:nvPr/>
+          </p:nvCxnSpPr>
+          <p:spPr>
+            <a:xfrm>
+              <a:off x="9371012" y="0"/>
+              <a:ext cx="1219200" cy="6858000"/>
+            </a:xfrm>
+            <a:prstGeom prst="line">
+              <a:avLst/>
+            </a:prstGeom>
+            <a:ln w="9525">
+              <a:solidFill>
+                <a:schemeClr val="bg1">
+                  <a:lumMod val="75000"/>
+                </a:schemeClr>
+              </a:solidFill>
+            </a:ln>
+          </p:spPr>
+          <p:style>
+            <a:lnRef idx="2">
+              <a:schemeClr val="accent1"/>
+            </a:lnRef>
+            <a:fillRef idx="0">
+              <a:schemeClr val="accent1"/>
+            </a:fillRef>
+            <a:effectRef idx="1">
+              <a:schemeClr val="accent1"/>
+            </a:effectRef>
+            <a:fontRef idx="minor">
+              <a:schemeClr val="tx1"/>
+            </a:fontRef>
+          </p:style>
+        </p:cxnSp>
+        <p:cxnSp>
+          <p:nvCxnSpPr>
+            <p:cNvPr id="21" name="Straight Connector 20"/>
+            <p:cNvCxnSpPr/>
+            <p:nvPr/>
+          </p:nvCxnSpPr>
+          <p:spPr>
+            <a:xfrm flipH="1">
+              <a:off x="7425267" y="3681413"/>
+              <a:ext cx="4763558" cy="3176587"/>
+            </a:xfrm>
+            <a:prstGeom prst="line">
+              <a:avLst/>
+            </a:prstGeom>
+            <a:ln w="9525">
+              <a:solidFill>
+                <a:schemeClr val="bg1">
+                  <a:lumMod val="85000"/>
+                </a:schemeClr>
+              </a:solidFill>
+            </a:ln>
+          </p:spPr>
+          <p:style>
+            <a:lnRef idx="2">
+              <a:schemeClr val="accent1"/>
+            </a:lnRef>
+            <a:fillRef idx="0">
+              <a:schemeClr val="accent1"/>
+            </a:fillRef>
+            <a:effectRef idx="1">
+              <a:schemeClr val="accent1"/>
+            </a:effectRef>
+            <a:fontRef idx="minor">
+              <a:schemeClr val="tx1"/>
+            </a:fontRef>
+          </p:style>
+        </p:cxnSp>
+        <p:sp>
+          <p:nvSpPr>
+            <p:cNvPr id="24" name="Rectangle 23"/>
+            <p:cNvSpPr/>
+            <p:nvPr/>
+          </p:nvSpPr>
+          <p:spPr>
+            <a:xfrm>
+              <a:off x="9181476" y="-8467"/>
+              <a:ext cx="3007349" cy="6866467"/>
+            </a:xfrm>
+            <a:custGeom>
+              <a:avLst/>
+              <a:gdLst/>
+              <a:ahLst/>
+              <a:cxnLst/>
+              <a:rect l="l" t="t" r="r" b="b"/>
+              <a:pathLst>
+                <a:path w="3007349" h="6866467">
+                  <a:moveTo>
+                    <a:pt x="2045532" y="0"/>
+                  </a:moveTo>
+                  <a:lnTo>
+                    <a:pt x="3007349" y="0"/>
+                  </a:lnTo>
+                  <a:lnTo>
+                    <a:pt x="3007349" y="6866467"/>
+                  </a:lnTo>
+                  <a:lnTo>
+                    <a:pt x="0" y="6866467"/>
+                  </a:lnTo>
+                  <a:lnTo>
+                    <a:pt x="2045532" y="0"/>
+                  </a:lnTo>
+                  <a:close/>
+                </a:path>
+              </a:pathLst>
+            </a:custGeom>
+            <a:solidFill>
+              <a:schemeClr val="accent1">
+                <a:alpha val="30000"/>
+              </a:schemeClr>
+            </a:solidFill>
+            <a:ln>
+              <a:noFill/>
+            </a:ln>
+            <a:effectLst/>
+          </p:spPr>
+          <p:style>
+            <a:lnRef idx="1">
+              <a:schemeClr val="accent1"/>
+            </a:lnRef>
+            <a:fillRef idx="3">
+              <a:schemeClr val="accent1"/>
+            </a:fillRef>
+            <a:effectRef idx="2">
+              <a:schemeClr val="accent1"/>
+            </a:effectRef>
+            <a:fontRef idx="minor">
+              <a:schemeClr val="lt1"/>
+            </a:fontRef>
+          </p:style>
+        </p:sp>
+        <p:sp>
+          <p:nvSpPr>
+            <p:cNvPr id="26" name="Rectangle 25"/>
+            <p:cNvSpPr/>
+            <p:nvPr/>
+          </p:nvSpPr>
+          <p:spPr>
+            <a:xfrm>
+              <a:off x="9603442" y="-8467"/>
+              <a:ext cx="2588558" cy="6866467"/>
+            </a:xfrm>
+            <a:custGeom>
+              <a:avLst/>
+              <a:gdLst/>
+              <a:ahLst/>
+              <a:cxnLst/>
+              <a:rect l="l" t="t" r="r" b="b"/>
+              <a:pathLst>
+                <a:path w="2573311" h="6866467">
+                  <a:moveTo>
+                    <a:pt x="0" y="0"/>
+                  </a:moveTo>
+                  <a:lnTo>
+                    <a:pt x="2573311" y="0"/>
+                  </a:lnTo>
+                  <a:lnTo>
+                    <a:pt x="2573311" y="6866467"/>
+                  </a:lnTo>
+                  <a:lnTo>
+                    <a:pt x="1202336" y="6866467"/>
+                  </a:lnTo>
+                  <a:lnTo>
+                    <a:pt x="0" y="0"/>
+                  </a:lnTo>
+                  <a:close/>
+                </a:path>
+              </a:pathLst>
+            </a:custGeom>
+            <a:solidFill>
+              <a:schemeClr val="accent1">
+                <a:alpha val="20000"/>
+              </a:schemeClr>
+            </a:solidFill>
+            <a:ln>
+              <a:noFill/>
+            </a:ln>
+            <a:effectLst/>
+          </p:spPr>
+          <p:style>
+            <a:lnRef idx="1">
+              <a:schemeClr val="accent1"/>
+            </a:lnRef>
+            <a:fillRef idx="3">
+              <a:schemeClr val="accent1"/>
+            </a:fillRef>
+            <a:effectRef idx="2">
+              <a:schemeClr val="accent1"/>
+            </a:effectRef>
+            <a:fontRef idx="minor">
+              <a:schemeClr val="lt1"/>
+            </a:fontRef>
+          </p:style>
+        </p:sp>
+        <p:sp>
+          <p:nvSpPr>
+            <p:cNvPr id="27" name="Isosceles Triangle 26"/>
+            <p:cNvSpPr/>
+            <p:nvPr/>
+          </p:nvSpPr>
+          <p:spPr>
+            <a:xfrm>
+              <a:off x="8932333" y="3048000"/>
+              <a:ext cx="3259667" cy="3810000"/>
+            </a:xfrm>
+            <a:prstGeom prst="triangle">
+              <a:avLst>
+                <a:gd name="adj" fmla="val 100000"/>
+              </a:avLst>
+            </a:prstGeom>
+            <a:solidFill>
+              <a:schemeClr val="accent2">
+                <a:alpha val="72000"/>
+              </a:schemeClr>
+            </a:solidFill>
+            <a:ln>
+              <a:noFill/>
+            </a:ln>
+            <a:effectLst/>
+          </p:spPr>
+          <p:style>
+            <a:lnRef idx="1">
+              <a:schemeClr val="accent1"/>
+            </a:lnRef>
+            <a:fillRef idx="3">
+              <a:schemeClr val="accent1"/>
+            </a:fillRef>
+            <a:effectRef idx="2">
+              <a:schemeClr val="accent1"/>
+            </a:effectRef>
+            <a:fontRef idx="minor">
+              <a:schemeClr val="lt1"/>
+            </a:fontRef>
+          </p:style>
+        </p:sp>
+        <p:sp>
+          <p:nvSpPr>
+            <p:cNvPr id="28" name="Rectangle 27"/>
+            <p:cNvSpPr/>
+            <p:nvPr/>
+          </p:nvSpPr>
+          <p:spPr>
+            <a:xfrm>
+              <a:off x="9334500" y="-8467"/>
+              <a:ext cx="2854326" cy="6866467"/>
+            </a:xfrm>
+            <a:custGeom>
+              <a:avLst/>
+              <a:gdLst/>
+              <a:ahLst/>
+              <a:cxnLst/>
+              <a:rect l="l" t="t" r="r" b="b"/>
+              <a:pathLst>
+                <a:path w="2858013" h="6866467">
+                  <a:moveTo>
+                    <a:pt x="0" y="0"/>
+                  </a:moveTo>
+                  <a:lnTo>
+                    <a:pt x="2858013" y="0"/>
+                  </a:lnTo>
+                  <a:lnTo>
+                    <a:pt x="2858013" y="6866467"/>
+                  </a:lnTo>
+                  <a:lnTo>
+                    <a:pt x="2473942" y="6866467"/>
+                  </a:lnTo>
+                  <a:lnTo>
+                    <a:pt x="0" y="0"/>
+                  </a:lnTo>
+                  <a:close/>
+                </a:path>
+              </a:pathLst>
+            </a:custGeom>
+            <a:solidFill>
+              <a:schemeClr val="accent2">
+                <a:lumMod val="75000"/>
+                <a:alpha val="70000"/>
+              </a:schemeClr>
+            </a:solidFill>
+            <a:ln>
+              <a:noFill/>
+            </a:ln>
+            <a:effectLst/>
+          </p:spPr>
+          <p:style>
+            <a:lnRef idx="1">
+              <a:schemeClr val="accent1"/>
+            </a:lnRef>
+            <a:fillRef idx="3">
+              <a:schemeClr val="accent1"/>
+            </a:fillRef>
+            <a:effectRef idx="2">
+              <a:schemeClr val="accent1"/>
+            </a:effectRef>
+            <a:fontRef idx="minor">
+              <a:schemeClr val="lt1"/>
+            </a:fontRef>
+          </p:style>
+        </p:sp>
+        <p:sp>
+          <p:nvSpPr>
+            <p:cNvPr id="29" name="Rectangle 28"/>
+            <p:cNvSpPr/>
+            <p:nvPr/>
+          </p:nvSpPr>
+          <p:spPr>
+            <a:xfrm>
+              <a:off x="10898730" y="-8467"/>
+              <a:ext cx="1290094" cy="6866467"/>
+            </a:xfrm>
+            <a:custGeom>
+              <a:avLst/>
+              <a:gdLst/>
+              <a:ahLst/>
+              <a:cxnLst/>
+              <a:rect l="l" t="t" r="r" b="b"/>
+              <a:pathLst>
+                <a:path w="1290094" h="6858000">
+                  <a:moveTo>
+                    <a:pt x="1019735" y="0"/>
+                  </a:moveTo>
+                  <a:lnTo>
+                    <a:pt x="1290094" y="0"/>
+                  </a:lnTo>
+                  <a:lnTo>
+                    <a:pt x="1290094" y="6858000"/>
+                  </a:lnTo>
+                  <a:lnTo>
+                    <a:pt x="0" y="6858000"/>
+                  </a:lnTo>
+                  <a:lnTo>
+                    <a:pt x="1019735" y="0"/>
+                  </a:lnTo>
+                  <a:close/>
+                </a:path>
+              </a:pathLst>
+            </a:custGeom>
+            <a:solidFill>
+              <a:schemeClr val="accent1">
+                <a:lumMod val="60000"/>
+                <a:lumOff val="40000"/>
+                <a:alpha val="70000"/>
+              </a:schemeClr>
+            </a:solidFill>
+            <a:ln>
+              <a:noFill/>
+            </a:ln>
+            <a:effectLst/>
+          </p:spPr>
+          <p:style>
+            <a:lnRef idx="1">
+              <a:schemeClr val="accent1"/>
+            </a:lnRef>
+            <a:fillRef idx="3">
+              <a:schemeClr val="accent1"/>
+            </a:fillRef>
+            <a:effectRef idx="2">
+              <a:schemeClr val="accent1"/>
+            </a:effectRef>
+            <a:fontRef idx="minor">
+              <a:schemeClr val="lt1"/>
+            </a:fontRef>
+          </p:style>
+        </p:sp>
+        <p:sp>
+          <p:nvSpPr>
+            <p:cNvPr id="30" name="Rectangle 29"/>
+            <p:cNvSpPr/>
+            <p:nvPr/>
+          </p:nvSpPr>
+          <p:spPr>
+            <a:xfrm>
+              <a:off x="10938999" y="-8467"/>
+              <a:ext cx="1249825" cy="6866467"/>
+            </a:xfrm>
+            <a:custGeom>
+              <a:avLst/>
+              <a:gdLst/>
+              <a:ahLst/>
+              <a:cxnLst/>
+              <a:rect l="l" t="t" r="r" b="b"/>
+              <a:pathLst>
+                <a:path w="1249825" h="6858000">
+                  <a:moveTo>
+                    <a:pt x="0" y="0"/>
+                  </a:moveTo>
+                  <a:lnTo>
+                    <a:pt x="1249825" y="0"/>
+                  </a:lnTo>
+                  <a:lnTo>
+                    <a:pt x="1249825" y="6858000"/>
+                  </a:lnTo>
+                  <a:lnTo>
+                    <a:pt x="1109382" y="6858000"/>
+                  </a:lnTo>
+                  <a:lnTo>
+                    <a:pt x="0" y="0"/>
+                  </a:lnTo>
+                  <a:close/>
+                </a:path>
+              </a:pathLst>
+            </a:custGeom>
+            <a:solidFill>
+              <a:schemeClr val="accent1">
+                <a:alpha val="65000"/>
+              </a:schemeClr>
+            </a:solidFill>
+            <a:ln>
+              <a:noFill/>
+            </a:ln>
+            <a:effectLst/>
+          </p:spPr>
+          <p:style>
+            <a:lnRef idx="1">
+              <a:schemeClr val="accent1"/>
+            </a:lnRef>
+            <a:fillRef idx="3">
+              <a:schemeClr val="accent1"/>
+            </a:fillRef>
+            <a:effectRef idx="2">
+              <a:schemeClr val="accent1"/>
+            </a:effectRef>
+            <a:fontRef idx="minor">
+              <a:schemeClr val="lt1"/>
+            </a:fontRef>
+          </p:style>
+        </p:sp>
+        <p:sp>
+          <p:nvSpPr>
+            <p:cNvPr id="31" name="Isosceles Triangle 30"/>
+            <p:cNvSpPr/>
+            <p:nvPr/>
+          </p:nvSpPr>
+          <p:spPr>
+            <a:xfrm>
+              <a:off x="10371666" y="3589867"/>
+              <a:ext cx="1817159" cy="3268133"/>
+            </a:xfrm>
+            <a:prstGeom prst="triangle">
+              <a:avLst>
+                <a:gd name="adj" fmla="val 100000"/>
+              </a:avLst>
+            </a:prstGeom>
+            <a:solidFill>
+              <a:schemeClr val="accent1">
+                <a:alpha val="80000"/>
+              </a:schemeClr>
+            </a:solidFill>
+            <a:ln>
+              <a:noFill/>
+            </a:ln>
+            <a:effectLst/>
+          </p:spPr>
+          <p:style>
+            <a:lnRef idx="1">
+              <a:schemeClr val="accent1"/>
+            </a:lnRef>
+            <a:fillRef idx="3">
+              <a:schemeClr val="accent1"/>
+            </a:fillRef>
+            <a:effectRef idx="2">
+              <a:schemeClr val="accent1"/>
+            </a:effectRef>
+            <a:fontRef idx="minor">
+              <a:schemeClr val="lt1"/>
+            </a:fontRef>
+          </p:style>
+        </p:sp>
+        <p:sp>
+          <p:nvSpPr>
+            <p:cNvPr id="19" name="Isosceles Triangle 18"/>
+            <p:cNvSpPr/>
+            <p:nvPr/>
+          </p:nvSpPr>
+          <p:spPr>
+            <a:xfrm rot="10800000">
+              <a:off x="0" y="0"/>
+              <a:ext cx="842596" cy="5666154"/>
+            </a:xfrm>
+            <a:prstGeom prst="triangle">
+              <a:avLst>
+                <a:gd name="adj" fmla="val 100000"/>
+              </a:avLst>
+            </a:prstGeom>
+            <a:solidFill>
+              <a:schemeClr val="accent1">
+                <a:alpha val="85000"/>
+              </a:schemeClr>
+            </a:solidFill>
+            <a:ln>
+              <a:noFill/>
+            </a:ln>
+            <a:effectLst/>
+          </p:spPr>
+          <p:style>
+            <a:lnRef idx="1">
+              <a:schemeClr val="accent1"/>
+            </a:lnRef>
+            <a:fillRef idx="3">
+              <a:schemeClr val="accent1"/>
+            </a:fillRef>
+            <a:effectRef idx="2">
+              <a:schemeClr val="accent1"/>
+            </a:effectRef>
+            <a:fontRef idx="minor">
+              <a:schemeClr val="lt1"/>
+            </a:fontRef>
+          </p:style>
+        </p:sp>
+      </p:grpSp>
+      <p:sp>
+        <p:nvSpPr>
+          <p:cNvPr id="2" name="Title 1"/>
           <p:cNvSpPr>
             <a:spLocks noGrp="1"/>
           </p:cNvSpPr>
@@ -151,15 +675,21 @@
         </p:nvSpPr>
         <p:spPr>
           <a:xfrm>
-            <a:off x="1524000" y="1122363"/>
-            <a:ext cx="9144000" cy="2387600"/>
+            <a:off x="1507067" y="2404534"/>
+            <a:ext cx="7766936" cy="1646302"/>
           </a:xfrm>
         </p:spPr>
         <p:txBody>
-          <a:bodyPr anchor="b"/>
+          <a:bodyPr anchor="b">
+            <a:noAutofit/>
+          </a:bodyPr>
           <a:lstStyle>
-            <a:lvl1pPr algn="ctr">
-              <a:defRPr sz="6000"/>
+            <a:lvl1pPr algn="r">
+              <a:defRPr sz="5400">
+                <a:solidFill>
+                  <a:schemeClr val="accent1"/>
+                </a:solidFill>
+              </a:defRPr>
             </a:lvl1pPr>
           </a:lstStyle>
           <a:p>
@@ -167,19 +697,13 @@
               <a:rPr lang="en-US"/>
               <a:t>Click to edit Master title style</a:t>
             </a:r>
-            <a:endParaRPr lang="en-BE"/>
-          </a:p>
-        </p:txBody>
-      </p:sp>
-      <p:sp>
-        <p:nvSpPr>
-          <p:cNvPr id="3" name="Subtitle 2">
-            <a:extLst>
-              <a:ext uri="{FF2B5EF4-FFF2-40B4-BE49-F238E27FC236}">
-                <a16:creationId xmlns:a16="http://schemas.microsoft.com/office/drawing/2014/main" id="{E9ED8E67-15E8-F9F7-C586-D2F1DCF6E5B0}"/>
-              </a:ext>
-            </a:extLst>
-          </p:cNvPr>
+            <a:endParaRPr lang="en-US" dirty="0"/>
+          </a:p>
+        </p:txBody>
+      </p:sp>
+      <p:sp>
+        <p:nvSpPr>
+          <p:cNvPr id="3" name="Subtitle 2"/>
           <p:cNvSpPr>
             <a:spLocks noGrp="1"/>
           </p:cNvSpPr>
@@ -189,48 +713,103 @@
         </p:nvSpPr>
         <p:spPr>
           <a:xfrm>
-            <a:off x="1524000" y="3602038"/>
-            <a:ext cx="9144000" cy="1655762"/>
+            <a:off x="1507067" y="4050833"/>
+            <a:ext cx="7766936" cy="1096899"/>
           </a:xfrm>
         </p:spPr>
         <p:txBody>
-          <a:bodyPr/>
+          <a:bodyPr anchor="t"/>
           <a:lstStyle>
-            <a:lvl1pPr marL="0" indent="0" algn="ctr">
-              <a:buNone/>
-              <a:defRPr sz="2400"/>
+            <a:lvl1pPr marL="0" indent="0" algn="r">
+              <a:buNone/>
+              <a:defRPr>
+                <a:solidFill>
+                  <a:schemeClr val="tx1">
+                    <a:lumMod val="50000"/>
+                    <a:lumOff val="50000"/>
+                  </a:schemeClr>
+                </a:solidFill>
+              </a:defRPr>
             </a:lvl1pPr>
             <a:lvl2pPr marL="457200" indent="0" algn="ctr">
               <a:buNone/>
-              <a:defRPr sz="2000"/>
+              <a:defRPr>
+                <a:solidFill>
+                  <a:schemeClr val="tx1">
+                    <a:tint val="75000"/>
+                  </a:schemeClr>
+                </a:solidFill>
+              </a:defRPr>
             </a:lvl2pPr>
             <a:lvl3pPr marL="914400" indent="0" algn="ctr">
               <a:buNone/>
-              <a:defRPr sz="1800"/>
+              <a:defRPr>
+                <a:solidFill>
+                  <a:schemeClr val="tx1">
+                    <a:tint val="75000"/>
+                  </a:schemeClr>
+                </a:solidFill>
+              </a:defRPr>
             </a:lvl3pPr>
             <a:lvl4pPr marL="1371600" indent="0" algn="ctr">
               <a:buNone/>
-              <a:defRPr sz="1600"/>
+              <a:defRPr>
+                <a:solidFill>
+                  <a:schemeClr val="tx1">
+                    <a:tint val="75000"/>
+                  </a:schemeClr>
+                </a:solidFill>
+              </a:defRPr>
             </a:lvl4pPr>
             <a:lvl5pPr marL="1828800" indent="0" algn="ctr">
               <a:buNone/>
-              <a:defRPr sz="1600"/>
+              <a:defRPr>
+                <a:solidFill>
+                  <a:schemeClr val="tx1">
+                    <a:tint val="75000"/>
+                  </a:schemeClr>
+                </a:solidFill>
+              </a:defRPr>
             </a:lvl5pPr>
             <a:lvl6pPr marL="2286000" indent="0" algn="ctr">
               <a:buNone/>
-              <a:defRPr sz="1600"/>
+              <a:defRPr>
+                <a:solidFill>
+                  <a:schemeClr val="tx1">
+                    <a:tint val="75000"/>
+                  </a:schemeClr>
+                </a:solidFill>
+              </a:defRPr>
             </a:lvl6pPr>
             <a:lvl7pPr marL="2743200" indent="0" algn="ctr">
               <a:buNone/>
-              <a:defRPr sz="1600"/>
+              <a:defRPr>
+                <a:solidFill>
+                  <a:schemeClr val="tx1">
+                    <a:tint val="75000"/>
+                  </a:schemeClr>
+                </a:solidFill>
+              </a:defRPr>
             </a:lvl7pPr>
             <a:lvl8pPr marL="3200400" indent="0" algn="ctr">
               <a:buNone/>
-              <a:defRPr sz="1600"/>
+              <a:defRPr>
+                <a:solidFill>
+                  <a:schemeClr val="tx1">
+                    <a:tint val="75000"/>
+                  </a:schemeClr>
+                </a:solidFill>
+              </a:defRPr>
             </a:lvl8pPr>
             <a:lvl9pPr marL="3657600" indent="0" algn="ctr">
               <a:buNone/>
-              <a:defRPr sz="1600"/>
+              <a:defRPr>
+                <a:solidFill>
+                  <a:schemeClr val="tx1">
+                    <a:tint val="75000"/>
+                  </a:schemeClr>
+                </a:solidFill>
+              </a:defRPr>
             </a:lvl9pPr>
           </a:lstStyle>
           <a:p>
@@ -238,19 +817,13 @@
               <a:rPr lang="en-US"/>
               <a:t>Click to edit Master subtitle style</a:t>
             </a:r>
-            <a:endParaRPr lang="en-BE"/>
-          </a:p>
-        </p:txBody>
-      </p:sp>
-      <p:sp>
-        <p:nvSpPr>
-          <p:cNvPr id="4" name="Date Placeholder 3">
-            <a:extLst>
-              <a:ext uri="{FF2B5EF4-FFF2-40B4-BE49-F238E27FC236}">
-                <a16:creationId xmlns:a16="http://schemas.microsoft.com/office/drawing/2014/main" id="{8C2C45A2-1F99-5608-6B36-4061D5D67B51}"/>
-              </a:ext>
-            </a:extLst>
-          </p:cNvPr>
+            <a:endParaRPr lang="en-US" dirty="0"/>
+          </a:p>
+        </p:txBody>
+      </p:sp>
+      <p:sp>
+        <p:nvSpPr>
+          <p:cNvPr id="4" name="Date Placeholder 3"/>
           <p:cNvSpPr>
             <a:spLocks noGrp="1"/>
           </p:cNvSpPr>
@@ -265,7 +838,7 @@
           <a:p>
             <a:fld id="{C70E5D01-44FA-40AF-8633-6FC63E8CF416}" type="datetimeFigureOut">
               <a:rPr lang="en-BE" smtClean="0"/>
-              <a:t>10/03/2026</a:t>
+              <a:t>12/03/2026</a:t>
             </a:fld>
             <a:endParaRPr lang="en-BE"/>
           </a:p>
@@ -273,13 +846,7 @@
       </p:sp>
       <p:sp>
         <p:nvSpPr>
-          <p:cNvPr id="5" name="Footer Placeholder 4">
-            <a:extLst>
-              <a:ext uri="{FF2B5EF4-FFF2-40B4-BE49-F238E27FC236}">
-                <a16:creationId xmlns:a16="http://schemas.microsoft.com/office/drawing/2014/main" id="{785D8EF9-6082-30F7-CF11-D6093A3D1C71}"/>
-              </a:ext>
-            </a:extLst>
-          </p:cNvPr>
+          <p:cNvPr id="5" name="Footer Placeholder 4"/>
           <p:cNvSpPr>
             <a:spLocks noGrp="1"/>
           </p:cNvSpPr>
@@ -298,13 +865,7 @@
       </p:sp>
       <p:sp>
         <p:nvSpPr>
-          <p:cNvPr id="6" name="Slide Number Placeholder 5">
-            <a:extLst>
-              <a:ext uri="{FF2B5EF4-FFF2-40B4-BE49-F238E27FC236}">
-                <a16:creationId xmlns:a16="http://schemas.microsoft.com/office/drawing/2014/main" id="{0551B4D1-FCDB-C938-018F-F36433FDF711}"/>
-              </a:ext>
-            </a:extLst>
-          </p:cNvPr>
+          <p:cNvPr id="6" name="Slide Number Placeholder 5"/>
           <p:cNvSpPr>
             <a:spLocks noGrp="1"/>
           </p:cNvSpPr>
@@ -328,7 +889,7 @@
     </p:spTree>
     <p:extLst>
       <p:ext uri="{BB962C8B-B14F-4D97-AF65-F5344CB8AC3E}">
-        <p14:creationId xmlns:p14="http://schemas.microsoft.com/office/powerpoint/2010/main" val="3845718152"/>
+        <p14:creationId xmlns:p14="http://schemas.microsoft.com/office/powerpoint/2010/main" val="2892406175"/>
       </p:ext>
     </p:extLst>
   </p:cSld>
@@ -339,6 +900,1619 @@
 </file>
 
 <file path=ppt/slideLayouts/slideLayout10.xml><?xml version="1.0" encoding="utf-8"?>
+<p:sldLayout xmlns:a="http://schemas.openxmlformats.org/drawingml/2006/main" xmlns:r="http://schemas.openxmlformats.org/officeDocument/2006/relationships" xmlns:p="http://schemas.openxmlformats.org/presentationml/2006/main" preserve="1">
+  <p:cSld name="Title and Caption">
+    <p:spTree>
+      <p:nvGrpSpPr>
+        <p:cNvPr id="1" name=""/>
+        <p:cNvGrpSpPr/>
+        <p:nvPr/>
+      </p:nvGrpSpPr>
+      <p:grpSpPr>
+        <a:xfrm>
+          <a:off x="0" y="0"/>
+          <a:ext cx="0" cy="0"/>
+          <a:chOff x="0" y="0"/>
+          <a:chExt cx="0" cy="0"/>
+        </a:xfrm>
+      </p:grpSpPr>
+      <p:sp>
+        <p:nvSpPr>
+          <p:cNvPr id="2" name="Title 1"/>
+          <p:cNvSpPr>
+            <a:spLocks noGrp="1"/>
+          </p:cNvSpPr>
+          <p:nvPr>
+            <p:ph type="title"/>
+          </p:nvPr>
+        </p:nvSpPr>
+        <p:spPr>
+          <a:xfrm>
+            <a:off x="677335" y="609600"/>
+            <a:ext cx="8596668" cy="3403600"/>
+          </a:xfrm>
+        </p:spPr>
+        <p:txBody>
+          <a:bodyPr anchor="ctr">
+            <a:normAutofit/>
+          </a:bodyPr>
+          <a:lstStyle>
+            <a:lvl1pPr algn="l">
+              <a:defRPr sz="4400" b="0" cap="none"/>
+            </a:lvl1pPr>
+          </a:lstStyle>
+          <a:p>
+            <a:r>
+              <a:rPr lang="en-US"/>
+              <a:t>Click to edit Master title style</a:t>
+            </a:r>
+            <a:endParaRPr lang="en-US" dirty="0"/>
+          </a:p>
+        </p:txBody>
+      </p:sp>
+      <p:sp>
+        <p:nvSpPr>
+          <p:cNvPr id="3" name="Text Placeholder 2"/>
+          <p:cNvSpPr>
+            <a:spLocks noGrp="1"/>
+          </p:cNvSpPr>
+          <p:nvPr>
+            <p:ph type="body" idx="1"/>
+          </p:nvPr>
+        </p:nvSpPr>
+        <p:spPr>
+          <a:xfrm>
+            <a:off x="677335" y="4470400"/>
+            <a:ext cx="8596668" cy="1570962"/>
+          </a:xfrm>
+        </p:spPr>
+        <p:txBody>
+          <a:bodyPr anchor="ctr">
+            <a:normAutofit/>
+          </a:bodyPr>
+          <a:lstStyle>
+            <a:lvl1pPr marL="0" indent="0" algn="l">
+              <a:buNone/>
+              <a:defRPr sz="1800">
+                <a:solidFill>
+                  <a:schemeClr val="tx1">
+                    <a:lumMod val="75000"/>
+                    <a:lumOff val="25000"/>
+                  </a:schemeClr>
+                </a:solidFill>
+              </a:defRPr>
+            </a:lvl1pPr>
+            <a:lvl2pPr marL="457200" indent="0">
+              <a:buNone/>
+              <a:defRPr sz="1800">
+                <a:solidFill>
+                  <a:schemeClr val="tx1">
+                    <a:tint val="75000"/>
+                  </a:schemeClr>
+                </a:solidFill>
+              </a:defRPr>
+            </a:lvl2pPr>
+            <a:lvl3pPr marL="914400" indent="0">
+              <a:buNone/>
+              <a:defRPr sz="1600">
+                <a:solidFill>
+                  <a:schemeClr val="tx1">
+                    <a:tint val="75000"/>
+                  </a:schemeClr>
+                </a:solidFill>
+              </a:defRPr>
+            </a:lvl3pPr>
+            <a:lvl4pPr marL="1371600" indent="0">
+              <a:buNone/>
+              <a:defRPr sz="1400">
+                <a:solidFill>
+                  <a:schemeClr val="tx1">
+                    <a:tint val="75000"/>
+                  </a:schemeClr>
+                </a:solidFill>
+              </a:defRPr>
+            </a:lvl4pPr>
+            <a:lvl5pPr marL="1828800" indent="0">
+              <a:buNone/>
+              <a:defRPr sz="1400">
+                <a:solidFill>
+                  <a:schemeClr val="tx1">
+                    <a:tint val="75000"/>
+                  </a:schemeClr>
+                </a:solidFill>
+              </a:defRPr>
+            </a:lvl5pPr>
+            <a:lvl6pPr marL="2286000" indent="0">
+              <a:buNone/>
+              <a:defRPr sz="1400">
+                <a:solidFill>
+                  <a:schemeClr val="tx1">
+                    <a:tint val="75000"/>
+                  </a:schemeClr>
+                </a:solidFill>
+              </a:defRPr>
+            </a:lvl6pPr>
+            <a:lvl7pPr marL="2743200" indent="0">
+              <a:buNone/>
+              <a:defRPr sz="1400">
+                <a:solidFill>
+                  <a:schemeClr val="tx1">
+                    <a:tint val="75000"/>
+                  </a:schemeClr>
+                </a:solidFill>
+              </a:defRPr>
+            </a:lvl7pPr>
+            <a:lvl8pPr marL="3200400" indent="0">
+              <a:buNone/>
+              <a:defRPr sz="1400">
+                <a:solidFill>
+                  <a:schemeClr val="tx1">
+                    <a:tint val="75000"/>
+                  </a:schemeClr>
+                </a:solidFill>
+              </a:defRPr>
+            </a:lvl8pPr>
+            <a:lvl9pPr marL="3657600" indent="0">
+              <a:buNone/>
+              <a:defRPr sz="1400">
+                <a:solidFill>
+                  <a:schemeClr val="tx1">
+                    <a:tint val="75000"/>
+                  </a:schemeClr>
+                </a:solidFill>
+              </a:defRPr>
+            </a:lvl9pPr>
+          </a:lstStyle>
+          <a:p>
+            <a:pPr lvl="0"/>
+            <a:r>
+              <a:rPr lang="en-US"/>
+              <a:t>Click to edit Master text styles</a:t>
+            </a:r>
+          </a:p>
+        </p:txBody>
+      </p:sp>
+      <p:sp>
+        <p:nvSpPr>
+          <p:cNvPr id="4" name="Date Placeholder 3"/>
+          <p:cNvSpPr>
+            <a:spLocks noGrp="1"/>
+          </p:cNvSpPr>
+          <p:nvPr>
+            <p:ph type="dt" sz="half" idx="10"/>
+          </p:nvPr>
+        </p:nvSpPr>
+        <p:spPr/>
+        <p:txBody>
+          <a:bodyPr/>
+          <a:lstStyle/>
+          <a:p>
+            <a:fld id="{C70E5D01-44FA-40AF-8633-6FC63E8CF416}" type="datetimeFigureOut">
+              <a:rPr lang="en-BE" smtClean="0"/>
+              <a:t>12/03/2026</a:t>
+            </a:fld>
+            <a:endParaRPr lang="en-BE"/>
+          </a:p>
+        </p:txBody>
+      </p:sp>
+      <p:sp>
+        <p:nvSpPr>
+          <p:cNvPr id="5" name="Footer Placeholder 4"/>
+          <p:cNvSpPr>
+            <a:spLocks noGrp="1"/>
+          </p:cNvSpPr>
+          <p:nvPr>
+            <p:ph type="ftr" sz="quarter" idx="11"/>
+          </p:nvPr>
+        </p:nvSpPr>
+        <p:spPr/>
+        <p:txBody>
+          <a:bodyPr/>
+          <a:lstStyle/>
+          <a:p>
+            <a:endParaRPr lang="en-BE"/>
+          </a:p>
+        </p:txBody>
+      </p:sp>
+      <p:sp>
+        <p:nvSpPr>
+          <p:cNvPr id="6" name="Slide Number Placeholder 5"/>
+          <p:cNvSpPr>
+            <a:spLocks noGrp="1"/>
+          </p:cNvSpPr>
+          <p:nvPr>
+            <p:ph type="sldNum" sz="quarter" idx="12"/>
+          </p:nvPr>
+        </p:nvSpPr>
+        <p:spPr/>
+        <p:txBody>
+          <a:bodyPr/>
+          <a:lstStyle/>
+          <a:p>
+            <a:fld id="{C9A2A2B3-125E-4B64-AE22-4736C1C31799}" type="slidenum">
+              <a:rPr lang="en-BE" smtClean="0"/>
+              <a:t>‹#›</a:t>
+            </a:fld>
+            <a:endParaRPr lang="en-BE"/>
+          </a:p>
+        </p:txBody>
+      </p:sp>
+    </p:spTree>
+    <p:extLst>
+      <p:ext uri="{BB962C8B-B14F-4D97-AF65-F5344CB8AC3E}">
+        <p14:creationId xmlns:p14="http://schemas.microsoft.com/office/powerpoint/2010/main" val="1494022256"/>
+      </p:ext>
+    </p:extLst>
+  </p:cSld>
+  <p:clrMapOvr>
+    <a:masterClrMapping/>
+  </p:clrMapOvr>
+</p:sldLayout>
+</file>
+
+<file path=ppt/slideLayouts/slideLayout11.xml><?xml version="1.0" encoding="utf-8"?>
+<p:sldLayout xmlns:a="http://schemas.openxmlformats.org/drawingml/2006/main" xmlns:r="http://schemas.openxmlformats.org/officeDocument/2006/relationships" xmlns:p="http://schemas.openxmlformats.org/presentationml/2006/main" preserve="1">
+  <p:cSld name="Quote with Caption">
+    <p:spTree>
+      <p:nvGrpSpPr>
+        <p:cNvPr id="1" name=""/>
+        <p:cNvGrpSpPr/>
+        <p:nvPr/>
+      </p:nvGrpSpPr>
+      <p:grpSpPr>
+        <a:xfrm>
+          <a:off x="0" y="0"/>
+          <a:ext cx="0" cy="0"/>
+          <a:chOff x="0" y="0"/>
+          <a:chExt cx="0" cy="0"/>
+        </a:xfrm>
+      </p:grpSpPr>
+      <p:sp>
+        <p:nvSpPr>
+          <p:cNvPr id="2" name="Title 1"/>
+          <p:cNvSpPr>
+            <a:spLocks noGrp="1"/>
+          </p:cNvSpPr>
+          <p:nvPr>
+            <p:ph type="title"/>
+          </p:nvPr>
+        </p:nvSpPr>
+        <p:spPr>
+          <a:xfrm>
+            <a:off x="931334" y="609600"/>
+            <a:ext cx="8094134" cy="3022600"/>
+          </a:xfrm>
+        </p:spPr>
+        <p:txBody>
+          <a:bodyPr anchor="ctr">
+            <a:normAutofit/>
+          </a:bodyPr>
+          <a:lstStyle>
+            <a:lvl1pPr algn="l">
+              <a:defRPr sz="4400" b="0" cap="none"/>
+            </a:lvl1pPr>
+          </a:lstStyle>
+          <a:p>
+            <a:r>
+              <a:rPr lang="en-US"/>
+              <a:t>Click to edit Master title style</a:t>
+            </a:r>
+            <a:endParaRPr lang="en-US" dirty="0"/>
+          </a:p>
+        </p:txBody>
+      </p:sp>
+      <p:sp>
+        <p:nvSpPr>
+          <p:cNvPr id="23" name="Text Placeholder 9"/>
+          <p:cNvSpPr>
+            <a:spLocks noGrp="1"/>
+          </p:cNvSpPr>
+          <p:nvPr>
+            <p:ph type="body" sz="quarter" idx="13"/>
+          </p:nvPr>
+        </p:nvSpPr>
+        <p:spPr>
+          <a:xfrm>
+            <a:off x="1366139" y="3632200"/>
+            <a:ext cx="7224524" cy="381000"/>
+          </a:xfrm>
+        </p:spPr>
+        <p:txBody>
+          <a:bodyPr anchor="ctr">
+            <a:noAutofit/>
+          </a:bodyPr>
+          <a:lstStyle>
+            <a:lvl1pPr marL="0" indent="0">
+              <a:buFontTx/>
+              <a:buNone/>
+              <a:defRPr sz="1600">
+                <a:solidFill>
+                  <a:schemeClr val="tx1">
+                    <a:lumMod val="50000"/>
+                    <a:lumOff val="50000"/>
+                  </a:schemeClr>
+                </a:solidFill>
+              </a:defRPr>
+            </a:lvl1pPr>
+            <a:lvl2pPr marL="457200" indent="0">
+              <a:buFontTx/>
+              <a:buNone/>
+              <a:defRPr/>
+            </a:lvl2pPr>
+            <a:lvl3pPr marL="914400" indent="0">
+              <a:buFontTx/>
+              <a:buNone/>
+              <a:defRPr/>
+            </a:lvl3pPr>
+            <a:lvl4pPr marL="1371600" indent="0">
+              <a:buFontTx/>
+              <a:buNone/>
+              <a:defRPr/>
+            </a:lvl4pPr>
+            <a:lvl5pPr marL="1828800" indent="0">
+              <a:buFontTx/>
+              <a:buNone/>
+              <a:defRPr/>
+            </a:lvl5pPr>
+          </a:lstStyle>
+          <a:p>
+            <a:pPr lvl="0"/>
+            <a:r>
+              <a:rPr lang="en-US"/>
+              <a:t>Click to edit Master text styles</a:t>
+            </a:r>
+          </a:p>
+        </p:txBody>
+      </p:sp>
+      <p:sp>
+        <p:nvSpPr>
+          <p:cNvPr id="3" name="Text Placeholder 2"/>
+          <p:cNvSpPr>
+            <a:spLocks noGrp="1"/>
+          </p:cNvSpPr>
+          <p:nvPr>
+            <p:ph type="body" idx="1"/>
+          </p:nvPr>
+        </p:nvSpPr>
+        <p:spPr>
+          <a:xfrm>
+            <a:off x="677335" y="4470400"/>
+            <a:ext cx="8596668" cy="1570962"/>
+          </a:xfrm>
+        </p:spPr>
+        <p:txBody>
+          <a:bodyPr anchor="ctr">
+            <a:normAutofit/>
+          </a:bodyPr>
+          <a:lstStyle>
+            <a:lvl1pPr marL="0" indent="0" algn="l">
+              <a:buNone/>
+              <a:defRPr sz="1800">
+                <a:solidFill>
+                  <a:schemeClr val="tx1">
+                    <a:lumMod val="75000"/>
+                    <a:lumOff val="25000"/>
+                  </a:schemeClr>
+                </a:solidFill>
+              </a:defRPr>
+            </a:lvl1pPr>
+            <a:lvl2pPr marL="457200" indent="0">
+              <a:buNone/>
+              <a:defRPr sz="1800">
+                <a:solidFill>
+                  <a:schemeClr val="tx1">
+                    <a:tint val="75000"/>
+                  </a:schemeClr>
+                </a:solidFill>
+              </a:defRPr>
+            </a:lvl2pPr>
+            <a:lvl3pPr marL="914400" indent="0">
+              <a:buNone/>
+              <a:defRPr sz="1600">
+                <a:solidFill>
+                  <a:schemeClr val="tx1">
+                    <a:tint val="75000"/>
+                  </a:schemeClr>
+                </a:solidFill>
+              </a:defRPr>
+            </a:lvl3pPr>
+            <a:lvl4pPr marL="1371600" indent="0">
+              <a:buNone/>
+              <a:defRPr sz="1400">
+                <a:solidFill>
+                  <a:schemeClr val="tx1">
+                    <a:tint val="75000"/>
+                  </a:schemeClr>
+                </a:solidFill>
+              </a:defRPr>
+            </a:lvl4pPr>
+            <a:lvl5pPr marL="1828800" indent="0">
+              <a:buNone/>
+              <a:defRPr sz="1400">
+                <a:solidFill>
+                  <a:schemeClr val="tx1">
+                    <a:tint val="75000"/>
+                  </a:schemeClr>
+                </a:solidFill>
+              </a:defRPr>
+            </a:lvl5pPr>
+            <a:lvl6pPr marL="2286000" indent="0">
+              <a:buNone/>
+              <a:defRPr sz="1400">
+                <a:solidFill>
+                  <a:schemeClr val="tx1">
+                    <a:tint val="75000"/>
+                  </a:schemeClr>
+                </a:solidFill>
+              </a:defRPr>
+            </a:lvl6pPr>
+            <a:lvl7pPr marL="2743200" indent="0">
+              <a:buNone/>
+              <a:defRPr sz="1400">
+                <a:solidFill>
+                  <a:schemeClr val="tx1">
+                    <a:tint val="75000"/>
+                  </a:schemeClr>
+                </a:solidFill>
+              </a:defRPr>
+            </a:lvl7pPr>
+            <a:lvl8pPr marL="3200400" indent="0">
+              <a:buNone/>
+              <a:defRPr sz="1400">
+                <a:solidFill>
+                  <a:schemeClr val="tx1">
+                    <a:tint val="75000"/>
+                  </a:schemeClr>
+                </a:solidFill>
+              </a:defRPr>
+            </a:lvl8pPr>
+            <a:lvl9pPr marL="3657600" indent="0">
+              <a:buNone/>
+              <a:defRPr sz="1400">
+                <a:solidFill>
+                  <a:schemeClr val="tx1">
+                    <a:tint val="75000"/>
+                  </a:schemeClr>
+                </a:solidFill>
+              </a:defRPr>
+            </a:lvl9pPr>
+          </a:lstStyle>
+          <a:p>
+            <a:pPr lvl="0"/>
+            <a:r>
+              <a:rPr lang="en-US"/>
+              <a:t>Click to edit Master text styles</a:t>
+            </a:r>
+          </a:p>
+        </p:txBody>
+      </p:sp>
+      <p:sp>
+        <p:nvSpPr>
+          <p:cNvPr id="4" name="Date Placeholder 3"/>
+          <p:cNvSpPr>
+            <a:spLocks noGrp="1"/>
+          </p:cNvSpPr>
+          <p:nvPr>
+            <p:ph type="dt" sz="half" idx="10"/>
+          </p:nvPr>
+        </p:nvSpPr>
+        <p:spPr/>
+        <p:txBody>
+          <a:bodyPr/>
+          <a:lstStyle/>
+          <a:p>
+            <a:fld id="{C70E5D01-44FA-40AF-8633-6FC63E8CF416}" type="datetimeFigureOut">
+              <a:rPr lang="en-BE" smtClean="0"/>
+              <a:t>12/03/2026</a:t>
+            </a:fld>
+            <a:endParaRPr lang="en-BE"/>
+          </a:p>
+        </p:txBody>
+      </p:sp>
+      <p:sp>
+        <p:nvSpPr>
+          <p:cNvPr id="5" name="Footer Placeholder 4"/>
+          <p:cNvSpPr>
+            <a:spLocks noGrp="1"/>
+          </p:cNvSpPr>
+          <p:nvPr>
+            <p:ph type="ftr" sz="quarter" idx="11"/>
+          </p:nvPr>
+        </p:nvSpPr>
+        <p:spPr/>
+        <p:txBody>
+          <a:bodyPr/>
+          <a:lstStyle/>
+          <a:p>
+            <a:endParaRPr lang="en-BE"/>
+          </a:p>
+        </p:txBody>
+      </p:sp>
+      <p:sp>
+        <p:nvSpPr>
+          <p:cNvPr id="6" name="Slide Number Placeholder 5"/>
+          <p:cNvSpPr>
+            <a:spLocks noGrp="1"/>
+          </p:cNvSpPr>
+          <p:nvPr>
+            <p:ph type="sldNum" sz="quarter" idx="12"/>
+          </p:nvPr>
+        </p:nvSpPr>
+        <p:spPr/>
+        <p:txBody>
+          <a:bodyPr/>
+          <a:lstStyle/>
+          <a:p>
+            <a:fld id="{C9A2A2B3-125E-4B64-AE22-4736C1C31799}" type="slidenum">
+              <a:rPr lang="en-BE" smtClean="0"/>
+              <a:t>‹#›</a:t>
+            </a:fld>
+            <a:endParaRPr lang="en-BE"/>
+          </a:p>
+        </p:txBody>
+      </p:sp>
+      <p:sp>
+        <p:nvSpPr>
+          <p:cNvPr id="20" name="TextBox 19"/>
+          <p:cNvSpPr txBox="1"/>
+          <p:nvPr/>
+        </p:nvSpPr>
+        <p:spPr>
+          <a:xfrm>
+            <a:off x="541870" y="790378"/>
+            <a:ext cx="609600" cy="584776"/>
+          </a:xfrm>
+          <a:prstGeom prst="rect">
+            <a:avLst/>
+          </a:prstGeom>
+        </p:spPr>
+        <p:txBody>
+          <a:bodyPr vert="horz" lIns="91440" tIns="45720" rIns="91440" bIns="45720" rtlCol="0" anchor="ctr">
+            <a:noAutofit/>
+          </a:bodyPr>
+          <a:lstStyle/>
+          <a:p>
+            <a:pPr lvl="0"/>
+            <a:r>
+              <a:rPr lang="en-US" sz="8000" baseline="0" dirty="0">
+                <a:ln w="3175" cmpd="sng">
+                  <a:noFill/>
+                </a:ln>
+                <a:solidFill>
+                  <a:schemeClr val="accent1">
+                    <a:lumMod val="60000"/>
+                    <a:lumOff val="40000"/>
+                  </a:schemeClr>
+                </a:solidFill>
+                <a:effectLst/>
+                <a:latin typeface="Arial"/>
+              </a:rPr>
+              <a:t>“</a:t>
+            </a:r>
+          </a:p>
+        </p:txBody>
+      </p:sp>
+      <p:sp>
+        <p:nvSpPr>
+          <p:cNvPr id="22" name="TextBox 21"/>
+          <p:cNvSpPr txBox="1"/>
+          <p:nvPr/>
+        </p:nvSpPr>
+        <p:spPr>
+          <a:xfrm>
+            <a:off x="8893011" y="2886556"/>
+            <a:ext cx="609600" cy="584776"/>
+          </a:xfrm>
+          <a:prstGeom prst="rect">
+            <a:avLst/>
+          </a:prstGeom>
+        </p:spPr>
+        <p:txBody>
+          <a:bodyPr vert="horz" lIns="91440" tIns="45720" rIns="91440" bIns="45720" rtlCol="0" anchor="ctr">
+            <a:noAutofit/>
+          </a:bodyPr>
+          <a:lstStyle/>
+          <a:p>
+            <a:pPr lvl="0"/>
+            <a:r>
+              <a:rPr lang="en-US" sz="8000" baseline="0" dirty="0">
+                <a:ln w="3175" cmpd="sng">
+                  <a:noFill/>
+                </a:ln>
+                <a:solidFill>
+                  <a:schemeClr val="accent1">
+                    <a:lumMod val="60000"/>
+                    <a:lumOff val="40000"/>
+                  </a:schemeClr>
+                </a:solidFill>
+                <a:latin typeface="Arial"/>
+              </a:rPr>
+              <a:t>”</a:t>
+            </a:r>
+            <a:endParaRPr lang="en-US" dirty="0">
+              <a:solidFill>
+                <a:schemeClr val="accent1">
+                  <a:lumMod val="60000"/>
+                  <a:lumOff val="40000"/>
+                </a:schemeClr>
+              </a:solidFill>
+              <a:latin typeface="Arial"/>
+            </a:endParaRPr>
+          </a:p>
+        </p:txBody>
+      </p:sp>
+    </p:spTree>
+    <p:extLst>
+      <p:ext uri="{BB962C8B-B14F-4D97-AF65-F5344CB8AC3E}">
+        <p14:creationId xmlns:p14="http://schemas.microsoft.com/office/powerpoint/2010/main" val="2725878842"/>
+      </p:ext>
+    </p:extLst>
+  </p:cSld>
+  <p:clrMapOvr>
+    <a:masterClrMapping/>
+  </p:clrMapOvr>
+</p:sldLayout>
+</file>
+
+<file path=ppt/slideLayouts/slideLayout12.xml><?xml version="1.0" encoding="utf-8"?>
+<p:sldLayout xmlns:a="http://schemas.openxmlformats.org/drawingml/2006/main" xmlns:r="http://schemas.openxmlformats.org/officeDocument/2006/relationships" xmlns:p="http://schemas.openxmlformats.org/presentationml/2006/main" preserve="1">
+  <p:cSld name="Name Card">
+    <p:spTree>
+      <p:nvGrpSpPr>
+        <p:cNvPr id="1" name=""/>
+        <p:cNvGrpSpPr/>
+        <p:nvPr/>
+      </p:nvGrpSpPr>
+      <p:grpSpPr>
+        <a:xfrm>
+          <a:off x="0" y="0"/>
+          <a:ext cx="0" cy="0"/>
+          <a:chOff x="0" y="0"/>
+          <a:chExt cx="0" cy="0"/>
+        </a:xfrm>
+      </p:grpSpPr>
+      <p:sp>
+        <p:nvSpPr>
+          <p:cNvPr id="2" name="Title 1"/>
+          <p:cNvSpPr>
+            <a:spLocks noGrp="1"/>
+          </p:cNvSpPr>
+          <p:nvPr>
+            <p:ph type="title"/>
+          </p:nvPr>
+        </p:nvSpPr>
+        <p:spPr>
+          <a:xfrm>
+            <a:off x="677335" y="1931988"/>
+            <a:ext cx="8596668" cy="2595460"/>
+          </a:xfrm>
+        </p:spPr>
+        <p:txBody>
+          <a:bodyPr anchor="b">
+            <a:normAutofit/>
+          </a:bodyPr>
+          <a:lstStyle>
+            <a:lvl1pPr algn="l">
+              <a:defRPr sz="4400" b="0" cap="none"/>
+            </a:lvl1pPr>
+          </a:lstStyle>
+          <a:p>
+            <a:r>
+              <a:rPr lang="en-US"/>
+              <a:t>Click to edit Master title style</a:t>
+            </a:r>
+            <a:endParaRPr lang="en-US" dirty="0"/>
+          </a:p>
+        </p:txBody>
+      </p:sp>
+      <p:sp>
+        <p:nvSpPr>
+          <p:cNvPr id="3" name="Text Placeholder 2"/>
+          <p:cNvSpPr>
+            <a:spLocks noGrp="1"/>
+          </p:cNvSpPr>
+          <p:nvPr>
+            <p:ph type="body" idx="1"/>
+          </p:nvPr>
+        </p:nvSpPr>
+        <p:spPr>
+          <a:xfrm>
+            <a:off x="677335" y="4527448"/>
+            <a:ext cx="8596668" cy="1513914"/>
+          </a:xfrm>
+        </p:spPr>
+        <p:txBody>
+          <a:bodyPr anchor="t">
+            <a:normAutofit/>
+          </a:bodyPr>
+          <a:lstStyle>
+            <a:lvl1pPr marL="0" indent="0" algn="l">
+              <a:buNone/>
+              <a:defRPr sz="1800">
+                <a:solidFill>
+                  <a:schemeClr val="tx1">
+                    <a:lumMod val="75000"/>
+                    <a:lumOff val="25000"/>
+                  </a:schemeClr>
+                </a:solidFill>
+              </a:defRPr>
+            </a:lvl1pPr>
+            <a:lvl2pPr marL="457200" indent="0">
+              <a:buNone/>
+              <a:defRPr sz="1800">
+                <a:solidFill>
+                  <a:schemeClr val="tx1">
+                    <a:tint val="75000"/>
+                  </a:schemeClr>
+                </a:solidFill>
+              </a:defRPr>
+            </a:lvl2pPr>
+            <a:lvl3pPr marL="914400" indent="0">
+              <a:buNone/>
+              <a:defRPr sz="1600">
+                <a:solidFill>
+                  <a:schemeClr val="tx1">
+                    <a:tint val="75000"/>
+                  </a:schemeClr>
+                </a:solidFill>
+              </a:defRPr>
+            </a:lvl3pPr>
+            <a:lvl4pPr marL="1371600" indent="0">
+              <a:buNone/>
+              <a:defRPr sz="1400">
+                <a:solidFill>
+                  <a:schemeClr val="tx1">
+                    <a:tint val="75000"/>
+                  </a:schemeClr>
+                </a:solidFill>
+              </a:defRPr>
+            </a:lvl4pPr>
+            <a:lvl5pPr marL="1828800" indent="0">
+              <a:buNone/>
+              <a:defRPr sz="1400">
+                <a:solidFill>
+                  <a:schemeClr val="tx1">
+                    <a:tint val="75000"/>
+                  </a:schemeClr>
+                </a:solidFill>
+              </a:defRPr>
+            </a:lvl5pPr>
+            <a:lvl6pPr marL="2286000" indent="0">
+              <a:buNone/>
+              <a:defRPr sz="1400">
+                <a:solidFill>
+                  <a:schemeClr val="tx1">
+                    <a:tint val="75000"/>
+                  </a:schemeClr>
+                </a:solidFill>
+              </a:defRPr>
+            </a:lvl6pPr>
+            <a:lvl7pPr marL="2743200" indent="0">
+              <a:buNone/>
+              <a:defRPr sz="1400">
+                <a:solidFill>
+                  <a:schemeClr val="tx1">
+                    <a:tint val="75000"/>
+                  </a:schemeClr>
+                </a:solidFill>
+              </a:defRPr>
+            </a:lvl7pPr>
+            <a:lvl8pPr marL="3200400" indent="0">
+              <a:buNone/>
+              <a:defRPr sz="1400">
+                <a:solidFill>
+                  <a:schemeClr val="tx1">
+                    <a:tint val="75000"/>
+                  </a:schemeClr>
+                </a:solidFill>
+              </a:defRPr>
+            </a:lvl8pPr>
+            <a:lvl9pPr marL="3657600" indent="0">
+              <a:buNone/>
+              <a:defRPr sz="1400">
+                <a:solidFill>
+                  <a:schemeClr val="tx1">
+                    <a:tint val="75000"/>
+                  </a:schemeClr>
+                </a:solidFill>
+              </a:defRPr>
+            </a:lvl9pPr>
+          </a:lstStyle>
+          <a:p>
+            <a:pPr lvl="0"/>
+            <a:r>
+              <a:rPr lang="en-US"/>
+              <a:t>Click to edit Master text styles</a:t>
+            </a:r>
+          </a:p>
+        </p:txBody>
+      </p:sp>
+      <p:sp>
+        <p:nvSpPr>
+          <p:cNvPr id="4" name="Date Placeholder 3"/>
+          <p:cNvSpPr>
+            <a:spLocks noGrp="1"/>
+          </p:cNvSpPr>
+          <p:nvPr>
+            <p:ph type="dt" sz="half" idx="10"/>
+          </p:nvPr>
+        </p:nvSpPr>
+        <p:spPr/>
+        <p:txBody>
+          <a:bodyPr/>
+          <a:lstStyle/>
+          <a:p>
+            <a:fld id="{C70E5D01-44FA-40AF-8633-6FC63E8CF416}" type="datetimeFigureOut">
+              <a:rPr lang="en-BE" smtClean="0"/>
+              <a:t>12/03/2026</a:t>
+            </a:fld>
+            <a:endParaRPr lang="en-BE"/>
+          </a:p>
+        </p:txBody>
+      </p:sp>
+      <p:sp>
+        <p:nvSpPr>
+          <p:cNvPr id="5" name="Footer Placeholder 4"/>
+          <p:cNvSpPr>
+            <a:spLocks noGrp="1"/>
+          </p:cNvSpPr>
+          <p:nvPr>
+            <p:ph type="ftr" sz="quarter" idx="11"/>
+          </p:nvPr>
+        </p:nvSpPr>
+        <p:spPr/>
+        <p:txBody>
+          <a:bodyPr/>
+          <a:lstStyle/>
+          <a:p>
+            <a:endParaRPr lang="en-BE"/>
+          </a:p>
+        </p:txBody>
+      </p:sp>
+      <p:sp>
+        <p:nvSpPr>
+          <p:cNvPr id="6" name="Slide Number Placeholder 5"/>
+          <p:cNvSpPr>
+            <a:spLocks noGrp="1"/>
+          </p:cNvSpPr>
+          <p:nvPr>
+            <p:ph type="sldNum" sz="quarter" idx="12"/>
+          </p:nvPr>
+        </p:nvSpPr>
+        <p:spPr/>
+        <p:txBody>
+          <a:bodyPr/>
+          <a:lstStyle/>
+          <a:p>
+            <a:fld id="{C9A2A2B3-125E-4B64-AE22-4736C1C31799}" type="slidenum">
+              <a:rPr lang="en-BE" smtClean="0"/>
+              <a:t>‹#›</a:t>
+            </a:fld>
+            <a:endParaRPr lang="en-BE"/>
+          </a:p>
+        </p:txBody>
+      </p:sp>
+    </p:spTree>
+    <p:extLst>
+      <p:ext uri="{BB962C8B-B14F-4D97-AF65-F5344CB8AC3E}">
+        <p14:creationId xmlns:p14="http://schemas.microsoft.com/office/powerpoint/2010/main" val="1715946310"/>
+      </p:ext>
+    </p:extLst>
+  </p:cSld>
+  <p:clrMapOvr>
+    <a:masterClrMapping/>
+  </p:clrMapOvr>
+</p:sldLayout>
+</file>
+
+<file path=ppt/slideLayouts/slideLayout13.xml><?xml version="1.0" encoding="utf-8"?>
+<p:sldLayout xmlns:a="http://schemas.openxmlformats.org/drawingml/2006/main" xmlns:r="http://schemas.openxmlformats.org/officeDocument/2006/relationships" xmlns:p="http://schemas.openxmlformats.org/presentationml/2006/main" preserve="1">
+  <p:cSld name="Quote Name Card">
+    <p:spTree>
+      <p:nvGrpSpPr>
+        <p:cNvPr id="1" name=""/>
+        <p:cNvGrpSpPr/>
+        <p:nvPr/>
+      </p:nvGrpSpPr>
+      <p:grpSpPr>
+        <a:xfrm>
+          <a:off x="0" y="0"/>
+          <a:ext cx="0" cy="0"/>
+          <a:chOff x="0" y="0"/>
+          <a:chExt cx="0" cy="0"/>
+        </a:xfrm>
+      </p:grpSpPr>
+      <p:sp>
+        <p:nvSpPr>
+          <p:cNvPr id="2" name="Title 1"/>
+          <p:cNvSpPr>
+            <a:spLocks noGrp="1"/>
+          </p:cNvSpPr>
+          <p:nvPr>
+            <p:ph type="title"/>
+          </p:nvPr>
+        </p:nvSpPr>
+        <p:spPr>
+          <a:xfrm>
+            <a:off x="931334" y="609600"/>
+            <a:ext cx="8094134" cy="3022600"/>
+          </a:xfrm>
+        </p:spPr>
+        <p:txBody>
+          <a:bodyPr anchor="ctr">
+            <a:normAutofit/>
+          </a:bodyPr>
+          <a:lstStyle>
+            <a:lvl1pPr algn="l">
+              <a:defRPr sz="4400" b="0" cap="none"/>
+            </a:lvl1pPr>
+          </a:lstStyle>
+          <a:p>
+            <a:r>
+              <a:rPr lang="en-US"/>
+              <a:t>Click to edit Master title style</a:t>
+            </a:r>
+            <a:endParaRPr lang="en-US" dirty="0"/>
+          </a:p>
+        </p:txBody>
+      </p:sp>
+      <p:sp>
+        <p:nvSpPr>
+          <p:cNvPr id="23" name="Text Placeholder 9"/>
+          <p:cNvSpPr>
+            <a:spLocks noGrp="1"/>
+          </p:cNvSpPr>
+          <p:nvPr>
+            <p:ph type="body" sz="quarter" idx="13"/>
+          </p:nvPr>
+        </p:nvSpPr>
+        <p:spPr>
+          <a:xfrm>
+            <a:off x="677332" y="4013200"/>
+            <a:ext cx="8596669" cy="514248"/>
+          </a:xfrm>
+        </p:spPr>
+        <p:txBody>
+          <a:bodyPr anchor="b">
+            <a:noAutofit/>
+          </a:bodyPr>
+          <a:lstStyle>
+            <a:lvl1pPr marL="0" indent="0">
+              <a:buFontTx/>
+              <a:buNone/>
+              <a:defRPr sz="2400">
+                <a:solidFill>
+                  <a:schemeClr val="tx1">
+                    <a:lumMod val="75000"/>
+                    <a:lumOff val="25000"/>
+                  </a:schemeClr>
+                </a:solidFill>
+              </a:defRPr>
+            </a:lvl1pPr>
+            <a:lvl2pPr marL="457200" indent="0">
+              <a:buFontTx/>
+              <a:buNone/>
+              <a:defRPr/>
+            </a:lvl2pPr>
+            <a:lvl3pPr marL="914400" indent="0">
+              <a:buFontTx/>
+              <a:buNone/>
+              <a:defRPr/>
+            </a:lvl3pPr>
+            <a:lvl4pPr marL="1371600" indent="0">
+              <a:buFontTx/>
+              <a:buNone/>
+              <a:defRPr/>
+            </a:lvl4pPr>
+            <a:lvl5pPr marL="1828800" indent="0">
+              <a:buFontTx/>
+              <a:buNone/>
+              <a:defRPr/>
+            </a:lvl5pPr>
+          </a:lstStyle>
+          <a:p>
+            <a:pPr lvl="0"/>
+            <a:r>
+              <a:rPr lang="en-US"/>
+              <a:t>Click to edit Master text styles</a:t>
+            </a:r>
+          </a:p>
+        </p:txBody>
+      </p:sp>
+      <p:sp>
+        <p:nvSpPr>
+          <p:cNvPr id="3" name="Text Placeholder 2"/>
+          <p:cNvSpPr>
+            <a:spLocks noGrp="1"/>
+          </p:cNvSpPr>
+          <p:nvPr>
+            <p:ph type="body" idx="1"/>
+          </p:nvPr>
+        </p:nvSpPr>
+        <p:spPr>
+          <a:xfrm>
+            <a:off x="677335" y="4527448"/>
+            <a:ext cx="8596668" cy="1513914"/>
+          </a:xfrm>
+        </p:spPr>
+        <p:txBody>
+          <a:bodyPr anchor="t">
+            <a:normAutofit/>
+          </a:bodyPr>
+          <a:lstStyle>
+            <a:lvl1pPr marL="0" indent="0" algn="l">
+              <a:buNone/>
+              <a:defRPr sz="1800">
+                <a:solidFill>
+                  <a:schemeClr val="tx1">
+                    <a:lumMod val="50000"/>
+                    <a:lumOff val="50000"/>
+                  </a:schemeClr>
+                </a:solidFill>
+              </a:defRPr>
+            </a:lvl1pPr>
+            <a:lvl2pPr marL="457200" indent="0">
+              <a:buNone/>
+              <a:defRPr sz="1800">
+                <a:solidFill>
+                  <a:schemeClr val="tx1">
+                    <a:tint val="75000"/>
+                  </a:schemeClr>
+                </a:solidFill>
+              </a:defRPr>
+            </a:lvl2pPr>
+            <a:lvl3pPr marL="914400" indent="0">
+              <a:buNone/>
+              <a:defRPr sz="1600">
+                <a:solidFill>
+                  <a:schemeClr val="tx1">
+                    <a:tint val="75000"/>
+                  </a:schemeClr>
+                </a:solidFill>
+              </a:defRPr>
+            </a:lvl3pPr>
+            <a:lvl4pPr marL="1371600" indent="0">
+              <a:buNone/>
+              <a:defRPr sz="1400">
+                <a:solidFill>
+                  <a:schemeClr val="tx1">
+                    <a:tint val="75000"/>
+                  </a:schemeClr>
+                </a:solidFill>
+              </a:defRPr>
+            </a:lvl4pPr>
+            <a:lvl5pPr marL="1828800" indent="0">
+              <a:buNone/>
+              <a:defRPr sz="1400">
+                <a:solidFill>
+                  <a:schemeClr val="tx1">
+                    <a:tint val="75000"/>
+                  </a:schemeClr>
+                </a:solidFill>
+              </a:defRPr>
+            </a:lvl5pPr>
+            <a:lvl6pPr marL="2286000" indent="0">
+              <a:buNone/>
+              <a:defRPr sz="1400">
+                <a:solidFill>
+                  <a:schemeClr val="tx1">
+                    <a:tint val="75000"/>
+                  </a:schemeClr>
+                </a:solidFill>
+              </a:defRPr>
+            </a:lvl6pPr>
+            <a:lvl7pPr marL="2743200" indent="0">
+              <a:buNone/>
+              <a:defRPr sz="1400">
+                <a:solidFill>
+                  <a:schemeClr val="tx1">
+                    <a:tint val="75000"/>
+                  </a:schemeClr>
+                </a:solidFill>
+              </a:defRPr>
+            </a:lvl7pPr>
+            <a:lvl8pPr marL="3200400" indent="0">
+              <a:buNone/>
+              <a:defRPr sz="1400">
+                <a:solidFill>
+                  <a:schemeClr val="tx1">
+                    <a:tint val="75000"/>
+                  </a:schemeClr>
+                </a:solidFill>
+              </a:defRPr>
+            </a:lvl8pPr>
+            <a:lvl9pPr marL="3657600" indent="0">
+              <a:buNone/>
+              <a:defRPr sz="1400">
+                <a:solidFill>
+                  <a:schemeClr val="tx1">
+                    <a:tint val="75000"/>
+                  </a:schemeClr>
+                </a:solidFill>
+              </a:defRPr>
+            </a:lvl9pPr>
+          </a:lstStyle>
+          <a:p>
+            <a:pPr lvl="0"/>
+            <a:r>
+              <a:rPr lang="en-US"/>
+              <a:t>Click to edit Master text styles</a:t>
+            </a:r>
+          </a:p>
+        </p:txBody>
+      </p:sp>
+      <p:sp>
+        <p:nvSpPr>
+          <p:cNvPr id="4" name="Date Placeholder 3"/>
+          <p:cNvSpPr>
+            <a:spLocks noGrp="1"/>
+          </p:cNvSpPr>
+          <p:nvPr>
+            <p:ph type="dt" sz="half" idx="10"/>
+          </p:nvPr>
+        </p:nvSpPr>
+        <p:spPr/>
+        <p:txBody>
+          <a:bodyPr/>
+          <a:lstStyle/>
+          <a:p>
+            <a:fld id="{C70E5D01-44FA-40AF-8633-6FC63E8CF416}" type="datetimeFigureOut">
+              <a:rPr lang="en-BE" smtClean="0"/>
+              <a:t>12/03/2026</a:t>
+            </a:fld>
+            <a:endParaRPr lang="en-BE"/>
+          </a:p>
+        </p:txBody>
+      </p:sp>
+      <p:sp>
+        <p:nvSpPr>
+          <p:cNvPr id="5" name="Footer Placeholder 4"/>
+          <p:cNvSpPr>
+            <a:spLocks noGrp="1"/>
+          </p:cNvSpPr>
+          <p:nvPr>
+            <p:ph type="ftr" sz="quarter" idx="11"/>
+          </p:nvPr>
+        </p:nvSpPr>
+        <p:spPr/>
+        <p:txBody>
+          <a:bodyPr/>
+          <a:lstStyle/>
+          <a:p>
+            <a:endParaRPr lang="en-BE"/>
+          </a:p>
+        </p:txBody>
+      </p:sp>
+      <p:sp>
+        <p:nvSpPr>
+          <p:cNvPr id="6" name="Slide Number Placeholder 5"/>
+          <p:cNvSpPr>
+            <a:spLocks noGrp="1"/>
+          </p:cNvSpPr>
+          <p:nvPr>
+            <p:ph type="sldNum" sz="quarter" idx="12"/>
+          </p:nvPr>
+        </p:nvSpPr>
+        <p:spPr/>
+        <p:txBody>
+          <a:bodyPr/>
+          <a:lstStyle/>
+          <a:p>
+            <a:fld id="{C9A2A2B3-125E-4B64-AE22-4736C1C31799}" type="slidenum">
+              <a:rPr lang="en-BE" smtClean="0"/>
+              <a:t>‹#›</a:t>
+            </a:fld>
+            <a:endParaRPr lang="en-BE"/>
+          </a:p>
+        </p:txBody>
+      </p:sp>
+      <p:sp>
+        <p:nvSpPr>
+          <p:cNvPr id="24" name="TextBox 23"/>
+          <p:cNvSpPr txBox="1"/>
+          <p:nvPr/>
+        </p:nvSpPr>
+        <p:spPr>
+          <a:xfrm>
+            <a:off x="541870" y="790378"/>
+            <a:ext cx="609600" cy="584776"/>
+          </a:xfrm>
+          <a:prstGeom prst="rect">
+            <a:avLst/>
+          </a:prstGeom>
+        </p:spPr>
+        <p:txBody>
+          <a:bodyPr vert="horz" lIns="91440" tIns="45720" rIns="91440" bIns="45720" rtlCol="0" anchor="ctr">
+            <a:noAutofit/>
+          </a:bodyPr>
+          <a:lstStyle/>
+          <a:p>
+            <a:pPr lvl="0"/>
+            <a:r>
+              <a:rPr lang="en-US" sz="8000" baseline="0" dirty="0">
+                <a:ln w="3175" cmpd="sng">
+                  <a:noFill/>
+                </a:ln>
+                <a:solidFill>
+                  <a:schemeClr val="accent1">
+                    <a:lumMod val="60000"/>
+                    <a:lumOff val="40000"/>
+                  </a:schemeClr>
+                </a:solidFill>
+                <a:effectLst/>
+                <a:latin typeface="Arial"/>
+              </a:rPr>
+              <a:t>“</a:t>
+            </a:r>
+          </a:p>
+        </p:txBody>
+      </p:sp>
+      <p:sp>
+        <p:nvSpPr>
+          <p:cNvPr id="25" name="TextBox 24"/>
+          <p:cNvSpPr txBox="1"/>
+          <p:nvPr/>
+        </p:nvSpPr>
+        <p:spPr>
+          <a:xfrm>
+            <a:off x="8893011" y="2886556"/>
+            <a:ext cx="609600" cy="584776"/>
+          </a:xfrm>
+          <a:prstGeom prst="rect">
+            <a:avLst/>
+          </a:prstGeom>
+        </p:spPr>
+        <p:txBody>
+          <a:bodyPr vert="horz" lIns="91440" tIns="45720" rIns="91440" bIns="45720" rtlCol="0" anchor="ctr">
+            <a:noAutofit/>
+          </a:bodyPr>
+          <a:lstStyle/>
+          <a:p>
+            <a:pPr lvl="0"/>
+            <a:r>
+              <a:rPr lang="en-US" sz="8000" baseline="0" dirty="0">
+                <a:ln w="3175" cmpd="sng">
+                  <a:noFill/>
+                </a:ln>
+                <a:solidFill>
+                  <a:schemeClr val="accent1">
+                    <a:lumMod val="60000"/>
+                    <a:lumOff val="40000"/>
+                  </a:schemeClr>
+                </a:solidFill>
+                <a:effectLst/>
+                <a:latin typeface="Arial"/>
+              </a:rPr>
+              <a:t>”</a:t>
+            </a:r>
+          </a:p>
+        </p:txBody>
+      </p:sp>
+    </p:spTree>
+    <p:extLst>
+      <p:ext uri="{BB962C8B-B14F-4D97-AF65-F5344CB8AC3E}">
+        <p14:creationId xmlns:p14="http://schemas.microsoft.com/office/powerpoint/2010/main" val="222661044"/>
+      </p:ext>
+    </p:extLst>
+  </p:cSld>
+  <p:clrMapOvr>
+    <a:masterClrMapping/>
+  </p:clrMapOvr>
+</p:sldLayout>
+</file>
+
+<file path=ppt/slideLayouts/slideLayout14.xml><?xml version="1.0" encoding="utf-8"?>
+<p:sldLayout xmlns:a="http://schemas.openxmlformats.org/drawingml/2006/main" xmlns:r="http://schemas.openxmlformats.org/officeDocument/2006/relationships" xmlns:p="http://schemas.openxmlformats.org/presentationml/2006/main" preserve="1">
+  <p:cSld name="True or False">
+    <p:spTree>
+      <p:nvGrpSpPr>
+        <p:cNvPr id="1" name=""/>
+        <p:cNvGrpSpPr/>
+        <p:nvPr/>
+      </p:nvGrpSpPr>
+      <p:grpSpPr>
+        <a:xfrm>
+          <a:off x="0" y="0"/>
+          <a:ext cx="0" cy="0"/>
+          <a:chOff x="0" y="0"/>
+          <a:chExt cx="0" cy="0"/>
+        </a:xfrm>
+      </p:grpSpPr>
+      <p:sp>
+        <p:nvSpPr>
+          <p:cNvPr id="2" name="Title 1"/>
+          <p:cNvSpPr>
+            <a:spLocks noGrp="1"/>
+          </p:cNvSpPr>
+          <p:nvPr>
+            <p:ph type="title"/>
+          </p:nvPr>
+        </p:nvSpPr>
+        <p:spPr>
+          <a:xfrm>
+            <a:off x="685799" y="609600"/>
+            <a:ext cx="8588203" cy="3022600"/>
+          </a:xfrm>
+        </p:spPr>
+        <p:txBody>
+          <a:bodyPr anchor="ctr">
+            <a:normAutofit/>
+          </a:bodyPr>
+          <a:lstStyle>
+            <a:lvl1pPr algn="l">
+              <a:defRPr sz="4400" b="0" cap="none"/>
+            </a:lvl1pPr>
+          </a:lstStyle>
+          <a:p>
+            <a:r>
+              <a:rPr lang="en-US"/>
+              <a:t>Click to edit Master title style</a:t>
+            </a:r>
+            <a:endParaRPr lang="en-US" dirty="0"/>
+          </a:p>
+        </p:txBody>
+      </p:sp>
+      <p:sp>
+        <p:nvSpPr>
+          <p:cNvPr id="23" name="Text Placeholder 9"/>
+          <p:cNvSpPr>
+            <a:spLocks noGrp="1"/>
+          </p:cNvSpPr>
+          <p:nvPr>
+            <p:ph type="body" sz="quarter" idx="13"/>
+          </p:nvPr>
+        </p:nvSpPr>
+        <p:spPr>
+          <a:xfrm>
+            <a:off x="677332" y="4013200"/>
+            <a:ext cx="8596669" cy="514248"/>
+          </a:xfrm>
+        </p:spPr>
+        <p:txBody>
+          <a:bodyPr anchor="b">
+            <a:noAutofit/>
+          </a:bodyPr>
+          <a:lstStyle>
+            <a:lvl1pPr marL="0" indent="0">
+              <a:buFontTx/>
+              <a:buNone/>
+              <a:defRPr sz="2400">
+                <a:solidFill>
+                  <a:schemeClr val="accent1"/>
+                </a:solidFill>
+              </a:defRPr>
+            </a:lvl1pPr>
+            <a:lvl2pPr marL="457200" indent="0">
+              <a:buFontTx/>
+              <a:buNone/>
+              <a:defRPr/>
+            </a:lvl2pPr>
+            <a:lvl3pPr marL="914400" indent="0">
+              <a:buFontTx/>
+              <a:buNone/>
+              <a:defRPr/>
+            </a:lvl3pPr>
+            <a:lvl4pPr marL="1371600" indent="0">
+              <a:buFontTx/>
+              <a:buNone/>
+              <a:defRPr/>
+            </a:lvl4pPr>
+            <a:lvl5pPr marL="1828800" indent="0">
+              <a:buFontTx/>
+              <a:buNone/>
+              <a:defRPr/>
+            </a:lvl5pPr>
+          </a:lstStyle>
+          <a:p>
+            <a:pPr lvl="0"/>
+            <a:r>
+              <a:rPr lang="en-US"/>
+              <a:t>Click to edit Master text styles</a:t>
+            </a:r>
+          </a:p>
+        </p:txBody>
+      </p:sp>
+      <p:sp>
+        <p:nvSpPr>
+          <p:cNvPr id="3" name="Text Placeholder 2"/>
+          <p:cNvSpPr>
+            <a:spLocks noGrp="1"/>
+          </p:cNvSpPr>
+          <p:nvPr>
+            <p:ph type="body" idx="1"/>
+          </p:nvPr>
+        </p:nvSpPr>
+        <p:spPr>
+          <a:xfrm>
+            <a:off x="677335" y="4527448"/>
+            <a:ext cx="8596668" cy="1513914"/>
+          </a:xfrm>
+        </p:spPr>
+        <p:txBody>
+          <a:bodyPr anchor="t">
+            <a:normAutofit/>
+          </a:bodyPr>
+          <a:lstStyle>
+            <a:lvl1pPr marL="0" indent="0" algn="l">
+              <a:buNone/>
+              <a:defRPr sz="1800">
+                <a:solidFill>
+                  <a:schemeClr val="tx1">
+                    <a:lumMod val="50000"/>
+                    <a:lumOff val="50000"/>
+                  </a:schemeClr>
+                </a:solidFill>
+              </a:defRPr>
+            </a:lvl1pPr>
+            <a:lvl2pPr marL="457200" indent="0">
+              <a:buNone/>
+              <a:defRPr sz="1800">
+                <a:solidFill>
+                  <a:schemeClr val="tx1">
+                    <a:tint val="75000"/>
+                  </a:schemeClr>
+                </a:solidFill>
+              </a:defRPr>
+            </a:lvl2pPr>
+            <a:lvl3pPr marL="914400" indent="0">
+              <a:buNone/>
+              <a:defRPr sz="1600">
+                <a:solidFill>
+                  <a:schemeClr val="tx1">
+                    <a:tint val="75000"/>
+                  </a:schemeClr>
+                </a:solidFill>
+              </a:defRPr>
+            </a:lvl3pPr>
+            <a:lvl4pPr marL="1371600" indent="0">
+              <a:buNone/>
+              <a:defRPr sz="1400">
+                <a:solidFill>
+                  <a:schemeClr val="tx1">
+                    <a:tint val="75000"/>
+                  </a:schemeClr>
+                </a:solidFill>
+              </a:defRPr>
+            </a:lvl4pPr>
+            <a:lvl5pPr marL="1828800" indent="0">
+              <a:buNone/>
+              <a:defRPr sz="1400">
+                <a:solidFill>
+                  <a:schemeClr val="tx1">
+                    <a:tint val="75000"/>
+                  </a:schemeClr>
+                </a:solidFill>
+              </a:defRPr>
+            </a:lvl5pPr>
+            <a:lvl6pPr marL="2286000" indent="0">
+              <a:buNone/>
+              <a:defRPr sz="1400">
+                <a:solidFill>
+                  <a:schemeClr val="tx1">
+                    <a:tint val="75000"/>
+                  </a:schemeClr>
+                </a:solidFill>
+              </a:defRPr>
+            </a:lvl6pPr>
+            <a:lvl7pPr marL="2743200" indent="0">
+              <a:buNone/>
+              <a:defRPr sz="1400">
+                <a:solidFill>
+                  <a:schemeClr val="tx1">
+                    <a:tint val="75000"/>
+                  </a:schemeClr>
+                </a:solidFill>
+              </a:defRPr>
+            </a:lvl7pPr>
+            <a:lvl8pPr marL="3200400" indent="0">
+              <a:buNone/>
+              <a:defRPr sz="1400">
+                <a:solidFill>
+                  <a:schemeClr val="tx1">
+                    <a:tint val="75000"/>
+                  </a:schemeClr>
+                </a:solidFill>
+              </a:defRPr>
+            </a:lvl8pPr>
+            <a:lvl9pPr marL="3657600" indent="0">
+              <a:buNone/>
+              <a:defRPr sz="1400">
+                <a:solidFill>
+                  <a:schemeClr val="tx1">
+                    <a:tint val="75000"/>
+                  </a:schemeClr>
+                </a:solidFill>
+              </a:defRPr>
+            </a:lvl9pPr>
+          </a:lstStyle>
+          <a:p>
+            <a:pPr lvl="0"/>
+            <a:r>
+              <a:rPr lang="en-US"/>
+              <a:t>Click to edit Master text styles</a:t>
+            </a:r>
+          </a:p>
+        </p:txBody>
+      </p:sp>
+      <p:sp>
+        <p:nvSpPr>
+          <p:cNvPr id="4" name="Date Placeholder 3"/>
+          <p:cNvSpPr>
+            <a:spLocks noGrp="1"/>
+          </p:cNvSpPr>
+          <p:nvPr>
+            <p:ph type="dt" sz="half" idx="10"/>
+          </p:nvPr>
+        </p:nvSpPr>
+        <p:spPr/>
+        <p:txBody>
+          <a:bodyPr/>
+          <a:lstStyle/>
+          <a:p>
+            <a:fld id="{C70E5D01-44FA-40AF-8633-6FC63E8CF416}" type="datetimeFigureOut">
+              <a:rPr lang="en-BE" smtClean="0"/>
+              <a:t>12/03/2026</a:t>
+            </a:fld>
+            <a:endParaRPr lang="en-BE"/>
+          </a:p>
+        </p:txBody>
+      </p:sp>
+      <p:sp>
+        <p:nvSpPr>
+          <p:cNvPr id="5" name="Footer Placeholder 4"/>
+          <p:cNvSpPr>
+            <a:spLocks noGrp="1"/>
+          </p:cNvSpPr>
+          <p:nvPr>
+            <p:ph type="ftr" sz="quarter" idx="11"/>
+          </p:nvPr>
+        </p:nvSpPr>
+        <p:spPr/>
+        <p:txBody>
+          <a:bodyPr/>
+          <a:lstStyle/>
+          <a:p>
+            <a:endParaRPr lang="en-BE"/>
+          </a:p>
+        </p:txBody>
+      </p:sp>
+      <p:sp>
+        <p:nvSpPr>
+          <p:cNvPr id="6" name="Slide Number Placeholder 5"/>
+          <p:cNvSpPr>
+            <a:spLocks noGrp="1"/>
+          </p:cNvSpPr>
+          <p:nvPr>
+            <p:ph type="sldNum" sz="quarter" idx="12"/>
+          </p:nvPr>
+        </p:nvSpPr>
+        <p:spPr/>
+        <p:txBody>
+          <a:bodyPr/>
+          <a:lstStyle/>
+          <a:p>
+            <a:fld id="{C9A2A2B3-125E-4B64-AE22-4736C1C31799}" type="slidenum">
+              <a:rPr lang="en-BE" smtClean="0"/>
+              <a:t>‹#›</a:t>
+            </a:fld>
+            <a:endParaRPr lang="en-BE"/>
+          </a:p>
+        </p:txBody>
+      </p:sp>
+    </p:spTree>
+    <p:extLst>
+      <p:ext uri="{BB962C8B-B14F-4D97-AF65-F5344CB8AC3E}">
+        <p14:creationId xmlns:p14="http://schemas.microsoft.com/office/powerpoint/2010/main" val="3060594901"/>
+      </p:ext>
+    </p:extLst>
+  </p:cSld>
+  <p:clrMapOvr>
+    <a:masterClrMapping/>
+  </p:clrMapOvr>
+</p:sldLayout>
+</file>
+
+<file path=ppt/slideLayouts/slideLayout15.xml><?xml version="1.0" encoding="utf-8"?>
 <p:sldLayout xmlns:a="http://schemas.openxmlformats.org/drawingml/2006/main" xmlns:r="http://schemas.openxmlformats.org/officeDocument/2006/relationships" xmlns:p="http://schemas.openxmlformats.org/presentationml/2006/main" type="vertTx" preserve="1">
   <p:cSld name="Title and Vertical Text">
     <p:spTree>
@@ -357,13 +2531,7 @@
       </p:grpSpPr>
       <p:sp>
         <p:nvSpPr>
-          <p:cNvPr id="2" name="Title 1">
-            <a:extLst>
-              <a:ext uri="{FF2B5EF4-FFF2-40B4-BE49-F238E27FC236}">
-                <a16:creationId xmlns:a16="http://schemas.microsoft.com/office/drawing/2014/main" id="{61513453-F04D-8930-7DDB-602C6055FF9D}"/>
-              </a:ext>
-            </a:extLst>
-          </p:cNvPr>
+          <p:cNvPr id="2" name="Title 1"/>
           <p:cNvSpPr>
             <a:spLocks noGrp="1"/>
           </p:cNvSpPr>
@@ -380,19 +2548,13 @@
               <a:rPr lang="en-US"/>
               <a:t>Click to edit Master title style</a:t>
             </a:r>
-            <a:endParaRPr lang="en-BE"/>
-          </a:p>
-        </p:txBody>
-      </p:sp>
-      <p:sp>
-        <p:nvSpPr>
-          <p:cNvPr id="3" name="Vertical Text Placeholder 2">
-            <a:extLst>
-              <a:ext uri="{FF2B5EF4-FFF2-40B4-BE49-F238E27FC236}">
-                <a16:creationId xmlns:a16="http://schemas.microsoft.com/office/drawing/2014/main" id="{C8DB9BDD-7F05-25D8-4C6C-7BED7DBCD32F}"/>
-              </a:ext>
-            </a:extLst>
-          </p:cNvPr>
+            <a:endParaRPr lang="en-US" dirty="0"/>
+          </a:p>
+        </p:txBody>
+      </p:sp>
+      <p:sp>
+        <p:nvSpPr>
+          <p:cNvPr id="3" name="Vertical Text Placeholder 2"/>
           <p:cNvSpPr>
             <a:spLocks noGrp="1"/>
           </p:cNvSpPr>
@@ -438,19 +2600,13 @@
               <a:rPr lang="en-US"/>
               <a:t>Fifth level</a:t>
             </a:r>
-            <a:endParaRPr lang="en-BE"/>
-          </a:p>
-        </p:txBody>
-      </p:sp>
-      <p:sp>
-        <p:nvSpPr>
-          <p:cNvPr id="4" name="Date Placeholder 3">
-            <a:extLst>
-              <a:ext uri="{FF2B5EF4-FFF2-40B4-BE49-F238E27FC236}">
-                <a16:creationId xmlns:a16="http://schemas.microsoft.com/office/drawing/2014/main" id="{CDD3714D-BB42-3FEB-9699-B076E7955ACA}"/>
-              </a:ext>
-            </a:extLst>
-          </p:cNvPr>
+            <a:endParaRPr lang="en-US" dirty="0"/>
+          </a:p>
+        </p:txBody>
+      </p:sp>
+      <p:sp>
+        <p:nvSpPr>
+          <p:cNvPr id="4" name="Date Placeholder 3"/>
           <p:cNvSpPr>
             <a:spLocks noGrp="1"/>
           </p:cNvSpPr>
@@ -465,7 +2621,7 @@
           <a:p>
             <a:fld id="{C70E5D01-44FA-40AF-8633-6FC63E8CF416}" type="datetimeFigureOut">
               <a:rPr lang="en-BE" smtClean="0"/>
-              <a:t>10/03/2026</a:t>
+              <a:t>12/03/2026</a:t>
             </a:fld>
             <a:endParaRPr lang="en-BE"/>
           </a:p>
@@ -473,13 +2629,7 @@
       </p:sp>
       <p:sp>
         <p:nvSpPr>
-          <p:cNvPr id="5" name="Footer Placeholder 4">
-            <a:extLst>
-              <a:ext uri="{FF2B5EF4-FFF2-40B4-BE49-F238E27FC236}">
-                <a16:creationId xmlns:a16="http://schemas.microsoft.com/office/drawing/2014/main" id="{D80DDEC2-C8E9-2529-E85E-2636ADBB8EF8}"/>
-              </a:ext>
-            </a:extLst>
-          </p:cNvPr>
+          <p:cNvPr id="5" name="Footer Placeholder 4"/>
           <p:cNvSpPr>
             <a:spLocks noGrp="1"/>
           </p:cNvSpPr>
@@ -498,13 +2648,7 @@
       </p:sp>
       <p:sp>
         <p:nvSpPr>
-          <p:cNvPr id="6" name="Slide Number Placeholder 5">
-            <a:extLst>
-              <a:ext uri="{FF2B5EF4-FFF2-40B4-BE49-F238E27FC236}">
-                <a16:creationId xmlns:a16="http://schemas.microsoft.com/office/drawing/2014/main" id="{558F9FB6-C81A-A67C-1285-D7BB901EA923}"/>
-              </a:ext>
-            </a:extLst>
-          </p:cNvPr>
+          <p:cNvPr id="6" name="Slide Number Placeholder 5"/>
           <p:cNvSpPr>
             <a:spLocks noGrp="1"/>
           </p:cNvSpPr>
@@ -528,7 +2672,7 @@
     </p:spTree>
     <p:extLst>
       <p:ext uri="{BB962C8B-B14F-4D97-AF65-F5344CB8AC3E}">
-        <p14:creationId xmlns:p14="http://schemas.microsoft.com/office/powerpoint/2010/main" val="842432215"/>
+        <p14:creationId xmlns:p14="http://schemas.microsoft.com/office/powerpoint/2010/main" val="395685792"/>
       </p:ext>
     </p:extLst>
   </p:cSld>
@@ -538,7 +2682,7 @@
 </p:sldLayout>
 </file>
 
-<file path=ppt/slideLayouts/slideLayout11.xml><?xml version="1.0" encoding="utf-8"?>
+<file path=ppt/slideLayouts/slideLayout16.xml><?xml version="1.0" encoding="utf-8"?>
 <p:sldLayout xmlns:a="http://schemas.openxmlformats.org/drawingml/2006/main" xmlns:r="http://schemas.openxmlformats.org/officeDocument/2006/relationships" xmlns:p="http://schemas.openxmlformats.org/presentationml/2006/main" type="vertTitleAndTx" preserve="1">
   <p:cSld name="Vertical Title and Text">
     <p:spTree>
@@ -557,13 +2701,7 @@
       </p:grpSpPr>
       <p:sp>
         <p:nvSpPr>
-          <p:cNvPr id="2" name="Vertical Title 1">
-            <a:extLst>
-              <a:ext uri="{FF2B5EF4-FFF2-40B4-BE49-F238E27FC236}">
-                <a16:creationId xmlns:a16="http://schemas.microsoft.com/office/drawing/2014/main" id="{74598BF0-0FED-B8E8-94B4-158B88EC0BBF}"/>
-              </a:ext>
-            </a:extLst>
-          </p:cNvPr>
+          <p:cNvPr id="2" name="Vertical Title 1"/>
           <p:cNvSpPr>
             <a:spLocks noGrp="1"/>
           </p:cNvSpPr>
@@ -573,31 +2711,25 @@
         </p:nvSpPr>
         <p:spPr>
           <a:xfrm>
-            <a:off x="8724900" y="365125"/>
-            <a:ext cx="2628900" cy="5811838"/>
+            <a:off x="7967673" y="609599"/>
+            <a:ext cx="1304743" cy="5251451"/>
           </a:xfrm>
         </p:spPr>
         <p:txBody>
-          <a:bodyPr vert="eaVert"/>
+          <a:bodyPr vert="eaVert" anchor="ctr"/>
           <a:lstStyle/>
           <a:p>
             <a:r>
               <a:rPr lang="en-US"/>
               <a:t>Click to edit Master title style</a:t>
             </a:r>
-            <a:endParaRPr lang="en-BE"/>
-          </a:p>
-        </p:txBody>
-      </p:sp>
-      <p:sp>
-        <p:nvSpPr>
-          <p:cNvPr id="3" name="Vertical Text Placeholder 2">
-            <a:extLst>
-              <a:ext uri="{FF2B5EF4-FFF2-40B4-BE49-F238E27FC236}">
-                <a16:creationId xmlns:a16="http://schemas.microsoft.com/office/drawing/2014/main" id="{B53768BC-0B77-ADDD-E70D-4EAB0F07B14A}"/>
-              </a:ext>
-            </a:extLst>
-          </p:cNvPr>
+            <a:endParaRPr lang="en-US" dirty="0"/>
+          </a:p>
+        </p:txBody>
+      </p:sp>
+      <p:sp>
+        <p:nvSpPr>
+          <p:cNvPr id="3" name="Vertical Text Placeholder 2"/>
           <p:cNvSpPr>
             <a:spLocks noGrp="1"/>
           </p:cNvSpPr>
@@ -607,8 +2739,8 @@
         </p:nvSpPr>
         <p:spPr>
           <a:xfrm>
-            <a:off x="838200" y="365125"/>
-            <a:ext cx="7734300" cy="5811838"/>
+            <a:off x="677335" y="609600"/>
+            <a:ext cx="7060150" cy="5251450"/>
           </a:xfrm>
         </p:spPr>
         <p:txBody>
@@ -648,19 +2780,13 @@
               <a:rPr lang="en-US"/>
               <a:t>Fifth level</a:t>
             </a:r>
-            <a:endParaRPr lang="en-BE"/>
-          </a:p>
-        </p:txBody>
-      </p:sp>
-      <p:sp>
-        <p:nvSpPr>
-          <p:cNvPr id="4" name="Date Placeholder 3">
-            <a:extLst>
-              <a:ext uri="{FF2B5EF4-FFF2-40B4-BE49-F238E27FC236}">
-                <a16:creationId xmlns:a16="http://schemas.microsoft.com/office/drawing/2014/main" id="{3170810E-D4B8-F487-E3D1-409E3335F96E}"/>
-              </a:ext>
-            </a:extLst>
-          </p:cNvPr>
+            <a:endParaRPr lang="en-US" dirty="0"/>
+          </a:p>
+        </p:txBody>
+      </p:sp>
+      <p:sp>
+        <p:nvSpPr>
+          <p:cNvPr id="4" name="Date Placeholder 3"/>
           <p:cNvSpPr>
             <a:spLocks noGrp="1"/>
           </p:cNvSpPr>
@@ -675,7 +2801,7 @@
           <a:p>
             <a:fld id="{C70E5D01-44FA-40AF-8633-6FC63E8CF416}" type="datetimeFigureOut">
               <a:rPr lang="en-BE" smtClean="0"/>
-              <a:t>10/03/2026</a:t>
+              <a:t>12/03/2026</a:t>
             </a:fld>
             <a:endParaRPr lang="en-BE"/>
           </a:p>
@@ -683,13 +2809,7 @@
       </p:sp>
       <p:sp>
         <p:nvSpPr>
-          <p:cNvPr id="5" name="Footer Placeholder 4">
-            <a:extLst>
-              <a:ext uri="{FF2B5EF4-FFF2-40B4-BE49-F238E27FC236}">
-                <a16:creationId xmlns:a16="http://schemas.microsoft.com/office/drawing/2014/main" id="{7CC7F4F8-0504-AA7D-D69D-A036C873460E}"/>
-              </a:ext>
-            </a:extLst>
-          </p:cNvPr>
+          <p:cNvPr id="5" name="Footer Placeholder 4"/>
           <p:cNvSpPr>
             <a:spLocks noGrp="1"/>
           </p:cNvSpPr>
@@ -708,13 +2828,7 @@
       </p:sp>
       <p:sp>
         <p:nvSpPr>
-          <p:cNvPr id="6" name="Slide Number Placeholder 5">
-            <a:extLst>
-              <a:ext uri="{FF2B5EF4-FFF2-40B4-BE49-F238E27FC236}">
-                <a16:creationId xmlns:a16="http://schemas.microsoft.com/office/drawing/2014/main" id="{ED26E88F-7D54-C9DC-ECA3-FDAB62F6CD1C}"/>
-              </a:ext>
-            </a:extLst>
-          </p:cNvPr>
+          <p:cNvPr id="6" name="Slide Number Placeholder 5"/>
           <p:cNvSpPr>
             <a:spLocks noGrp="1"/>
           </p:cNvSpPr>
@@ -738,7 +2852,7 @@
     </p:spTree>
     <p:extLst>
       <p:ext uri="{BB962C8B-B14F-4D97-AF65-F5344CB8AC3E}">
-        <p14:creationId xmlns:p14="http://schemas.microsoft.com/office/powerpoint/2010/main" val="3243271338"/>
+        <p14:creationId xmlns:p14="http://schemas.microsoft.com/office/powerpoint/2010/main" val="2571982965"/>
       </p:ext>
     </p:extLst>
   </p:cSld>
@@ -767,13 +2881,7 @@
       </p:grpSpPr>
       <p:sp>
         <p:nvSpPr>
-          <p:cNvPr id="2" name="Title 1">
-            <a:extLst>
-              <a:ext uri="{FF2B5EF4-FFF2-40B4-BE49-F238E27FC236}">
-                <a16:creationId xmlns:a16="http://schemas.microsoft.com/office/drawing/2014/main" id="{13A5B549-561B-32F0-9F9F-4AC292ABDDAE}"/>
-              </a:ext>
-            </a:extLst>
-          </p:cNvPr>
+          <p:cNvPr id="2" name="Title 1"/>
           <p:cNvSpPr>
             <a:spLocks noGrp="1"/>
           </p:cNvSpPr>
@@ -783,26 +2891,26 @@
         </p:nvSpPr>
         <p:spPr/>
         <p:txBody>
-          <a:bodyPr/>
-          <a:lstStyle/>
+          <a:bodyPr>
+            <a:normAutofit/>
+          </a:bodyPr>
+          <a:lstStyle>
+            <a:lvl1pPr>
+              <a:defRPr sz="3600"/>
+            </a:lvl1pPr>
+          </a:lstStyle>
           <a:p>
             <a:r>
               <a:rPr lang="en-US"/>
               <a:t>Click to edit Master title style</a:t>
             </a:r>
-            <a:endParaRPr lang="en-BE"/>
-          </a:p>
-        </p:txBody>
-      </p:sp>
-      <p:sp>
-        <p:nvSpPr>
-          <p:cNvPr id="3" name="Content Placeholder 2">
-            <a:extLst>
-              <a:ext uri="{FF2B5EF4-FFF2-40B4-BE49-F238E27FC236}">
-                <a16:creationId xmlns:a16="http://schemas.microsoft.com/office/drawing/2014/main" id="{96D111B9-ED73-9E35-D490-B8C22DFB1A8E}"/>
-              </a:ext>
-            </a:extLst>
-          </p:cNvPr>
+            <a:endParaRPr lang="en-US" dirty="0"/>
+          </a:p>
+        </p:txBody>
+      </p:sp>
+      <p:sp>
+        <p:nvSpPr>
+          <p:cNvPr id="3" name="Content Placeholder 2"/>
           <p:cNvSpPr>
             <a:spLocks noGrp="1"/>
           </p:cNvSpPr>
@@ -848,19 +2956,13 @@
               <a:rPr lang="en-US"/>
               <a:t>Fifth level</a:t>
             </a:r>
-            <a:endParaRPr lang="en-BE"/>
-          </a:p>
-        </p:txBody>
-      </p:sp>
-      <p:sp>
-        <p:nvSpPr>
-          <p:cNvPr id="4" name="Date Placeholder 3">
-            <a:extLst>
-              <a:ext uri="{FF2B5EF4-FFF2-40B4-BE49-F238E27FC236}">
-                <a16:creationId xmlns:a16="http://schemas.microsoft.com/office/drawing/2014/main" id="{8EDB9E90-970B-8725-CD1F-450E8401D907}"/>
-              </a:ext>
-            </a:extLst>
-          </p:cNvPr>
+            <a:endParaRPr lang="en-US" dirty="0"/>
+          </a:p>
+        </p:txBody>
+      </p:sp>
+      <p:sp>
+        <p:nvSpPr>
+          <p:cNvPr id="4" name="Date Placeholder 3"/>
           <p:cNvSpPr>
             <a:spLocks noGrp="1"/>
           </p:cNvSpPr>
@@ -875,7 +2977,7 @@
           <a:p>
             <a:fld id="{C70E5D01-44FA-40AF-8633-6FC63E8CF416}" type="datetimeFigureOut">
               <a:rPr lang="en-BE" smtClean="0"/>
-              <a:t>10/03/2026</a:t>
+              <a:t>12/03/2026</a:t>
             </a:fld>
             <a:endParaRPr lang="en-BE"/>
           </a:p>
@@ -883,13 +2985,7 @@
       </p:sp>
       <p:sp>
         <p:nvSpPr>
-          <p:cNvPr id="5" name="Footer Placeholder 4">
-            <a:extLst>
-              <a:ext uri="{FF2B5EF4-FFF2-40B4-BE49-F238E27FC236}">
-                <a16:creationId xmlns:a16="http://schemas.microsoft.com/office/drawing/2014/main" id="{889790F2-4212-ACB9-B6B4-63E56985CFBF}"/>
-              </a:ext>
-            </a:extLst>
-          </p:cNvPr>
+          <p:cNvPr id="5" name="Footer Placeholder 4"/>
           <p:cNvSpPr>
             <a:spLocks noGrp="1"/>
           </p:cNvSpPr>
@@ -908,13 +3004,7 @@
       </p:sp>
       <p:sp>
         <p:nvSpPr>
-          <p:cNvPr id="6" name="Slide Number Placeholder 5">
-            <a:extLst>
-              <a:ext uri="{FF2B5EF4-FFF2-40B4-BE49-F238E27FC236}">
-                <a16:creationId xmlns:a16="http://schemas.microsoft.com/office/drawing/2014/main" id="{71254DA3-A7EF-C97A-5941-7E70D13FFCAC}"/>
-              </a:ext>
-            </a:extLst>
-          </p:cNvPr>
+          <p:cNvPr id="6" name="Slide Number Placeholder 5"/>
           <p:cNvSpPr>
             <a:spLocks noGrp="1"/>
           </p:cNvSpPr>
@@ -938,7 +3028,7 @@
     </p:spTree>
     <p:extLst>
       <p:ext uri="{BB962C8B-B14F-4D97-AF65-F5344CB8AC3E}">
-        <p14:creationId xmlns:p14="http://schemas.microsoft.com/office/powerpoint/2010/main" val="543617982"/>
+        <p14:creationId xmlns:p14="http://schemas.microsoft.com/office/powerpoint/2010/main" val="677760167"/>
       </p:ext>
     </p:extLst>
   </p:cSld>
@@ -967,13 +3057,7 @@
       </p:grpSpPr>
       <p:sp>
         <p:nvSpPr>
-          <p:cNvPr id="2" name="Title 1">
-            <a:extLst>
-              <a:ext uri="{FF2B5EF4-FFF2-40B4-BE49-F238E27FC236}">
-                <a16:creationId xmlns:a16="http://schemas.microsoft.com/office/drawing/2014/main" id="{C6F73F45-A7F3-E1F0-B423-99EAF859A4B1}"/>
-              </a:ext>
-            </a:extLst>
-          </p:cNvPr>
+          <p:cNvPr id="2" name="Title 1"/>
           <p:cNvSpPr>
             <a:spLocks noGrp="1"/>
           </p:cNvSpPr>
@@ -983,15 +3067,15 @@
         </p:nvSpPr>
         <p:spPr>
           <a:xfrm>
-            <a:off x="831850" y="1709738"/>
-            <a:ext cx="10515600" cy="2852737"/>
+            <a:off x="677335" y="2700867"/>
+            <a:ext cx="8596668" cy="1826581"/>
           </a:xfrm>
         </p:spPr>
         <p:txBody>
           <a:bodyPr anchor="b"/>
           <a:lstStyle>
-            <a:lvl1pPr>
-              <a:defRPr sz="6000"/>
+            <a:lvl1pPr algn="l">
+              <a:defRPr sz="4000" b="0" cap="none"/>
             </a:lvl1pPr>
           </a:lstStyle>
           <a:p>
@@ -999,19 +3083,13 @@
               <a:rPr lang="en-US"/>
               <a:t>Click to edit Master title style</a:t>
             </a:r>
-            <a:endParaRPr lang="en-BE"/>
-          </a:p>
-        </p:txBody>
-      </p:sp>
-      <p:sp>
-        <p:nvSpPr>
-          <p:cNvPr id="3" name="Text Placeholder 2">
-            <a:extLst>
-              <a:ext uri="{FF2B5EF4-FFF2-40B4-BE49-F238E27FC236}">
-                <a16:creationId xmlns:a16="http://schemas.microsoft.com/office/drawing/2014/main" id="{BE83C00E-D67A-55C2-FDE9-D59CBCB6AF78}"/>
-              </a:ext>
-            </a:extLst>
-          </p:cNvPr>
+            <a:endParaRPr lang="en-US" dirty="0"/>
+          </a:p>
+        </p:txBody>
+      </p:sp>
+      <p:sp>
+        <p:nvSpPr>
+          <p:cNvPr id="3" name="Text Placeholder 2"/>
           <p:cNvSpPr>
             <a:spLocks noGrp="1"/>
           </p:cNvSpPr>
@@ -1021,99 +3099,100 @@
         </p:nvSpPr>
         <p:spPr>
           <a:xfrm>
-            <a:off x="831850" y="4589463"/>
-            <a:ext cx="10515600" cy="1500187"/>
+            <a:off x="677335" y="4527448"/>
+            <a:ext cx="8596668" cy="860400"/>
           </a:xfrm>
         </p:spPr>
         <p:txBody>
-          <a:bodyPr/>
+          <a:bodyPr anchor="t"/>
           <a:lstStyle>
-            <a:lvl1pPr marL="0" indent="0">
-              <a:buNone/>
-              <a:defRPr sz="2400">
+            <a:lvl1pPr marL="0" indent="0" algn="l">
+              <a:buNone/>
+              <a:defRPr sz="2000">
                 <a:solidFill>
                   <a:schemeClr val="tx1">
-                    <a:tint val="82000"/>
+                    <a:lumMod val="50000"/>
+                    <a:lumOff val="50000"/>
                   </a:schemeClr>
                 </a:solidFill>
               </a:defRPr>
             </a:lvl1pPr>
             <a:lvl2pPr marL="457200" indent="0">
               <a:buNone/>
-              <a:defRPr sz="2000">
+              <a:defRPr sz="1800">
                 <a:solidFill>
                   <a:schemeClr val="tx1">
-                    <a:tint val="82000"/>
+                    <a:tint val="75000"/>
                   </a:schemeClr>
                 </a:solidFill>
               </a:defRPr>
             </a:lvl2pPr>
             <a:lvl3pPr marL="914400" indent="0">
               <a:buNone/>
-              <a:defRPr sz="1800">
+              <a:defRPr sz="1600">
                 <a:solidFill>
                   <a:schemeClr val="tx1">
-                    <a:tint val="82000"/>
+                    <a:tint val="75000"/>
                   </a:schemeClr>
                 </a:solidFill>
               </a:defRPr>
             </a:lvl3pPr>
             <a:lvl4pPr marL="1371600" indent="0">
               <a:buNone/>
-              <a:defRPr sz="1600">
+              <a:defRPr sz="1400">
                 <a:solidFill>
                   <a:schemeClr val="tx1">
-                    <a:tint val="82000"/>
+                    <a:tint val="75000"/>
                   </a:schemeClr>
                 </a:solidFill>
               </a:defRPr>
             </a:lvl4pPr>
             <a:lvl5pPr marL="1828800" indent="0">
               <a:buNone/>
-              <a:defRPr sz="1600">
+              <a:defRPr sz="1400">
                 <a:solidFill>
                   <a:schemeClr val="tx1">
-                    <a:tint val="82000"/>
+                    <a:tint val="75000"/>
                   </a:schemeClr>
                 </a:solidFill>
               </a:defRPr>
             </a:lvl5pPr>
             <a:lvl6pPr marL="2286000" indent="0">
               <a:buNone/>
-              <a:defRPr sz="1600">
+              <a:defRPr sz="1400">
                 <a:solidFill>
                   <a:schemeClr val="tx1">
-                    <a:tint val="82000"/>
+                    <a:tint val="75000"/>
                   </a:schemeClr>
                 </a:solidFill>
               </a:defRPr>
             </a:lvl6pPr>
             <a:lvl7pPr marL="2743200" indent="0">
               <a:buNone/>
-              <a:defRPr sz="1600">
+              <a:defRPr sz="1400">
                 <a:solidFill>
                   <a:schemeClr val="tx1">
-                    <a:tint val="82000"/>
+                    <a:tint val="75000"/>
                   </a:schemeClr>
                 </a:solidFill>
               </a:defRPr>
             </a:lvl7pPr>
             <a:lvl8pPr marL="3200400" indent="0">
               <a:buNone/>
-              <a:defRPr sz="1600">
+              <a:defRPr sz="1400">
                 <a:solidFill>
                   <a:schemeClr val="tx1">
-                    <a:tint val="82000"/>
+                    <a:tint val="75000"/>
                   </a:schemeClr>
                 </a:solidFill>
               </a:defRPr>
             </a:lvl8pPr>
             <a:lvl9pPr marL="3657600" indent="0">
               <a:buNone/>
-              <a:defRPr sz="1600">
+              <a:defRPr sz="1400">
                 <a:solidFill>
                   <a:schemeClr val="tx1">
-                    <a:tint val="82000"/>
+                    <a:tint val="75000"/>
                   </a:schemeClr>
                 </a:solidFill>
               </a:defRPr>
@@ -1130,13 +3209,7 @@
       </p:sp>
       <p:sp>
         <p:nvSpPr>
-          <p:cNvPr id="4" name="Date Placeholder 3">
-            <a:extLst>
-              <a:ext uri="{FF2B5EF4-FFF2-40B4-BE49-F238E27FC236}">
-                <a16:creationId xmlns:a16="http://schemas.microsoft.com/office/drawing/2014/main" id="{2E440007-45F9-7750-1DF2-2F0121509D6C}"/>
-              </a:ext>
-            </a:extLst>
-          </p:cNvPr>
+          <p:cNvPr id="4" name="Date Placeholder 3"/>
           <p:cNvSpPr>
             <a:spLocks noGrp="1"/>
           </p:cNvSpPr>
@@ -1151,7 +3224,7 @@
           <a:p>
             <a:fld id="{C70E5D01-44FA-40AF-8633-6FC63E8CF416}" type="datetimeFigureOut">
               <a:rPr lang="en-BE" smtClean="0"/>
-              <a:t>10/03/2026</a:t>
+              <a:t>12/03/2026</a:t>
             </a:fld>
             <a:endParaRPr lang="en-BE"/>
           </a:p>
@@ -1159,13 +3232,7 @@
       </p:sp>
       <p:sp>
         <p:nvSpPr>
-          <p:cNvPr id="5" name="Footer Placeholder 4">
-            <a:extLst>
-              <a:ext uri="{FF2B5EF4-FFF2-40B4-BE49-F238E27FC236}">
-                <a16:creationId xmlns:a16="http://schemas.microsoft.com/office/drawing/2014/main" id="{A56373B4-1235-CAC8-BC1C-5B80A6DD4702}"/>
-              </a:ext>
-            </a:extLst>
-          </p:cNvPr>
+          <p:cNvPr id="5" name="Footer Placeholder 4"/>
           <p:cNvSpPr>
             <a:spLocks noGrp="1"/>
           </p:cNvSpPr>
@@ -1184,13 +3251,7 @@
       </p:sp>
       <p:sp>
         <p:nvSpPr>
-          <p:cNvPr id="6" name="Slide Number Placeholder 5">
-            <a:extLst>
-              <a:ext uri="{FF2B5EF4-FFF2-40B4-BE49-F238E27FC236}">
-                <a16:creationId xmlns:a16="http://schemas.microsoft.com/office/drawing/2014/main" id="{562A542C-72AF-6DCD-DA7F-53D55D5C98C2}"/>
-              </a:ext>
-            </a:extLst>
-          </p:cNvPr>
+          <p:cNvPr id="6" name="Slide Number Placeholder 5"/>
           <p:cNvSpPr>
             <a:spLocks noGrp="1"/>
           </p:cNvSpPr>
@@ -1214,7 +3275,7 @@
     </p:spTree>
     <p:extLst>
       <p:ext uri="{BB962C8B-B14F-4D97-AF65-F5344CB8AC3E}">
-        <p14:creationId xmlns:p14="http://schemas.microsoft.com/office/powerpoint/2010/main" val="2845735839"/>
+        <p14:creationId xmlns:p14="http://schemas.microsoft.com/office/powerpoint/2010/main" val="848896337"/>
       </p:ext>
     </p:extLst>
   </p:cSld>
@@ -1243,13 +3304,7 @@
       </p:grpSpPr>
       <p:sp>
         <p:nvSpPr>
-          <p:cNvPr id="2" name="Title 1">
-            <a:extLst>
-              <a:ext uri="{FF2B5EF4-FFF2-40B4-BE49-F238E27FC236}">
-                <a16:creationId xmlns:a16="http://schemas.microsoft.com/office/drawing/2014/main" id="{DB0D2C67-46DD-ACDB-2F74-BB607085E732}"/>
-              </a:ext>
-            </a:extLst>
-          </p:cNvPr>
+          <p:cNvPr id="2" name="Title 1"/>
           <p:cNvSpPr>
             <a:spLocks noGrp="1"/>
           </p:cNvSpPr>
@@ -1266,19 +3321,13 @@
               <a:rPr lang="en-US"/>
               <a:t>Click to edit Master title style</a:t>
             </a:r>
-            <a:endParaRPr lang="en-BE"/>
-          </a:p>
-        </p:txBody>
-      </p:sp>
-      <p:sp>
-        <p:nvSpPr>
-          <p:cNvPr id="3" name="Content Placeholder 2">
-            <a:extLst>
-              <a:ext uri="{FF2B5EF4-FFF2-40B4-BE49-F238E27FC236}">
-                <a16:creationId xmlns:a16="http://schemas.microsoft.com/office/drawing/2014/main" id="{8EE88FCC-EB83-B14E-4A02-1819A04F2AC5}"/>
-              </a:ext>
-            </a:extLst>
-          </p:cNvPr>
+            <a:endParaRPr lang="en-US" dirty="0"/>
+          </a:p>
+        </p:txBody>
+      </p:sp>
+      <p:sp>
+        <p:nvSpPr>
+          <p:cNvPr id="3" name="Content Placeholder 2"/>
           <p:cNvSpPr>
             <a:spLocks noGrp="1"/>
           </p:cNvSpPr>
@@ -1288,8 +3337,8 @@
         </p:nvSpPr>
         <p:spPr>
           <a:xfrm>
-            <a:off x="838200" y="1825625"/>
-            <a:ext cx="5181600" cy="4351338"/>
+            <a:off x="677334" y="2160589"/>
+            <a:ext cx="4184035" cy="3880772"/>
           </a:xfrm>
         </p:spPr>
         <p:txBody>
@@ -1329,19 +3378,13 @@
               <a:rPr lang="en-US"/>
               <a:t>Fifth level</a:t>
             </a:r>
-            <a:endParaRPr lang="en-BE"/>
-          </a:p>
-        </p:txBody>
-      </p:sp>
-      <p:sp>
-        <p:nvSpPr>
-          <p:cNvPr id="4" name="Content Placeholder 3">
-            <a:extLst>
-              <a:ext uri="{FF2B5EF4-FFF2-40B4-BE49-F238E27FC236}">
-                <a16:creationId xmlns:a16="http://schemas.microsoft.com/office/drawing/2014/main" id="{AC8D74A7-F882-DAF3-F14C-F808EFEA1121}"/>
-              </a:ext>
-            </a:extLst>
-          </p:cNvPr>
+            <a:endParaRPr lang="en-US" dirty="0"/>
+          </a:p>
+        </p:txBody>
+      </p:sp>
+      <p:sp>
+        <p:nvSpPr>
+          <p:cNvPr id="4" name="Content Placeholder 3"/>
           <p:cNvSpPr>
             <a:spLocks noGrp="1"/>
           </p:cNvSpPr>
@@ -1351,8 +3394,8 @@
         </p:nvSpPr>
         <p:spPr>
           <a:xfrm>
-            <a:off x="6172200" y="1825625"/>
-            <a:ext cx="5181600" cy="4351338"/>
+            <a:off x="5089970" y="2160589"/>
+            <a:ext cx="4184034" cy="3880773"/>
           </a:xfrm>
         </p:spPr>
         <p:txBody>
@@ -1392,19 +3435,13 @@
               <a:rPr lang="en-US"/>
               <a:t>Fifth level</a:t>
             </a:r>
-            <a:endParaRPr lang="en-BE"/>
-          </a:p>
-        </p:txBody>
-      </p:sp>
-      <p:sp>
-        <p:nvSpPr>
-          <p:cNvPr id="5" name="Date Placeholder 4">
-            <a:extLst>
-              <a:ext uri="{FF2B5EF4-FFF2-40B4-BE49-F238E27FC236}">
-                <a16:creationId xmlns:a16="http://schemas.microsoft.com/office/drawing/2014/main" id="{9C450251-EB43-ED35-29A2-EE8934F14858}"/>
-              </a:ext>
-            </a:extLst>
-          </p:cNvPr>
+            <a:endParaRPr lang="en-US" dirty="0"/>
+          </a:p>
+        </p:txBody>
+      </p:sp>
+      <p:sp>
+        <p:nvSpPr>
+          <p:cNvPr id="5" name="Date Placeholder 4"/>
           <p:cNvSpPr>
             <a:spLocks noGrp="1"/>
           </p:cNvSpPr>
@@ -1419,7 +3456,7 @@
           <a:p>
             <a:fld id="{C70E5D01-44FA-40AF-8633-6FC63E8CF416}" type="datetimeFigureOut">
               <a:rPr lang="en-BE" smtClean="0"/>
-              <a:t>10/03/2026</a:t>
+              <a:t>12/03/2026</a:t>
             </a:fld>
             <a:endParaRPr lang="en-BE"/>
           </a:p>
@@ -1427,13 +3464,7 @@
       </p:sp>
       <p:sp>
         <p:nvSpPr>
-          <p:cNvPr id="6" name="Footer Placeholder 5">
-            <a:extLst>
-              <a:ext uri="{FF2B5EF4-FFF2-40B4-BE49-F238E27FC236}">
-                <a16:creationId xmlns:a16="http://schemas.microsoft.com/office/drawing/2014/main" id="{2E68E496-0A55-64A3-E289-0BB5E3764B02}"/>
-              </a:ext>
-            </a:extLst>
-          </p:cNvPr>
+          <p:cNvPr id="6" name="Footer Placeholder 5"/>
           <p:cNvSpPr>
             <a:spLocks noGrp="1"/>
           </p:cNvSpPr>
@@ -1452,13 +3483,7 @@
       </p:sp>
       <p:sp>
         <p:nvSpPr>
-          <p:cNvPr id="7" name="Slide Number Placeholder 6">
-            <a:extLst>
-              <a:ext uri="{FF2B5EF4-FFF2-40B4-BE49-F238E27FC236}">
-                <a16:creationId xmlns:a16="http://schemas.microsoft.com/office/drawing/2014/main" id="{CF0A2220-556E-9DDF-E803-38283B85E4BD}"/>
-              </a:ext>
-            </a:extLst>
-          </p:cNvPr>
+          <p:cNvPr id="7" name="Slide Number Placeholder 6"/>
           <p:cNvSpPr>
             <a:spLocks noGrp="1"/>
           </p:cNvSpPr>
@@ -1482,7 +3507,7 @@
     </p:spTree>
     <p:extLst>
       <p:ext uri="{BB962C8B-B14F-4D97-AF65-F5344CB8AC3E}">
-        <p14:creationId xmlns:p14="http://schemas.microsoft.com/office/powerpoint/2010/main" val="1442878057"/>
+        <p14:creationId xmlns:p14="http://schemas.microsoft.com/office/powerpoint/2010/main" val="1484288829"/>
       </p:ext>
     </p:extLst>
   </p:cSld>
@@ -1511,66 +3536,55 @@
       </p:grpSpPr>
       <p:sp>
         <p:nvSpPr>
-          <p:cNvPr id="2" name="Title 1">
-            <a:extLst>
-              <a:ext uri="{FF2B5EF4-FFF2-40B4-BE49-F238E27FC236}">
-                <a16:creationId xmlns:a16="http://schemas.microsoft.com/office/drawing/2014/main" id="{E72B214F-A22D-DFEC-493D-6747FC25004F}"/>
-              </a:ext>
-            </a:extLst>
-          </p:cNvPr>
+          <p:cNvPr id="2" name="Title 1"/>
           <p:cNvSpPr>
             <a:spLocks noGrp="1"/>
           </p:cNvSpPr>
           <p:nvPr>
             <p:ph type="title"/>
+          </p:nvPr>
+        </p:nvSpPr>
+        <p:spPr/>
+        <p:txBody>
+          <a:bodyPr/>
+          <a:lstStyle>
+            <a:lvl1pPr>
+              <a:defRPr/>
+            </a:lvl1pPr>
+          </a:lstStyle>
+          <a:p>
+            <a:r>
+              <a:rPr lang="en-US"/>
+              <a:t>Click to edit Master title style</a:t>
+            </a:r>
+            <a:endParaRPr lang="en-US" dirty="0"/>
+          </a:p>
+        </p:txBody>
+      </p:sp>
+      <p:sp>
+        <p:nvSpPr>
+          <p:cNvPr id="3" name="Text Placeholder 2"/>
+          <p:cNvSpPr>
+            <a:spLocks noGrp="1"/>
+          </p:cNvSpPr>
+          <p:nvPr>
+            <p:ph type="body" idx="1"/>
           </p:nvPr>
         </p:nvSpPr>
         <p:spPr>
           <a:xfrm>
-            <a:off x="839788" y="365125"/>
-            <a:ext cx="10515600" cy="1325563"/>
+            <a:off x="675745" y="2160983"/>
+            <a:ext cx="4185623" cy="576262"/>
           </a:xfrm>
         </p:spPr>
         <p:txBody>
-          <a:bodyPr/>
-          <a:lstStyle/>
-          <a:p>
-            <a:r>
-              <a:rPr lang="en-US"/>
-              <a:t>Click to edit Master title style</a:t>
-            </a:r>
-            <a:endParaRPr lang="en-BE"/>
-          </a:p>
-        </p:txBody>
-      </p:sp>
-      <p:sp>
-        <p:nvSpPr>
-          <p:cNvPr id="3" name="Text Placeholder 2">
-            <a:extLst>
-              <a:ext uri="{FF2B5EF4-FFF2-40B4-BE49-F238E27FC236}">
-                <a16:creationId xmlns:a16="http://schemas.microsoft.com/office/drawing/2014/main" id="{BD0DC67F-41B3-B68F-BB31-4DBC5B449541}"/>
-              </a:ext>
-            </a:extLst>
-          </p:cNvPr>
-          <p:cNvSpPr>
-            <a:spLocks noGrp="1"/>
-          </p:cNvSpPr>
-          <p:nvPr>
-            <p:ph type="body" idx="1"/>
-          </p:nvPr>
-        </p:nvSpPr>
-        <p:spPr>
-          <a:xfrm>
-            <a:off x="839788" y="1681163"/>
-            <a:ext cx="5157787" cy="823912"/>
-          </a:xfrm>
-        </p:spPr>
-        <p:txBody>
-          <a:bodyPr anchor="b"/>
+          <a:bodyPr anchor="b">
+            <a:noAutofit/>
+          </a:bodyPr>
           <a:lstStyle>
             <a:lvl1pPr marL="0" indent="0">
               <a:buNone/>
-              <a:defRPr sz="2400" b="1"/>
+              <a:defRPr sz="2400" b="0"/>
             </a:lvl1pPr>
             <a:lvl2pPr marL="457200" indent="0">
               <a:buNone/>
@@ -1616,13 +3630,7 @@
       </p:sp>
       <p:sp>
         <p:nvSpPr>
-          <p:cNvPr id="4" name="Content Placeholder 3">
-            <a:extLst>
-              <a:ext uri="{FF2B5EF4-FFF2-40B4-BE49-F238E27FC236}">
-                <a16:creationId xmlns:a16="http://schemas.microsoft.com/office/drawing/2014/main" id="{964E6208-B0E3-B4D1-A0A2-8D57B328FE1F}"/>
-              </a:ext>
-            </a:extLst>
-          </p:cNvPr>
+          <p:cNvPr id="4" name="Content Placeholder 3"/>
           <p:cNvSpPr>
             <a:spLocks noGrp="1"/>
           </p:cNvSpPr>
@@ -1632,12 +3640,14 @@
         </p:nvSpPr>
         <p:spPr>
           <a:xfrm>
-            <a:off x="839788" y="2505075"/>
-            <a:ext cx="5157787" cy="3684588"/>
+            <a:off x="675745" y="2737245"/>
+            <a:ext cx="4185623" cy="3304117"/>
           </a:xfrm>
         </p:spPr>
         <p:txBody>
-          <a:bodyPr/>
+          <a:bodyPr>
+            <a:normAutofit/>
+          </a:bodyPr>
           <a:lstStyle/>
           <a:p>
             <a:pPr lvl="0"/>
@@ -1673,19 +3683,13 @@
               <a:rPr lang="en-US"/>
               <a:t>Fifth level</a:t>
             </a:r>
-            <a:endParaRPr lang="en-BE"/>
-          </a:p>
-        </p:txBody>
-      </p:sp>
-      <p:sp>
-        <p:nvSpPr>
-          <p:cNvPr id="5" name="Text Placeholder 4">
-            <a:extLst>
-              <a:ext uri="{FF2B5EF4-FFF2-40B4-BE49-F238E27FC236}">
-                <a16:creationId xmlns:a16="http://schemas.microsoft.com/office/drawing/2014/main" id="{D6530E7D-4131-BF0F-1754-2A8B63161063}"/>
-              </a:ext>
-            </a:extLst>
-          </p:cNvPr>
+            <a:endParaRPr lang="en-US" dirty="0"/>
+          </a:p>
+        </p:txBody>
+      </p:sp>
+      <p:sp>
+        <p:nvSpPr>
+          <p:cNvPr id="5" name="Text Placeholder 4"/>
           <p:cNvSpPr>
             <a:spLocks noGrp="1"/>
           </p:cNvSpPr>
@@ -1695,16 +3699,18 @@
         </p:nvSpPr>
         <p:spPr>
           <a:xfrm>
-            <a:off x="6172200" y="1681163"/>
-            <a:ext cx="5183188" cy="823912"/>
+            <a:off x="5088383" y="2160983"/>
+            <a:ext cx="4185618" cy="576262"/>
           </a:xfrm>
         </p:spPr>
         <p:txBody>
-          <a:bodyPr anchor="b"/>
+          <a:bodyPr anchor="b">
+            <a:noAutofit/>
+          </a:bodyPr>
           <a:lstStyle>
             <a:lvl1pPr marL="0" indent="0">
               <a:buNone/>
-              <a:defRPr sz="2400" b="1"/>
+              <a:defRPr sz="2400" b="0"/>
             </a:lvl1pPr>
             <a:lvl2pPr marL="457200" indent="0">
               <a:buNone/>
@@ -1750,13 +3756,7 @@
       </p:sp>
       <p:sp>
         <p:nvSpPr>
-          <p:cNvPr id="6" name="Content Placeholder 5">
-            <a:extLst>
-              <a:ext uri="{FF2B5EF4-FFF2-40B4-BE49-F238E27FC236}">
-                <a16:creationId xmlns:a16="http://schemas.microsoft.com/office/drawing/2014/main" id="{6F578E13-032B-AA96-5B4D-9E9AC5662700}"/>
-              </a:ext>
-            </a:extLst>
-          </p:cNvPr>
+          <p:cNvPr id="6" name="Content Placeholder 5"/>
           <p:cNvSpPr>
             <a:spLocks noGrp="1"/>
           </p:cNvSpPr>
@@ -1766,12 +3766,14 @@
         </p:nvSpPr>
         <p:spPr>
           <a:xfrm>
-            <a:off x="6172200" y="2505075"/>
-            <a:ext cx="5183188" cy="3684588"/>
+            <a:off x="5088384" y="2737245"/>
+            <a:ext cx="4185617" cy="3304117"/>
           </a:xfrm>
         </p:spPr>
         <p:txBody>
-          <a:bodyPr/>
+          <a:bodyPr>
+            <a:normAutofit/>
+          </a:bodyPr>
           <a:lstStyle/>
           <a:p>
             <a:pPr lvl="0"/>
@@ -1807,19 +3809,13 @@
               <a:rPr lang="en-US"/>
               <a:t>Fifth level</a:t>
             </a:r>
-            <a:endParaRPr lang="en-BE"/>
-          </a:p>
-        </p:txBody>
-      </p:sp>
-      <p:sp>
-        <p:nvSpPr>
-          <p:cNvPr id="7" name="Date Placeholder 6">
-            <a:extLst>
-              <a:ext uri="{FF2B5EF4-FFF2-40B4-BE49-F238E27FC236}">
-                <a16:creationId xmlns:a16="http://schemas.microsoft.com/office/drawing/2014/main" id="{7368A600-8C67-7881-A0E5-001875BA83E0}"/>
-              </a:ext>
-            </a:extLst>
-          </p:cNvPr>
+            <a:endParaRPr lang="en-US" dirty="0"/>
+          </a:p>
+        </p:txBody>
+      </p:sp>
+      <p:sp>
+        <p:nvSpPr>
+          <p:cNvPr id="7" name="Date Placeholder 6"/>
           <p:cNvSpPr>
             <a:spLocks noGrp="1"/>
           </p:cNvSpPr>
@@ -1834,7 +3830,7 @@
           <a:p>
             <a:fld id="{C70E5D01-44FA-40AF-8633-6FC63E8CF416}" type="datetimeFigureOut">
               <a:rPr lang="en-BE" smtClean="0"/>
-              <a:t>10/03/2026</a:t>
+              <a:t>12/03/2026</a:t>
             </a:fld>
             <a:endParaRPr lang="en-BE"/>
           </a:p>
@@ -1842,13 +3838,7 @@
       </p:sp>
       <p:sp>
         <p:nvSpPr>
-          <p:cNvPr id="8" name="Footer Placeholder 7">
-            <a:extLst>
-              <a:ext uri="{FF2B5EF4-FFF2-40B4-BE49-F238E27FC236}">
-                <a16:creationId xmlns:a16="http://schemas.microsoft.com/office/drawing/2014/main" id="{271964D0-DCDF-BA48-E79C-BDDD08D8B663}"/>
-              </a:ext>
-            </a:extLst>
-          </p:cNvPr>
+          <p:cNvPr id="8" name="Footer Placeholder 7"/>
           <p:cNvSpPr>
             <a:spLocks noGrp="1"/>
           </p:cNvSpPr>
@@ -1867,13 +3857,7 @@
       </p:sp>
       <p:sp>
         <p:nvSpPr>
-          <p:cNvPr id="9" name="Slide Number Placeholder 8">
-            <a:extLst>
-              <a:ext uri="{FF2B5EF4-FFF2-40B4-BE49-F238E27FC236}">
-                <a16:creationId xmlns:a16="http://schemas.microsoft.com/office/drawing/2014/main" id="{90FF8716-705D-6150-EA9D-D5967F054A5B}"/>
-              </a:ext>
-            </a:extLst>
-          </p:cNvPr>
+          <p:cNvPr id="9" name="Slide Number Placeholder 8"/>
           <p:cNvSpPr>
             <a:spLocks noGrp="1"/>
           </p:cNvSpPr>
@@ -1897,7 +3881,7 @@
     </p:spTree>
     <p:extLst>
       <p:ext uri="{BB962C8B-B14F-4D97-AF65-F5344CB8AC3E}">
-        <p14:creationId xmlns:p14="http://schemas.microsoft.com/office/powerpoint/2010/main" val="1410987665"/>
+        <p14:creationId xmlns:p14="http://schemas.microsoft.com/office/powerpoint/2010/main" val="3248633338"/>
       </p:ext>
     </p:extLst>
   </p:cSld>
@@ -1926,13 +3910,7 @@
       </p:grpSpPr>
       <p:sp>
         <p:nvSpPr>
-          <p:cNvPr id="2" name="Title 1">
-            <a:extLst>
-              <a:ext uri="{FF2B5EF4-FFF2-40B4-BE49-F238E27FC236}">
-                <a16:creationId xmlns:a16="http://schemas.microsoft.com/office/drawing/2014/main" id="{400403D8-1448-2D42-CB37-09B1539B59C8}"/>
-              </a:ext>
-            </a:extLst>
-          </p:cNvPr>
+          <p:cNvPr id="2" name="Title 1"/>
           <p:cNvSpPr>
             <a:spLocks noGrp="1"/>
           </p:cNvSpPr>
@@ -1940,7 +3918,12 @@
             <p:ph type="title"/>
           </p:nvPr>
         </p:nvSpPr>
-        <p:spPr/>
+        <p:spPr>
+          <a:xfrm>
+            <a:off x="677334" y="609600"/>
+            <a:ext cx="8596668" cy="1320800"/>
+          </a:xfrm>
+        </p:spPr>
         <p:txBody>
           <a:bodyPr/>
           <a:lstStyle/>
@@ -1949,19 +3932,13 @@
               <a:rPr lang="en-US"/>
               <a:t>Click to edit Master title style</a:t>
             </a:r>
-            <a:endParaRPr lang="en-BE"/>
-          </a:p>
-        </p:txBody>
-      </p:sp>
-      <p:sp>
-        <p:nvSpPr>
-          <p:cNvPr id="3" name="Date Placeholder 2">
-            <a:extLst>
-              <a:ext uri="{FF2B5EF4-FFF2-40B4-BE49-F238E27FC236}">
-                <a16:creationId xmlns:a16="http://schemas.microsoft.com/office/drawing/2014/main" id="{044C8343-22B4-A31B-F718-4DB108F569DD}"/>
-              </a:ext>
-            </a:extLst>
-          </p:cNvPr>
+            <a:endParaRPr lang="en-US" dirty="0"/>
+          </a:p>
+        </p:txBody>
+      </p:sp>
+      <p:sp>
+        <p:nvSpPr>
+          <p:cNvPr id="3" name="Date Placeholder 2"/>
           <p:cNvSpPr>
             <a:spLocks noGrp="1"/>
           </p:cNvSpPr>
@@ -1976,7 +3953,7 @@
           <a:p>
             <a:fld id="{C70E5D01-44FA-40AF-8633-6FC63E8CF416}" type="datetimeFigureOut">
               <a:rPr lang="en-BE" smtClean="0"/>
-              <a:t>10/03/2026</a:t>
+              <a:t>12/03/2026</a:t>
             </a:fld>
             <a:endParaRPr lang="en-BE"/>
           </a:p>
@@ -1984,13 +3961,7 @@
       </p:sp>
       <p:sp>
         <p:nvSpPr>
-          <p:cNvPr id="4" name="Footer Placeholder 3">
-            <a:extLst>
-              <a:ext uri="{FF2B5EF4-FFF2-40B4-BE49-F238E27FC236}">
-                <a16:creationId xmlns:a16="http://schemas.microsoft.com/office/drawing/2014/main" id="{42A34277-831B-F55C-3743-C20B4CC0E388}"/>
-              </a:ext>
-            </a:extLst>
-          </p:cNvPr>
+          <p:cNvPr id="4" name="Footer Placeholder 3"/>
           <p:cNvSpPr>
             <a:spLocks noGrp="1"/>
           </p:cNvSpPr>
@@ -2009,13 +3980,7 @@
       </p:sp>
       <p:sp>
         <p:nvSpPr>
-          <p:cNvPr id="5" name="Slide Number Placeholder 4">
-            <a:extLst>
-              <a:ext uri="{FF2B5EF4-FFF2-40B4-BE49-F238E27FC236}">
-                <a16:creationId xmlns:a16="http://schemas.microsoft.com/office/drawing/2014/main" id="{1C16AEBE-EE23-FE36-37E3-32CD0B8FEC7B}"/>
-              </a:ext>
-            </a:extLst>
-          </p:cNvPr>
+          <p:cNvPr id="5" name="Slide Number Placeholder 4"/>
           <p:cNvSpPr>
             <a:spLocks noGrp="1"/>
           </p:cNvSpPr>
@@ -2039,7 +4004,7 @@
     </p:spTree>
     <p:extLst>
       <p:ext uri="{BB962C8B-B14F-4D97-AF65-F5344CB8AC3E}">
-        <p14:creationId xmlns:p14="http://schemas.microsoft.com/office/powerpoint/2010/main" val="3868619089"/>
+        <p14:creationId xmlns:p14="http://schemas.microsoft.com/office/powerpoint/2010/main" val="4069254388"/>
       </p:ext>
     </p:extLst>
   </p:cSld>
@@ -2068,13 +4033,7 @@
       </p:grpSpPr>
       <p:sp>
         <p:nvSpPr>
-          <p:cNvPr id="2" name="Date Placeholder 1">
-            <a:extLst>
-              <a:ext uri="{FF2B5EF4-FFF2-40B4-BE49-F238E27FC236}">
-                <a16:creationId xmlns:a16="http://schemas.microsoft.com/office/drawing/2014/main" id="{7C08305D-058F-1E90-50F2-0923DA7411BB}"/>
-              </a:ext>
-            </a:extLst>
-          </p:cNvPr>
+          <p:cNvPr id="2" name="Date Placeholder 1"/>
           <p:cNvSpPr>
             <a:spLocks noGrp="1"/>
           </p:cNvSpPr>
@@ -2089,7 +4048,7 @@
           <a:p>
             <a:fld id="{C70E5D01-44FA-40AF-8633-6FC63E8CF416}" type="datetimeFigureOut">
               <a:rPr lang="en-BE" smtClean="0"/>
-              <a:t>10/03/2026</a:t>
+              <a:t>12/03/2026</a:t>
             </a:fld>
             <a:endParaRPr lang="en-BE"/>
           </a:p>
@@ -2097,13 +4056,7 @@
       </p:sp>
       <p:sp>
         <p:nvSpPr>
-          <p:cNvPr id="3" name="Footer Placeholder 2">
-            <a:extLst>
-              <a:ext uri="{FF2B5EF4-FFF2-40B4-BE49-F238E27FC236}">
-                <a16:creationId xmlns:a16="http://schemas.microsoft.com/office/drawing/2014/main" id="{1653E291-9E36-0F81-8238-658A0D379338}"/>
-              </a:ext>
-            </a:extLst>
-          </p:cNvPr>
+          <p:cNvPr id="3" name="Footer Placeholder 2"/>
           <p:cNvSpPr>
             <a:spLocks noGrp="1"/>
           </p:cNvSpPr>
@@ -2122,13 +4075,7 @@
       </p:sp>
       <p:sp>
         <p:nvSpPr>
-          <p:cNvPr id="4" name="Slide Number Placeholder 3">
-            <a:extLst>
-              <a:ext uri="{FF2B5EF4-FFF2-40B4-BE49-F238E27FC236}">
-                <a16:creationId xmlns:a16="http://schemas.microsoft.com/office/drawing/2014/main" id="{17493857-DAD7-BB7D-7D44-5CE271BBDB85}"/>
-              </a:ext>
-            </a:extLst>
-          </p:cNvPr>
+          <p:cNvPr id="4" name="Slide Number Placeholder 3"/>
           <p:cNvSpPr>
             <a:spLocks noGrp="1"/>
           </p:cNvSpPr>
@@ -2152,7 +4099,7 @@
     </p:spTree>
     <p:extLst>
       <p:ext uri="{BB962C8B-B14F-4D97-AF65-F5344CB8AC3E}">
-        <p14:creationId xmlns:p14="http://schemas.microsoft.com/office/powerpoint/2010/main" val="2394773630"/>
+        <p14:creationId xmlns:p14="http://schemas.microsoft.com/office/powerpoint/2010/main" val="962185123"/>
       </p:ext>
     </p:extLst>
   </p:cSld>
@@ -2181,13 +4128,7 @@
       </p:grpSpPr>
       <p:sp>
         <p:nvSpPr>
-          <p:cNvPr id="2" name="Title 1">
-            <a:extLst>
-              <a:ext uri="{FF2B5EF4-FFF2-40B4-BE49-F238E27FC236}">
-                <a16:creationId xmlns:a16="http://schemas.microsoft.com/office/drawing/2014/main" id="{678DB631-098D-01EC-0016-994F267A6AE6}"/>
-              </a:ext>
-            </a:extLst>
-          </p:cNvPr>
+          <p:cNvPr id="2" name="Title 1"/>
           <p:cNvSpPr>
             <a:spLocks noGrp="1"/>
           </p:cNvSpPr>
@@ -2197,15 +4138,17 @@
         </p:nvSpPr>
         <p:spPr>
           <a:xfrm>
-            <a:off x="839788" y="457200"/>
-            <a:ext cx="3932237" cy="1600200"/>
+            <a:off x="677334" y="1498604"/>
+            <a:ext cx="3854528" cy="1278466"/>
           </a:xfrm>
         </p:spPr>
         <p:txBody>
-          <a:bodyPr anchor="b"/>
+          <a:bodyPr anchor="b">
+            <a:normAutofit/>
+          </a:bodyPr>
           <a:lstStyle>
             <a:lvl1pPr>
-              <a:defRPr sz="3200"/>
+              <a:defRPr sz="2000"/>
             </a:lvl1pPr>
           </a:lstStyle>
           <a:p>
@@ -2213,19 +4156,13 @@
               <a:rPr lang="en-US"/>
               <a:t>Click to edit Master title style</a:t>
             </a:r>
-            <a:endParaRPr lang="en-BE"/>
-          </a:p>
-        </p:txBody>
-      </p:sp>
-      <p:sp>
-        <p:nvSpPr>
-          <p:cNvPr id="3" name="Content Placeholder 2">
-            <a:extLst>
-              <a:ext uri="{FF2B5EF4-FFF2-40B4-BE49-F238E27FC236}">
-                <a16:creationId xmlns:a16="http://schemas.microsoft.com/office/drawing/2014/main" id="{5AE7530B-EB73-F169-F63A-9B4DF9C9C54F}"/>
-              </a:ext>
-            </a:extLst>
-          </p:cNvPr>
+            <a:endParaRPr lang="en-US" dirty="0"/>
+          </a:p>
+        </p:txBody>
+      </p:sp>
+      <p:sp>
+        <p:nvSpPr>
+          <p:cNvPr id="3" name="Content Placeholder 2"/>
           <p:cNvSpPr>
             <a:spLocks noGrp="1"/>
           </p:cNvSpPr>
@@ -2235,41 +4172,15 @@
         </p:nvSpPr>
         <p:spPr>
           <a:xfrm>
-            <a:off x="5183188" y="987425"/>
-            <a:ext cx="6172200" cy="4873625"/>
+            <a:off x="4760461" y="514924"/>
+            <a:ext cx="4513541" cy="5526437"/>
           </a:xfrm>
         </p:spPr>
         <p:txBody>
-          <a:bodyPr/>
-          <a:lstStyle>
-            <a:lvl1pPr>
-              <a:defRPr sz="3200"/>
-            </a:lvl1pPr>
-            <a:lvl2pPr>
-              <a:defRPr sz="2800"/>
-            </a:lvl2pPr>
-            <a:lvl3pPr>
-              <a:defRPr sz="2400"/>
-            </a:lvl3pPr>
-            <a:lvl4pPr>
-              <a:defRPr sz="2000"/>
-            </a:lvl4pPr>
-            <a:lvl5pPr>
-              <a:defRPr sz="2000"/>
-            </a:lvl5pPr>
-            <a:lvl6pPr>
-              <a:defRPr sz="2000"/>
-            </a:lvl6pPr>
-            <a:lvl7pPr>
-              <a:defRPr sz="2000"/>
-            </a:lvl7pPr>
-            <a:lvl8pPr>
-              <a:defRPr sz="2000"/>
-            </a:lvl8pPr>
-            <a:lvl9pPr>
-              <a:defRPr sz="2000"/>
-            </a:lvl9pPr>
-          </a:lstStyle>
+          <a:bodyPr>
+            <a:normAutofit/>
+          </a:bodyPr>
+          <a:lstStyle/>
           <a:p>
             <a:pPr lvl="0"/>
             <a:r>
@@ -2304,19 +4215,13 @@
               <a:rPr lang="en-US"/>
               <a:t>Fifth level</a:t>
             </a:r>
-            <a:endParaRPr lang="en-BE"/>
-          </a:p>
-        </p:txBody>
-      </p:sp>
-      <p:sp>
-        <p:nvSpPr>
-          <p:cNvPr id="4" name="Text Placeholder 3">
-            <a:extLst>
-              <a:ext uri="{FF2B5EF4-FFF2-40B4-BE49-F238E27FC236}">
-                <a16:creationId xmlns:a16="http://schemas.microsoft.com/office/drawing/2014/main" id="{337D8417-A353-AF00-7781-590A2DC947DA}"/>
-              </a:ext>
-            </a:extLst>
-          </p:cNvPr>
+            <a:endParaRPr lang="en-US" dirty="0"/>
+          </a:p>
+        </p:txBody>
+      </p:sp>
+      <p:sp>
+        <p:nvSpPr>
+          <p:cNvPr id="4" name="Text Placeholder 3"/>
           <p:cNvSpPr>
             <a:spLocks noGrp="1"/>
           </p:cNvSpPr>
@@ -2326,46 +4231,48 @@
         </p:nvSpPr>
         <p:spPr>
           <a:xfrm>
-            <a:off x="839788" y="2057400"/>
-            <a:ext cx="3932237" cy="3811588"/>
+            <a:off x="677334" y="2777069"/>
+            <a:ext cx="3854528" cy="2584449"/>
           </a:xfrm>
         </p:spPr>
         <p:txBody>
-          <a:bodyPr/>
+          <a:bodyPr>
+            <a:normAutofit/>
+          </a:bodyPr>
           <a:lstStyle>
             <a:lvl1pPr marL="0" indent="0">
               <a:buNone/>
-              <a:defRPr sz="1600"/>
+              <a:defRPr sz="1400"/>
             </a:lvl1pPr>
-            <a:lvl2pPr marL="457200" indent="0">
+            <a:lvl2pPr marL="457063" indent="0">
               <a:buNone/>
               <a:defRPr sz="1400"/>
             </a:lvl2pPr>
-            <a:lvl3pPr marL="914400" indent="0">
+            <a:lvl3pPr marL="914126" indent="0">
               <a:buNone/>
               <a:defRPr sz="1200"/>
             </a:lvl3pPr>
-            <a:lvl4pPr marL="1371600" indent="0">
+            <a:lvl4pPr marL="1371189" indent="0">
               <a:buNone/>
               <a:defRPr sz="1000"/>
             </a:lvl4pPr>
-            <a:lvl5pPr marL="1828800" indent="0">
+            <a:lvl5pPr marL="1828251" indent="0">
               <a:buNone/>
               <a:defRPr sz="1000"/>
             </a:lvl5pPr>
-            <a:lvl6pPr marL="2286000" indent="0">
+            <a:lvl6pPr marL="2285314" indent="0">
               <a:buNone/>
               <a:defRPr sz="1000"/>
             </a:lvl6pPr>
-            <a:lvl7pPr marL="2743200" indent="0">
+            <a:lvl7pPr marL="2742377" indent="0">
               <a:buNone/>
               <a:defRPr sz="1000"/>
             </a:lvl7pPr>
-            <a:lvl8pPr marL="3200400" indent="0">
+            <a:lvl8pPr marL="3199440" indent="0">
               <a:buNone/>
               <a:defRPr sz="1000"/>
             </a:lvl8pPr>
-            <a:lvl9pPr marL="3657600" indent="0">
+            <a:lvl9pPr marL="3656503" indent="0">
               <a:buNone/>
               <a:defRPr sz="1000"/>
             </a:lvl9pPr>
@@ -2381,13 +4288,7 @@
       </p:sp>
       <p:sp>
         <p:nvSpPr>
-          <p:cNvPr id="5" name="Date Placeholder 4">
-            <a:extLst>
-              <a:ext uri="{FF2B5EF4-FFF2-40B4-BE49-F238E27FC236}">
-                <a16:creationId xmlns:a16="http://schemas.microsoft.com/office/drawing/2014/main" id="{E63F8C06-A9F2-5B2D-A8D2-C46BB63BBD7F}"/>
-              </a:ext>
-            </a:extLst>
-          </p:cNvPr>
+          <p:cNvPr id="5" name="Date Placeholder 4"/>
           <p:cNvSpPr>
             <a:spLocks noGrp="1"/>
           </p:cNvSpPr>
@@ -2402,7 +4303,7 @@
           <a:p>
             <a:fld id="{C70E5D01-44FA-40AF-8633-6FC63E8CF416}" type="datetimeFigureOut">
               <a:rPr lang="en-BE" smtClean="0"/>
-              <a:t>10/03/2026</a:t>
+              <a:t>12/03/2026</a:t>
             </a:fld>
             <a:endParaRPr lang="en-BE"/>
           </a:p>
@@ -2410,13 +4311,7 @@
       </p:sp>
       <p:sp>
         <p:nvSpPr>
-          <p:cNvPr id="6" name="Footer Placeholder 5">
-            <a:extLst>
-              <a:ext uri="{FF2B5EF4-FFF2-40B4-BE49-F238E27FC236}">
-                <a16:creationId xmlns:a16="http://schemas.microsoft.com/office/drawing/2014/main" id="{F50F222A-BD63-DE17-6F54-0B85006C8548}"/>
-              </a:ext>
-            </a:extLst>
-          </p:cNvPr>
+          <p:cNvPr id="6" name="Footer Placeholder 5"/>
           <p:cNvSpPr>
             <a:spLocks noGrp="1"/>
           </p:cNvSpPr>
@@ -2435,13 +4330,7 @@
       </p:sp>
       <p:sp>
         <p:nvSpPr>
-          <p:cNvPr id="7" name="Slide Number Placeholder 6">
-            <a:extLst>
-              <a:ext uri="{FF2B5EF4-FFF2-40B4-BE49-F238E27FC236}">
-                <a16:creationId xmlns:a16="http://schemas.microsoft.com/office/drawing/2014/main" id="{FF4650F6-CEF4-DCCC-11AD-B26105DFC2A5}"/>
-              </a:ext>
-            </a:extLst>
-          </p:cNvPr>
+          <p:cNvPr id="7" name="Slide Number Placeholder 6"/>
           <p:cNvSpPr>
             <a:spLocks noGrp="1"/>
           </p:cNvSpPr>
@@ -2465,7 +4354,7 @@
     </p:spTree>
     <p:extLst>
       <p:ext uri="{BB962C8B-B14F-4D97-AF65-F5344CB8AC3E}">
-        <p14:creationId xmlns:p14="http://schemas.microsoft.com/office/powerpoint/2010/main" val="163720883"/>
+        <p14:creationId xmlns:p14="http://schemas.microsoft.com/office/powerpoint/2010/main" val="1812754258"/>
       </p:ext>
     </p:extLst>
   </p:cSld>
@@ -2494,13 +4383,7 @@
       </p:grpSpPr>
       <p:sp>
         <p:nvSpPr>
-          <p:cNvPr id="2" name="Title 1">
-            <a:extLst>
-              <a:ext uri="{FF2B5EF4-FFF2-40B4-BE49-F238E27FC236}">
-                <a16:creationId xmlns:a16="http://schemas.microsoft.com/office/drawing/2014/main" id="{EEE4E65B-402E-AFE2-FCCB-F61A2675EBBE}"/>
-              </a:ext>
-            </a:extLst>
-          </p:cNvPr>
+          <p:cNvPr id="2" name="Title 1"/>
           <p:cNvSpPr>
             <a:spLocks noGrp="1"/>
           </p:cNvSpPr>
@@ -2510,15 +4393,17 @@
         </p:nvSpPr>
         <p:spPr>
           <a:xfrm>
-            <a:off x="839788" y="457200"/>
-            <a:ext cx="3932237" cy="1600200"/>
+            <a:off x="677334" y="4800600"/>
+            <a:ext cx="8596667" cy="566738"/>
           </a:xfrm>
         </p:spPr>
         <p:txBody>
-          <a:bodyPr anchor="b"/>
+          <a:bodyPr anchor="b">
+            <a:normAutofit/>
+          </a:bodyPr>
           <a:lstStyle>
-            <a:lvl1pPr>
-              <a:defRPr sz="3200"/>
+            <a:lvl1pPr algn="l">
+              <a:defRPr sz="2400" b="0"/>
             </a:lvl1pPr>
           </a:lstStyle>
           <a:p>
@@ -2526,21 +4411,15 @@
               <a:rPr lang="en-US"/>
               <a:t>Click to edit Master title style</a:t>
             </a:r>
-            <a:endParaRPr lang="en-BE"/>
-          </a:p>
-        </p:txBody>
-      </p:sp>
-      <p:sp>
-        <p:nvSpPr>
-          <p:cNvPr id="3" name="Picture Placeholder 2">
-            <a:extLst>
-              <a:ext uri="{FF2B5EF4-FFF2-40B4-BE49-F238E27FC236}">
-                <a16:creationId xmlns:a16="http://schemas.microsoft.com/office/drawing/2014/main" id="{C1D235F7-D833-5D38-2E94-C3E832A69BAF}"/>
-              </a:ext>
-            </a:extLst>
-          </p:cNvPr>
-          <p:cNvSpPr>
-            <a:spLocks noGrp="1"/>
+            <a:endParaRPr lang="en-US" dirty="0"/>
+          </a:p>
+        </p:txBody>
+      </p:sp>
+      <p:sp>
+        <p:nvSpPr>
+          <p:cNvPr id="3" name="Picture Placeholder 2"/>
+          <p:cNvSpPr>
+            <a:spLocks noGrp="1" noChangeAspect="1"/>
           </p:cNvSpPr>
           <p:nvPr>
             <p:ph type="pic" idx="1"/>
@@ -2548,118 +4427,120 @@
         </p:nvSpPr>
         <p:spPr>
           <a:xfrm>
-            <a:off x="5183188" y="987425"/>
-            <a:ext cx="6172200" cy="4873625"/>
+            <a:off x="677334" y="609600"/>
+            <a:ext cx="8596668" cy="3845718"/>
           </a:xfrm>
         </p:spPr>
         <p:txBody>
-          <a:bodyPr/>
+          <a:bodyPr anchor="t">
+            <a:normAutofit/>
+          </a:bodyPr>
           <a:lstStyle>
-            <a:lvl1pPr marL="0" indent="0">
-              <a:buNone/>
-              <a:defRPr sz="3200"/>
-            </a:lvl1pPr>
-            <a:lvl2pPr marL="457200" indent="0">
-              <a:buNone/>
-              <a:defRPr sz="2800"/>
-            </a:lvl2pPr>
-            <a:lvl3pPr marL="914400" indent="0">
-              <a:buNone/>
-              <a:defRPr sz="2400"/>
-            </a:lvl3pPr>
-            <a:lvl4pPr marL="1371600" indent="0">
-              <a:buNone/>
-              <a:defRPr sz="2000"/>
-            </a:lvl4pPr>
-            <a:lvl5pPr marL="1828800" indent="0">
-              <a:buNone/>
-              <a:defRPr sz="2000"/>
-            </a:lvl5pPr>
-            <a:lvl6pPr marL="2286000" indent="0">
-              <a:buNone/>
-              <a:defRPr sz="2000"/>
-            </a:lvl6pPr>
-            <a:lvl7pPr marL="2743200" indent="0">
-              <a:buNone/>
-              <a:defRPr sz="2000"/>
-            </a:lvl7pPr>
-            <a:lvl8pPr marL="3200400" indent="0">
-              <a:buNone/>
-              <a:defRPr sz="2000"/>
-            </a:lvl8pPr>
-            <a:lvl9pPr marL="3657600" indent="0">
-              <a:buNone/>
-              <a:defRPr sz="2000"/>
-            </a:lvl9pPr>
-          </a:lstStyle>
-          <a:p>
-            <a:endParaRPr lang="en-BE"/>
-          </a:p>
-        </p:txBody>
-      </p:sp>
-      <p:sp>
-        <p:nvSpPr>
-          <p:cNvPr id="4" name="Text Placeholder 3">
-            <a:extLst>
-              <a:ext uri="{FF2B5EF4-FFF2-40B4-BE49-F238E27FC236}">
-                <a16:creationId xmlns:a16="http://schemas.microsoft.com/office/drawing/2014/main" id="{E77D037C-D73D-700A-F737-99EE599CC2A0}"/>
-              </a:ext>
-            </a:extLst>
-          </p:cNvPr>
-          <p:cNvSpPr>
-            <a:spLocks noGrp="1"/>
-          </p:cNvSpPr>
-          <p:nvPr>
-            <p:ph type="body" sz="half" idx="2"/>
-          </p:nvPr>
-        </p:nvSpPr>
-        <p:spPr>
-          <a:xfrm>
-            <a:off x="839788" y="2057400"/>
-            <a:ext cx="3932237" cy="3811588"/>
-          </a:xfrm>
-        </p:spPr>
-        <p:txBody>
-          <a:bodyPr/>
-          <a:lstStyle>
-            <a:lvl1pPr marL="0" indent="0">
+            <a:lvl1pPr marL="0" indent="0" algn="ctr">
               <a:buNone/>
               <a:defRPr sz="1600"/>
             </a:lvl1pPr>
             <a:lvl2pPr marL="457200" indent="0">
               <a:buNone/>
-              <a:defRPr sz="1400"/>
+              <a:defRPr sz="1600"/>
             </a:lvl2pPr>
             <a:lvl3pPr marL="914400" indent="0">
               <a:buNone/>
-              <a:defRPr sz="1200"/>
+              <a:defRPr sz="1600"/>
             </a:lvl3pPr>
             <a:lvl4pPr marL="1371600" indent="0">
               <a:buNone/>
-              <a:defRPr sz="1000"/>
+              <a:defRPr sz="1600"/>
             </a:lvl4pPr>
             <a:lvl5pPr marL="1828800" indent="0">
               <a:buNone/>
-              <a:defRPr sz="1000"/>
+              <a:defRPr sz="1600"/>
             </a:lvl5pPr>
             <a:lvl6pPr marL="2286000" indent="0">
               <a:buNone/>
-              <a:defRPr sz="1000"/>
+              <a:defRPr sz="1600"/>
             </a:lvl6pPr>
             <a:lvl7pPr marL="2743200" indent="0">
               <a:buNone/>
-              <a:defRPr sz="1000"/>
+              <a:defRPr sz="1600"/>
             </a:lvl7pPr>
             <a:lvl8pPr marL="3200400" indent="0">
               <a:buNone/>
-              <a:defRPr sz="1000"/>
+              <a:defRPr sz="1600"/>
             </a:lvl8pPr>
             <a:lvl9pPr marL="3657600" indent="0">
               <a:buNone/>
-              <a:defRPr sz="1000"/>
+              <a:defRPr sz="1600"/>
             </a:lvl9pPr>
           </a:lstStyle>
           <a:p>
+            <a:r>
+              <a:rPr lang="en-US"/>
+              <a:t>Click icon to add picture</a:t>
+            </a:r>
+            <a:endParaRPr lang="en-US" dirty="0"/>
+          </a:p>
+        </p:txBody>
+      </p:sp>
+      <p:sp>
+        <p:nvSpPr>
+          <p:cNvPr id="4" name="Text Placeholder 3"/>
+          <p:cNvSpPr>
+            <a:spLocks noGrp="1"/>
+          </p:cNvSpPr>
+          <p:nvPr>
+            <p:ph type="body" sz="half" idx="2"/>
+          </p:nvPr>
+        </p:nvSpPr>
+        <p:spPr>
+          <a:xfrm>
+            <a:off x="677334" y="5367338"/>
+            <a:ext cx="8596667" cy="674024"/>
+          </a:xfrm>
+        </p:spPr>
+        <p:txBody>
+          <a:bodyPr>
+            <a:normAutofit/>
+          </a:bodyPr>
+          <a:lstStyle>
+            <a:lvl1pPr marL="0" indent="0">
+              <a:buNone/>
+              <a:defRPr sz="1200"/>
+            </a:lvl1pPr>
+            <a:lvl2pPr marL="457200" indent="0">
+              <a:buNone/>
+              <a:defRPr sz="1200"/>
+            </a:lvl2pPr>
+            <a:lvl3pPr marL="914400" indent="0">
+              <a:buNone/>
+              <a:defRPr sz="1000"/>
+            </a:lvl3pPr>
+            <a:lvl4pPr marL="1371600" indent="0">
+              <a:buNone/>
+              <a:defRPr sz="900"/>
+            </a:lvl4pPr>
+            <a:lvl5pPr marL="1828800" indent="0">
+              <a:buNone/>
+              <a:defRPr sz="900"/>
+            </a:lvl5pPr>
+            <a:lvl6pPr marL="2286000" indent="0">
+              <a:buNone/>
+              <a:defRPr sz="900"/>
+            </a:lvl6pPr>
+            <a:lvl7pPr marL="2743200" indent="0">
+              <a:buNone/>
+              <a:defRPr sz="900"/>
+            </a:lvl7pPr>
+            <a:lvl8pPr marL="3200400" indent="0">
+              <a:buNone/>
+              <a:defRPr sz="900"/>
+            </a:lvl8pPr>
+            <a:lvl9pPr marL="3657600" indent="0">
+              <a:buNone/>
+              <a:defRPr sz="900"/>
+            </a:lvl9pPr>
+          </a:lstStyle>
+          <a:p>
             <a:pPr lvl="0"/>
             <a:r>
               <a:rPr lang="en-US"/>
@@ -2670,13 +4551,7 @@
       </p:sp>
       <p:sp>
         <p:nvSpPr>
-          <p:cNvPr id="5" name="Date Placeholder 4">
-            <a:extLst>
-              <a:ext uri="{FF2B5EF4-FFF2-40B4-BE49-F238E27FC236}">
-                <a16:creationId xmlns:a16="http://schemas.microsoft.com/office/drawing/2014/main" id="{EB2418F4-35A8-CBDB-B686-5AB760FC9D10}"/>
-              </a:ext>
-            </a:extLst>
-          </p:cNvPr>
+          <p:cNvPr id="5" name="Date Placeholder 4"/>
           <p:cNvSpPr>
             <a:spLocks noGrp="1"/>
           </p:cNvSpPr>
@@ -2691,7 +4566,7 @@
           <a:p>
             <a:fld id="{C70E5D01-44FA-40AF-8633-6FC63E8CF416}" type="datetimeFigureOut">
               <a:rPr lang="en-BE" smtClean="0"/>
-              <a:t>10/03/2026</a:t>
+              <a:t>12/03/2026</a:t>
             </a:fld>
             <a:endParaRPr lang="en-BE"/>
           </a:p>
@@ -2699,13 +4574,7 @@
       </p:sp>
       <p:sp>
         <p:nvSpPr>
-          <p:cNvPr id="6" name="Footer Placeholder 5">
-            <a:extLst>
-              <a:ext uri="{FF2B5EF4-FFF2-40B4-BE49-F238E27FC236}">
-                <a16:creationId xmlns:a16="http://schemas.microsoft.com/office/drawing/2014/main" id="{D49703B5-2014-5F80-9E86-175A5D7BB901}"/>
-              </a:ext>
-            </a:extLst>
-          </p:cNvPr>
+          <p:cNvPr id="6" name="Footer Placeholder 5"/>
           <p:cNvSpPr>
             <a:spLocks noGrp="1"/>
           </p:cNvSpPr>
@@ -2724,13 +4593,7 @@
       </p:sp>
       <p:sp>
         <p:nvSpPr>
-          <p:cNvPr id="7" name="Slide Number Placeholder 6">
-            <a:extLst>
-              <a:ext uri="{FF2B5EF4-FFF2-40B4-BE49-F238E27FC236}">
-                <a16:creationId xmlns:a16="http://schemas.microsoft.com/office/drawing/2014/main" id="{6CCCCF69-4629-B828-05FA-A4111524B4B1}"/>
-              </a:ext>
-            </a:extLst>
-          </p:cNvPr>
+          <p:cNvPr id="7" name="Slide Number Placeholder 6"/>
           <p:cNvSpPr>
             <a:spLocks noGrp="1"/>
           </p:cNvSpPr>
@@ -2754,7 +4617,7 @@
     </p:spTree>
     <p:extLst>
       <p:ext uri="{BB962C8B-B14F-4D97-AF65-F5344CB8AC3E}">
-        <p14:creationId xmlns:p14="http://schemas.microsoft.com/office/powerpoint/2010/main" val="2871023922"/>
+        <p14:creationId xmlns:p14="http://schemas.microsoft.com/office/powerpoint/2010/main" val="2698011321"/>
       </p:ext>
     </p:extLst>
   </p:cSld>
@@ -2786,15 +4649,539 @@
           <a:chExt cx="0" cy="0"/>
         </a:xfrm>
       </p:grpSpPr>
-      <p:sp>
-        <p:nvSpPr>
-          <p:cNvPr id="2" name="Title Placeholder 1">
-            <a:extLst>
-              <a:ext uri="{FF2B5EF4-FFF2-40B4-BE49-F238E27FC236}">
-                <a16:creationId xmlns:a16="http://schemas.microsoft.com/office/drawing/2014/main" id="{D70FA4B0-F0A3-FA6D-CFE4-90F6B8A52D94}"/>
-              </a:ext>
-            </a:extLst>
-          </p:cNvPr>
+      <p:grpSp>
+        <p:nvGrpSpPr>
+          <p:cNvPr id="7" name="Group 6"/>
+          <p:cNvGrpSpPr/>
+          <p:nvPr/>
+        </p:nvGrpSpPr>
+        <p:grpSpPr>
+          <a:xfrm>
+            <a:off x="0" y="-8467"/>
+            <a:ext cx="12192000" cy="6866467"/>
+            <a:chOff x="0" y="-8467"/>
+            <a:chExt cx="12192000" cy="6866467"/>
+          </a:xfrm>
+        </p:grpSpPr>
+        <p:cxnSp>
+          <p:nvCxnSpPr>
+            <p:cNvPr id="20" name="Straight Connector 19"/>
+            <p:cNvCxnSpPr/>
+            <p:nvPr/>
+          </p:nvCxnSpPr>
+          <p:spPr>
+            <a:xfrm>
+              <a:off x="9371012" y="0"/>
+              <a:ext cx="1219200" cy="6858000"/>
+            </a:xfrm>
+            <a:prstGeom prst="line">
+              <a:avLst/>
+            </a:prstGeom>
+            <a:ln w="9525">
+              <a:solidFill>
+                <a:schemeClr val="bg1">
+                  <a:lumMod val="75000"/>
+                </a:schemeClr>
+              </a:solidFill>
+            </a:ln>
+          </p:spPr>
+          <p:style>
+            <a:lnRef idx="2">
+              <a:schemeClr val="accent1"/>
+            </a:lnRef>
+            <a:fillRef idx="0">
+              <a:schemeClr val="accent1"/>
+            </a:fillRef>
+            <a:effectRef idx="1">
+              <a:schemeClr val="accent1"/>
+            </a:effectRef>
+            <a:fontRef idx="minor">
+              <a:schemeClr val="tx1"/>
+            </a:fontRef>
+          </p:style>
+        </p:cxnSp>
+        <p:cxnSp>
+          <p:nvCxnSpPr>
+            <p:cNvPr id="21" name="Straight Connector 20"/>
+            <p:cNvCxnSpPr/>
+            <p:nvPr/>
+          </p:nvCxnSpPr>
+          <p:spPr>
+            <a:xfrm flipH="1">
+              <a:off x="7425267" y="3681413"/>
+              <a:ext cx="4763558" cy="3176587"/>
+            </a:xfrm>
+            <a:prstGeom prst="line">
+              <a:avLst/>
+            </a:prstGeom>
+            <a:ln w="9525">
+              <a:solidFill>
+                <a:schemeClr val="bg1">
+                  <a:lumMod val="85000"/>
+                </a:schemeClr>
+              </a:solidFill>
+            </a:ln>
+          </p:spPr>
+          <p:style>
+            <a:lnRef idx="2">
+              <a:schemeClr val="accent1"/>
+            </a:lnRef>
+            <a:fillRef idx="0">
+              <a:schemeClr val="accent1"/>
+            </a:fillRef>
+            <a:effectRef idx="1">
+              <a:schemeClr val="accent1"/>
+            </a:effectRef>
+            <a:fontRef idx="minor">
+              <a:schemeClr val="tx1"/>
+            </a:fontRef>
+          </p:style>
+        </p:cxnSp>
+        <p:sp>
+          <p:nvSpPr>
+            <p:cNvPr id="22" name="Rectangle 23"/>
+            <p:cNvSpPr/>
+            <p:nvPr/>
+          </p:nvSpPr>
+          <p:spPr>
+            <a:xfrm>
+              <a:off x="9181476" y="-8467"/>
+              <a:ext cx="3007349" cy="6866467"/>
+            </a:xfrm>
+            <a:custGeom>
+              <a:avLst/>
+              <a:gdLst/>
+              <a:ahLst/>
+              <a:cxnLst/>
+              <a:rect l="l" t="t" r="r" b="b"/>
+              <a:pathLst>
+                <a:path w="3007349" h="6866467">
+                  <a:moveTo>
+                    <a:pt x="2045532" y="0"/>
+                  </a:moveTo>
+                  <a:lnTo>
+                    <a:pt x="3007349" y="0"/>
+                  </a:lnTo>
+                  <a:lnTo>
+                    <a:pt x="3007349" y="6866467"/>
+                  </a:lnTo>
+                  <a:lnTo>
+                    <a:pt x="0" y="6866467"/>
+                  </a:lnTo>
+                  <a:lnTo>
+                    <a:pt x="2045532" y="0"/>
+                  </a:lnTo>
+                  <a:close/>
+                </a:path>
+              </a:pathLst>
+            </a:custGeom>
+            <a:solidFill>
+              <a:schemeClr val="accent1">
+                <a:alpha val="30000"/>
+              </a:schemeClr>
+            </a:solidFill>
+            <a:ln>
+              <a:noFill/>
+            </a:ln>
+            <a:effectLst/>
+          </p:spPr>
+          <p:style>
+            <a:lnRef idx="1">
+              <a:schemeClr val="accent1"/>
+            </a:lnRef>
+            <a:fillRef idx="3">
+              <a:schemeClr val="accent1"/>
+            </a:fillRef>
+            <a:effectRef idx="2">
+              <a:schemeClr val="accent1"/>
+            </a:effectRef>
+            <a:fontRef idx="minor">
+              <a:schemeClr val="lt1"/>
+            </a:fontRef>
+          </p:style>
+        </p:sp>
+        <p:sp>
+          <p:nvSpPr>
+            <p:cNvPr id="23" name="Rectangle 25"/>
+            <p:cNvSpPr/>
+            <p:nvPr/>
+          </p:nvSpPr>
+          <p:spPr>
+            <a:xfrm>
+              <a:off x="9603442" y="-8467"/>
+              <a:ext cx="2588558" cy="6866467"/>
+            </a:xfrm>
+            <a:custGeom>
+              <a:avLst/>
+              <a:gdLst/>
+              <a:ahLst/>
+              <a:cxnLst/>
+              <a:rect l="l" t="t" r="r" b="b"/>
+              <a:pathLst>
+                <a:path w="2573311" h="6866467">
+                  <a:moveTo>
+                    <a:pt x="0" y="0"/>
+                  </a:moveTo>
+                  <a:lnTo>
+                    <a:pt x="2573311" y="0"/>
+                  </a:lnTo>
+                  <a:lnTo>
+                    <a:pt x="2573311" y="6866467"/>
+                  </a:lnTo>
+                  <a:lnTo>
+                    <a:pt x="1202336" y="6866467"/>
+                  </a:lnTo>
+                  <a:lnTo>
+                    <a:pt x="0" y="0"/>
+                  </a:lnTo>
+                  <a:close/>
+                </a:path>
+              </a:pathLst>
+            </a:custGeom>
+            <a:solidFill>
+              <a:schemeClr val="accent1">
+                <a:alpha val="20000"/>
+              </a:schemeClr>
+            </a:solidFill>
+            <a:ln>
+              <a:noFill/>
+            </a:ln>
+            <a:effectLst/>
+          </p:spPr>
+          <p:style>
+            <a:lnRef idx="1">
+              <a:schemeClr val="accent1"/>
+            </a:lnRef>
+            <a:fillRef idx="3">
+              <a:schemeClr val="accent1"/>
+            </a:fillRef>
+            <a:effectRef idx="2">
+              <a:schemeClr val="accent1"/>
+            </a:effectRef>
+            <a:fontRef idx="minor">
+              <a:schemeClr val="lt1"/>
+            </a:fontRef>
+          </p:style>
+        </p:sp>
+        <p:sp>
+          <p:nvSpPr>
+            <p:cNvPr id="24" name="Isosceles Triangle 23"/>
+            <p:cNvSpPr/>
+            <p:nvPr/>
+          </p:nvSpPr>
+          <p:spPr>
+            <a:xfrm>
+              <a:off x="8932333" y="3048000"/>
+              <a:ext cx="3259667" cy="3810000"/>
+            </a:xfrm>
+            <a:prstGeom prst="triangle">
+              <a:avLst>
+                <a:gd name="adj" fmla="val 100000"/>
+              </a:avLst>
+            </a:prstGeom>
+            <a:solidFill>
+              <a:schemeClr val="accent2">
+                <a:alpha val="72000"/>
+              </a:schemeClr>
+            </a:solidFill>
+            <a:ln>
+              <a:noFill/>
+            </a:ln>
+            <a:effectLst/>
+          </p:spPr>
+          <p:style>
+            <a:lnRef idx="1">
+              <a:schemeClr val="accent1"/>
+            </a:lnRef>
+            <a:fillRef idx="3">
+              <a:schemeClr val="accent1"/>
+            </a:fillRef>
+            <a:effectRef idx="2">
+              <a:schemeClr val="accent1"/>
+            </a:effectRef>
+            <a:fontRef idx="minor">
+              <a:schemeClr val="lt1"/>
+            </a:fontRef>
+          </p:style>
+        </p:sp>
+        <p:sp>
+          <p:nvSpPr>
+            <p:cNvPr id="25" name="Rectangle 27"/>
+            <p:cNvSpPr/>
+            <p:nvPr/>
+          </p:nvSpPr>
+          <p:spPr>
+            <a:xfrm>
+              <a:off x="9334500" y="-8467"/>
+              <a:ext cx="2854326" cy="6866467"/>
+            </a:xfrm>
+            <a:custGeom>
+              <a:avLst/>
+              <a:gdLst/>
+              <a:ahLst/>
+              <a:cxnLst/>
+              <a:rect l="l" t="t" r="r" b="b"/>
+              <a:pathLst>
+                <a:path w="2858013" h="6866467">
+                  <a:moveTo>
+                    <a:pt x="0" y="0"/>
+                  </a:moveTo>
+                  <a:lnTo>
+                    <a:pt x="2858013" y="0"/>
+                  </a:lnTo>
+                  <a:lnTo>
+                    <a:pt x="2858013" y="6866467"/>
+                  </a:lnTo>
+                  <a:lnTo>
+                    <a:pt x="2473942" y="6866467"/>
+                  </a:lnTo>
+                  <a:lnTo>
+                    <a:pt x="0" y="0"/>
+                  </a:lnTo>
+                  <a:close/>
+                </a:path>
+              </a:pathLst>
+            </a:custGeom>
+            <a:solidFill>
+              <a:schemeClr val="accent2">
+                <a:lumMod val="75000"/>
+                <a:alpha val="70000"/>
+              </a:schemeClr>
+            </a:solidFill>
+            <a:ln>
+              <a:noFill/>
+            </a:ln>
+            <a:effectLst/>
+          </p:spPr>
+          <p:style>
+            <a:lnRef idx="1">
+              <a:schemeClr val="accent1"/>
+            </a:lnRef>
+            <a:fillRef idx="3">
+              <a:schemeClr val="accent1"/>
+            </a:fillRef>
+            <a:effectRef idx="2">
+              <a:schemeClr val="accent1"/>
+            </a:effectRef>
+            <a:fontRef idx="minor">
+              <a:schemeClr val="lt1"/>
+            </a:fontRef>
+          </p:style>
+        </p:sp>
+        <p:sp>
+          <p:nvSpPr>
+            <p:cNvPr id="26" name="Rectangle 28"/>
+            <p:cNvSpPr/>
+            <p:nvPr/>
+          </p:nvSpPr>
+          <p:spPr>
+            <a:xfrm>
+              <a:off x="10898730" y="-8467"/>
+              <a:ext cx="1290094" cy="6866467"/>
+            </a:xfrm>
+            <a:custGeom>
+              <a:avLst/>
+              <a:gdLst/>
+              <a:ahLst/>
+              <a:cxnLst/>
+              <a:rect l="l" t="t" r="r" b="b"/>
+              <a:pathLst>
+                <a:path w="1290094" h="6858000">
+                  <a:moveTo>
+                    <a:pt x="1019735" y="0"/>
+                  </a:moveTo>
+                  <a:lnTo>
+                    <a:pt x="1290094" y="0"/>
+                  </a:lnTo>
+                  <a:lnTo>
+                    <a:pt x="1290094" y="6858000"/>
+                  </a:lnTo>
+                  <a:lnTo>
+                    <a:pt x="0" y="6858000"/>
+                  </a:lnTo>
+                  <a:lnTo>
+                    <a:pt x="1019735" y="0"/>
+                  </a:lnTo>
+                  <a:close/>
+                </a:path>
+              </a:pathLst>
+            </a:custGeom>
+            <a:solidFill>
+              <a:schemeClr val="accent1">
+                <a:lumMod val="60000"/>
+                <a:lumOff val="40000"/>
+                <a:alpha val="70000"/>
+              </a:schemeClr>
+            </a:solidFill>
+            <a:ln>
+              <a:noFill/>
+            </a:ln>
+            <a:effectLst/>
+          </p:spPr>
+          <p:style>
+            <a:lnRef idx="1">
+              <a:schemeClr val="accent1"/>
+            </a:lnRef>
+            <a:fillRef idx="3">
+              <a:schemeClr val="accent1"/>
+            </a:fillRef>
+            <a:effectRef idx="2">
+              <a:schemeClr val="accent1"/>
+            </a:effectRef>
+            <a:fontRef idx="minor">
+              <a:schemeClr val="lt1"/>
+            </a:fontRef>
+          </p:style>
+        </p:sp>
+        <p:sp>
+          <p:nvSpPr>
+            <p:cNvPr id="27" name="Rectangle 29"/>
+            <p:cNvSpPr/>
+            <p:nvPr/>
+          </p:nvSpPr>
+          <p:spPr>
+            <a:xfrm>
+              <a:off x="10938999" y="-8467"/>
+              <a:ext cx="1249825" cy="6866467"/>
+            </a:xfrm>
+            <a:custGeom>
+              <a:avLst/>
+              <a:gdLst/>
+              <a:ahLst/>
+              <a:cxnLst/>
+              <a:rect l="l" t="t" r="r" b="b"/>
+              <a:pathLst>
+                <a:path w="1249825" h="6858000">
+                  <a:moveTo>
+                    <a:pt x="0" y="0"/>
+                  </a:moveTo>
+                  <a:lnTo>
+                    <a:pt x="1249825" y="0"/>
+                  </a:lnTo>
+                  <a:lnTo>
+                    <a:pt x="1249825" y="6858000"/>
+                  </a:lnTo>
+                  <a:lnTo>
+                    <a:pt x="1109382" y="6858000"/>
+                  </a:lnTo>
+                  <a:lnTo>
+                    <a:pt x="0" y="0"/>
+                  </a:lnTo>
+                  <a:close/>
+                </a:path>
+              </a:pathLst>
+            </a:custGeom>
+            <a:solidFill>
+              <a:schemeClr val="accent1">
+                <a:alpha val="65000"/>
+              </a:schemeClr>
+            </a:solidFill>
+            <a:ln>
+              <a:noFill/>
+            </a:ln>
+            <a:effectLst/>
+          </p:spPr>
+          <p:style>
+            <a:lnRef idx="1">
+              <a:schemeClr val="accent1"/>
+            </a:lnRef>
+            <a:fillRef idx="3">
+              <a:schemeClr val="accent1"/>
+            </a:fillRef>
+            <a:effectRef idx="2">
+              <a:schemeClr val="accent1"/>
+            </a:effectRef>
+            <a:fontRef idx="minor">
+              <a:schemeClr val="lt1"/>
+            </a:fontRef>
+          </p:style>
+        </p:sp>
+        <p:sp>
+          <p:nvSpPr>
+            <p:cNvPr id="28" name="Isosceles Triangle 27"/>
+            <p:cNvSpPr/>
+            <p:nvPr/>
+          </p:nvSpPr>
+          <p:spPr>
+            <a:xfrm>
+              <a:off x="10371666" y="3589867"/>
+              <a:ext cx="1817159" cy="3268133"/>
+            </a:xfrm>
+            <a:prstGeom prst="triangle">
+              <a:avLst>
+                <a:gd name="adj" fmla="val 100000"/>
+              </a:avLst>
+            </a:prstGeom>
+            <a:solidFill>
+              <a:schemeClr val="accent1">
+                <a:alpha val="80000"/>
+              </a:schemeClr>
+            </a:solidFill>
+            <a:ln>
+              <a:noFill/>
+            </a:ln>
+            <a:effectLst/>
+          </p:spPr>
+          <p:style>
+            <a:lnRef idx="1">
+              <a:schemeClr val="accent1"/>
+            </a:lnRef>
+            <a:fillRef idx="3">
+              <a:schemeClr val="accent1"/>
+            </a:fillRef>
+            <a:effectRef idx="2">
+              <a:schemeClr val="accent1"/>
+            </a:effectRef>
+            <a:fontRef idx="minor">
+              <a:schemeClr val="lt1"/>
+            </a:fontRef>
+          </p:style>
+        </p:sp>
+        <p:sp>
+          <p:nvSpPr>
+            <p:cNvPr id="29" name="Isosceles Triangle 28"/>
+            <p:cNvSpPr/>
+            <p:nvPr/>
+          </p:nvSpPr>
+          <p:spPr>
+            <a:xfrm>
+              <a:off x="0" y="4013200"/>
+              <a:ext cx="448733" cy="2844800"/>
+            </a:xfrm>
+            <a:prstGeom prst="triangle">
+              <a:avLst>
+                <a:gd name="adj" fmla="val 0"/>
+              </a:avLst>
+            </a:prstGeom>
+            <a:solidFill>
+              <a:schemeClr val="accent1">
+                <a:alpha val="85000"/>
+              </a:schemeClr>
+            </a:solidFill>
+            <a:ln>
+              <a:noFill/>
+            </a:ln>
+            <a:effectLst/>
+          </p:spPr>
+          <p:style>
+            <a:lnRef idx="1">
+              <a:schemeClr val="accent1"/>
+            </a:lnRef>
+            <a:fillRef idx="3">
+              <a:schemeClr val="accent1"/>
+            </a:fillRef>
+            <a:effectRef idx="2">
+              <a:schemeClr val="accent1"/>
+            </a:effectRef>
+            <a:fontRef idx="minor">
+              <a:schemeClr val="lt1"/>
+            </a:fontRef>
+          </p:style>
+        </p:sp>
+      </p:grpSp>
+      <p:sp>
+        <p:nvSpPr>
+          <p:cNvPr id="2" name="Title Placeholder 1"/>
           <p:cNvSpPr>
             <a:spLocks noGrp="1"/>
           </p:cNvSpPr>
@@ -2804,15 +5191,15 @@
         </p:nvSpPr>
         <p:spPr>
           <a:xfrm>
-            <a:off x="838200" y="365125"/>
-            <a:ext cx="10515600" cy="1325563"/>
+            <a:off x="677334" y="609600"/>
+            <a:ext cx="8596668" cy="1320800"/>
           </a:xfrm>
           <a:prstGeom prst="rect">
             <a:avLst/>
           </a:prstGeom>
         </p:spPr>
         <p:txBody>
-          <a:bodyPr vert="horz" lIns="91440" tIns="45720" rIns="91440" bIns="45720" rtlCol="0" anchor="ctr">
+          <a:bodyPr vert="horz" lIns="91440" tIns="45720" rIns="91440" bIns="45720" rtlCol="0" anchor="t">
             <a:normAutofit/>
           </a:bodyPr>
           <a:lstStyle/>
@@ -2821,19 +5208,13 @@
               <a:rPr lang="en-US"/>
               <a:t>Click to edit Master title style</a:t>
             </a:r>
-            <a:endParaRPr lang="en-BE"/>
-          </a:p>
-        </p:txBody>
-      </p:sp>
-      <p:sp>
-        <p:nvSpPr>
-          <p:cNvPr id="3" name="Text Placeholder 2">
-            <a:extLst>
-              <a:ext uri="{FF2B5EF4-FFF2-40B4-BE49-F238E27FC236}">
-                <a16:creationId xmlns:a16="http://schemas.microsoft.com/office/drawing/2014/main" id="{CA8B6180-6C28-5F44-0898-E2D6676EF5AF}"/>
-              </a:ext>
-            </a:extLst>
-          </p:cNvPr>
+            <a:endParaRPr lang="en-US" dirty="0"/>
+          </a:p>
+        </p:txBody>
+      </p:sp>
+      <p:sp>
+        <p:nvSpPr>
+          <p:cNvPr id="3" name="Text Placeholder 2"/>
           <p:cNvSpPr>
             <a:spLocks noGrp="1"/>
           </p:cNvSpPr>
@@ -2843,8 +5224,8 @@
         </p:nvSpPr>
         <p:spPr>
           <a:xfrm>
-            <a:off x="838200" y="1825625"/>
-            <a:ext cx="10515600" cy="4351338"/>
+            <a:off x="677334" y="2160589"/>
+            <a:ext cx="8596668" cy="3880773"/>
           </a:xfrm>
           <a:prstGeom prst="rect">
             <a:avLst/>
@@ -2889,19 +5270,13 @@
               <a:rPr lang="en-US"/>
               <a:t>Fifth level</a:t>
             </a:r>
-            <a:endParaRPr lang="en-BE"/>
-          </a:p>
-        </p:txBody>
-      </p:sp>
-      <p:sp>
-        <p:nvSpPr>
-          <p:cNvPr id="4" name="Date Placeholder 3">
-            <a:extLst>
-              <a:ext uri="{FF2B5EF4-FFF2-40B4-BE49-F238E27FC236}">
-                <a16:creationId xmlns:a16="http://schemas.microsoft.com/office/drawing/2014/main" id="{7189571F-E29E-2C98-4887-2132417608AB}"/>
-              </a:ext>
-            </a:extLst>
-          </p:cNvPr>
+            <a:endParaRPr lang="en-US" dirty="0"/>
+          </a:p>
+        </p:txBody>
+      </p:sp>
+      <p:sp>
+        <p:nvSpPr>
+          <p:cNvPr id="4" name="Date Placeholder 3"/>
           <p:cNvSpPr>
             <a:spLocks noGrp="1"/>
           </p:cNvSpPr>
@@ -2911,8 +5286,8 @@
         </p:nvSpPr>
         <p:spPr>
           <a:xfrm>
-            <a:off x="838200" y="6356350"/>
-            <a:ext cx="2743200" cy="365125"/>
+            <a:off x="7205133" y="6041362"/>
+            <a:ext cx="911939" cy="365125"/>
           </a:xfrm>
           <a:prstGeom prst="rect">
             <a:avLst/>
@@ -2921,11 +5296,11 @@
         <p:txBody>
           <a:bodyPr vert="horz" lIns="91440" tIns="45720" rIns="91440" bIns="45720" rtlCol="0" anchor="ctr"/>
           <a:lstStyle>
-            <a:lvl1pPr algn="l">
-              <a:defRPr sz="1200">
+            <a:lvl1pPr algn="r">
+              <a:defRPr sz="900">
                 <a:solidFill>
                   <a:schemeClr val="tx1">
-                    <a:tint val="82000"/>
+                    <a:tint val="75000"/>
                   </a:schemeClr>
                 </a:solidFill>
               </a:defRPr>
@@ -2934,7 +5309,7 @@
           <a:p>
             <a:fld id="{C70E5D01-44FA-40AF-8633-6FC63E8CF416}" type="datetimeFigureOut">
               <a:rPr lang="en-BE" smtClean="0"/>
-              <a:t>10/03/2026</a:t>
+              <a:t>12/03/2026</a:t>
             </a:fld>
             <a:endParaRPr lang="en-BE"/>
           </a:p>
@@ -2942,13 +5317,7 @@
       </p:sp>
       <p:sp>
         <p:nvSpPr>
-          <p:cNvPr id="5" name="Footer Placeholder 4">
-            <a:extLst>
-              <a:ext uri="{FF2B5EF4-FFF2-40B4-BE49-F238E27FC236}">
-                <a16:creationId xmlns:a16="http://schemas.microsoft.com/office/drawing/2014/main" id="{876D14DC-9602-FD53-3B91-A18441BC35A0}"/>
-              </a:ext>
-            </a:extLst>
-          </p:cNvPr>
+          <p:cNvPr id="5" name="Footer Placeholder 4"/>
           <p:cNvSpPr>
             <a:spLocks noGrp="1"/>
           </p:cNvSpPr>
@@ -2958,8 +5327,8 @@
         </p:nvSpPr>
         <p:spPr>
           <a:xfrm>
-            <a:off x="4038600" y="6356350"/>
-            <a:ext cx="4114800" cy="365125"/>
+            <a:off x="677334" y="6041362"/>
+            <a:ext cx="6297612" cy="365125"/>
           </a:xfrm>
           <a:prstGeom prst="rect">
             <a:avLst/>
@@ -2968,11 +5337,11 @@
         <p:txBody>
           <a:bodyPr vert="horz" lIns="91440" tIns="45720" rIns="91440" bIns="45720" rtlCol="0" anchor="ctr"/>
           <a:lstStyle>
-            <a:lvl1pPr algn="ctr">
-              <a:defRPr sz="1200">
+            <a:lvl1pPr algn="l">
+              <a:defRPr sz="900">
                 <a:solidFill>
                   <a:schemeClr val="tx1">
-                    <a:tint val="82000"/>
+                    <a:tint val="75000"/>
                   </a:schemeClr>
                 </a:solidFill>
               </a:defRPr>
@@ -2985,13 +5354,7 @@
       </p:sp>
       <p:sp>
         <p:nvSpPr>
-          <p:cNvPr id="6" name="Slide Number Placeholder 5">
-            <a:extLst>
-              <a:ext uri="{FF2B5EF4-FFF2-40B4-BE49-F238E27FC236}">
-                <a16:creationId xmlns:a16="http://schemas.microsoft.com/office/drawing/2014/main" id="{C7C42810-5D77-DA0D-ACA2-01C23C4E28C5}"/>
-              </a:ext>
-            </a:extLst>
-          </p:cNvPr>
+          <p:cNvPr id="6" name="Slide Number Placeholder 5"/>
           <p:cNvSpPr>
             <a:spLocks noGrp="1"/>
           </p:cNvSpPr>
@@ -3001,8 +5364,8 @@
         </p:nvSpPr>
         <p:spPr>
           <a:xfrm>
-            <a:off x="8610600" y="6356350"/>
-            <a:ext cx="2743200" cy="365125"/>
+            <a:off x="8590663" y="6041362"/>
+            <a:ext cx="683339" cy="365125"/>
           </a:xfrm>
           <a:prstGeom prst="rect">
             <a:avLst/>
@@ -3012,11 +5375,9 @@
           <a:bodyPr vert="horz" lIns="91440" tIns="45720" rIns="91440" bIns="45720" rtlCol="0" anchor="ctr"/>
           <a:lstStyle>
             <a:lvl1pPr algn="r">
-              <a:defRPr sz="1200">
+              <a:defRPr sz="900">
                 <a:solidFill>
-                  <a:schemeClr val="tx1">
-                    <a:tint val="82000"/>
-                  </a:schemeClr>
+                  <a:schemeClr val="accent1"/>
                 </a:solidFill>
               </a:defRPr>
             </a:lvl1pPr>
@@ -3033,55 +5394,335 @@
     </p:spTree>
     <p:extLst>
       <p:ext uri="{BB962C8B-B14F-4D97-AF65-F5344CB8AC3E}">
-        <p14:creationId xmlns:p14="http://schemas.microsoft.com/office/powerpoint/2010/main" val="218128292"/>
+        <p14:creationId xmlns:p14="http://schemas.microsoft.com/office/powerpoint/2010/main" val="1880786705"/>
       </p:ext>
     </p:extLst>
   </p:cSld>
   <p:clrMap bg1="lt1" tx1="dk1" bg2="lt2" tx2="dk2" accent1="accent1" accent2="accent2" accent3="accent3" accent4="accent4" accent5="accent5" accent6="accent6" hlink="hlink" folHlink="folHlink"/>
   <p:sldLayoutIdLst>
-    <p:sldLayoutId id="2147483649" r:id="rId1"/>
-    <p:sldLayoutId id="2147483650" r:id="rId2"/>
-    <p:sldLayoutId id="2147483651" r:id="rId3"/>
-    <p:sldLayoutId id="2147483652" r:id="rId4"/>
-    <p:sldLayoutId id="2147483653" r:id="rId5"/>
-    <p:sldLayoutId id="2147483654" r:id="rId6"/>
-    <p:sldLayoutId id="2147483655" r:id="rId7"/>
-    <p:sldLayoutId id="2147483656" r:id="rId8"/>
-    <p:sldLayoutId id="2147483657" r:id="rId9"/>
-    <p:sldLayoutId id="2147483658" r:id="rId10"/>
-    <p:sldLayoutId id="2147483659" r:id="rId11"/>
+    <p:sldLayoutId id="2147483679" r:id="rId1"/>
+    <p:sldLayoutId id="2147483680" r:id="rId2"/>
+    <p:sldLayoutId id="2147483681" r:id="rId3"/>
+    <p:sldLayoutId id="2147483682" r:id="rId4"/>
+    <p:sldLayoutId id="2147483683" r:id="rId5"/>
+    <p:sldLayoutId id="2147483684" r:id="rId6"/>
+    <p:sldLayoutId id="2147483685" r:id="rId7"/>
+    <p:sldLayoutId id="2147483686" r:id="rId8"/>
+    <p:sldLayoutId id="2147483687" r:id="rId9"/>
+    <p:sldLayoutId id="2147483688" r:id="rId10"/>
+    <p:sldLayoutId id="2147483689" r:id="rId11"/>
+    <p:sldLayoutId id="2147483690" r:id="rId12"/>
+    <p:sldLayoutId id="2147483691" r:id="rId13"/>
+    <p:sldLayoutId id="2147483692" r:id="rId14"/>
+    <p:sldLayoutId id="2147483693" r:id="rId15"/>
+    <p:sldLayoutId id="2147483694" r:id="rId16"/>
   </p:sldLayoutIdLst>
   <p:txStyles>
     <p:titleStyle>
-      <a:lvl1pPr algn="l" defTabSz="914400" rtl="0" eaLnBrk="1" latinLnBrk="0" hangingPunct="1">
-        <a:lnSpc>
-          <a:spcPct val="90000"/>
-        </a:lnSpc>
+      <a:lvl1pPr algn="l" defTabSz="457200" rtl="0" eaLnBrk="1" latinLnBrk="0" hangingPunct="1">
         <a:spcBef>
           <a:spcPct val="0"/>
         </a:spcBef>
         <a:buNone/>
-        <a:defRPr sz="4400" kern="1200">
+        <a:defRPr sz="3600" kern="1200">
           <a:solidFill>
-            <a:schemeClr val="tx1"/>
+            <a:schemeClr val="accent1"/>
           </a:solidFill>
           <a:latin typeface="+mj-lt"/>
           <a:ea typeface="+mj-ea"/>
           <a:cs typeface="+mj-cs"/>
         </a:defRPr>
       </a:lvl1pPr>
+      <a:lvl2pPr eaLnBrk="1" hangingPunct="1">
+        <a:defRPr>
+          <a:solidFill>
+            <a:schemeClr val="tx2"/>
+          </a:solidFill>
+        </a:defRPr>
+      </a:lvl2pPr>
+      <a:lvl3pPr eaLnBrk="1" hangingPunct="1">
+        <a:defRPr>
+          <a:solidFill>
+            <a:schemeClr val="tx2"/>
+          </a:solidFill>
+        </a:defRPr>
+      </a:lvl3pPr>
+      <a:lvl4pPr eaLnBrk="1" hangingPunct="1">
+        <a:defRPr>
+          <a:solidFill>
+            <a:schemeClr val="tx2"/>
+          </a:solidFill>
+        </a:defRPr>
+      </a:lvl4pPr>
+      <a:lvl5pPr eaLnBrk="1" hangingPunct="1">
+        <a:defRPr>
+          <a:solidFill>
+            <a:schemeClr val="tx2"/>
+          </a:solidFill>
+        </a:defRPr>
+      </a:lvl5pPr>
+      <a:lvl6pPr eaLnBrk="1" hangingPunct="1">
+        <a:defRPr>
+          <a:solidFill>
+            <a:schemeClr val="tx2"/>
+          </a:solidFill>
+        </a:defRPr>
+      </a:lvl6pPr>
+      <a:lvl7pPr eaLnBrk="1" hangingPunct="1">
+        <a:defRPr>
+          <a:solidFill>
+            <a:schemeClr val="tx2"/>
+          </a:solidFill>
+        </a:defRPr>
+      </a:lvl7pPr>
+      <a:lvl8pPr eaLnBrk="1" hangingPunct="1">
+        <a:defRPr>
+          <a:solidFill>
+            <a:schemeClr val="tx2"/>
+          </a:solidFill>
+        </a:defRPr>
+      </a:lvl8pPr>
+      <a:lvl9pPr eaLnBrk="1" hangingPunct="1">
+        <a:defRPr>
+          <a:solidFill>
+            <a:schemeClr val="tx2"/>
+          </a:solidFill>
+        </a:defRPr>
+      </a:lvl9pPr>
     </p:titleStyle>
     <p:bodyStyle>
-      <a:lvl1pPr marL="228600" indent="-228600" algn="l" defTabSz="914400" rtl="0" eaLnBrk="1" latinLnBrk="0" hangingPunct="1">
-        <a:lnSpc>
-          <a:spcPct val="90000"/>
-        </a:lnSpc>
+      <a:lvl1pPr marL="342900" indent="-342900" algn="l" defTabSz="457200" rtl="0" eaLnBrk="1" latinLnBrk="0" hangingPunct="1">
         <a:spcBef>
           <a:spcPts val="1000"/>
         </a:spcBef>
-        <a:buFont typeface="Arial" panose="020B0604020202020204" pitchFamily="34" charset="0"/>
-        <a:buChar char="•"/>
-        <a:defRPr sz="2800" kern="1200">
+        <a:spcAft>
+          <a:spcPts val="0"/>
+        </a:spcAft>
+        <a:buClr>
+          <a:schemeClr val="accent1"/>
+        </a:buClr>
+        <a:buSzPct val="80000"/>
+        <a:buFont typeface="Wingdings 3" charset="2"/>
+        <a:buChar char=""/>
+        <a:defRPr sz="1800" kern="1200">
+          <a:solidFill>
+            <a:schemeClr val="tx1">
+              <a:lumMod val="75000"/>
+              <a:lumOff val="25000"/>
+            </a:schemeClr>
+          </a:solidFill>
+          <a:latin typeface="+mn-lt"/>
+          <a:ea typeface="+mn-ea"/>
+          <a:cs typeface="+mn-cs"/>
+        </a:defRPr>
+      </a:lvl1pPr>
+      <a:lvl2pPr marL="742950" indent="-285750" algn="l" defTabSz="457200" rtl="0" eaLnBrk="1" latinLnBrk="0" hangingPunct="1">
+        <a:spcBef>
+          <a:spcPts val="1000"/>
+        </a:spcBef>
+        <a:spcAft>
+          <a:spcPts val="0"/>
+        </a:spcAft>
+        <a:buClr>
+          <a:schemeClr val="accent1"/>
+        </a:buClr>
+        <a:buSzPct val="80000"/>
+        <a:buFont typeface="Wingdings 3" charset="2"/>
+        <a:buChar char=""/>
+        <a:defRPr sz="1600" kern="1200">
+          <a:solidFill>
+            <a:schemeClr val="tx1">
+              <a:lumMod val="75000"/>
+              <a:lumOff val="25000"/>
+            </a:schemeClr>
+          </a:solidFill>
+          <a:latin typeface="+mn-lt"/>
+          <a:ea typeface="+mn-ea"/>
+          <a:cs typeface="+mn-cs"/>
+        </a:defRPr>
+      </a:lvl2pPr>
+      <a:lvl3pPr marL="1143000" indent="-228600" algn="l" defTabSz="457200" rtl="0" eaLnBrk="1" latinLnBrk="0" hangingPunct="1">
+        <a:spcBef>
+          <a:spcPts val="1000"/>
+        </a:spcBef>
+        <a:spcAft>
+          <a:spcPts val="0"/>
+        </a:spcAft>
+        <a:buClr>
+          <a:schemeClr val="accent1"/>
+        </a:buClr>
+        <a:buSzPct val="80000"/>
+        <a:buFont typeface="Wingdings 3" charset="2"/>
+        <a:buChar char=""/>
+        <a:defRPr sz="1400" kern="1200">
+          <a:solidFill>
+            <a:schemeClr val="tx1">
+              <a:lumMod val="75000"/>
+              <a:lumOff val="25000"/>
+            </a:schemeClr>
+          </a:solidFill>
+          <a:latin typeface="+mn-lt"/>
+          <a:ea typeface="+mn-ea"/>
+          <a:cs typeface="+mn-cs"/>
+        </a:defRPr>
+      </a:lvl3pPr>
+      <a:lvl4pPr marL="1600200" indent="-228600" algn="l" defTabSz="457200" rtl="0" eaLnBrk="1" latinLnBrk="0" hangingPunct="1">
+        <a:spcBef>
+          <a:spcPts val="1000"/>
+        </a:spcBef>
+        <a:spcAft>
+          <a:spcPts val="0"/>
+        </a:spcAft>
+        <a:buClr>
+          <a:schemeClr val="accent1"/>
+        </a:buClr>
+        <a:buSzPct val="80000"/>
+        <a:buFont typeface="Wingdings 3" charset="2"/>
+        <a:buChar char=""/>
+        <a:defRPr sz="1200" kern="1200">
+          <a:solidFill>
+            <a:schemeClr val="tx1">
+              <a:lumMod val="75000"/>
+              <a:lumOff val="25000"/>
+            </a:schemeClr>
+          </a:solidFill>
+          <a:latin typeface="+mn-lt"/>
+          <a:ea typeface="+mn-ea"/>
+          <a:cs typeface="+mn-cs"/>
+        </a:defRPr>
+      </a:lvl4pPr>
+      <a:lvl5pPr marL="2057400" indent="-228600" algn="l" defTabSz="457200" rtl="0" eaLnBrk="1" latinLnBrk="0" hangingPunct="1">
+        <a:spcBef>
+          <a:spcPts val="1000"/>
+        </a:spcBef>
+        <a:spcAft>
+          <a:spcPts val="0"/>
+        </a:spcAft>
+        <a:buClr>
+          <a:schemeClr val="accent1"/>
+        </a:buClr>
+        <a:buSzPct val="80000"/>
+        <a:buFont typeface="Wingdings 3" charset="2"/>
+        <a:buChar char=""/>
+        <a:defRPr sz="1200" kern="1200">
+          <a:solidFill>
+            <a:schemeClr val="tx1">
+              <a:lumMod val="75000"/>
+              <a:lumOff val="25000"/>
+            </a:schemeClr>
+          </a:solidFill>
+          <a:latin typeface="+mn-lt"/>
+          <a:ea typeface="+mn-ea"/>
+          <a:cs typeface="+mn-cs"/>
+        </a:defRPr>
+      </a:lvl5pPr>
+      <a:lvl6pPr marL="2514600" indent="-228600" algn="l" defTabSz="457200" rtl="0" eaLnBrk="1" latinLnBrk="0" hangingPunct="1">
+        <a:spcBef>
+          <a:spcPts val="1000"/>
+        </a:spcBef>
+        <a:spcAft>
+          <a:spcPts val="0"/>
+        </a:spcAft>
+        <a:buClr>
+          <a:schemeClr val="accent1"/>
+        </a:buClr>
+        <a:buSzPct val="80000"/>
+        <a:buFont typeface="Wingdings 3" charset="2"/>
+        <a:buChar char=""/>
+        <a:defRPr sz="1200" kern="1200">
+          <a:solidFill>
+            <a:schemeClr val="tx1">
+              <a:lumMod val="75000"/>
+              <a:lumOff val="25000"/>
+            </a:schemeClr>
+          </a:solidFill>
+          <a:latin typeface="+mn-lt"/>
+          <a:ea typeface="+mn-ea"/>
+          <a:cs typeface="+mn-cs"/>
+        </a:defRPr>
+      </a:lvl6pPr>
+      <a:lvl7pPr marL="2971800" indent="-228600" algn="l" defTabSz="457200" rtl="0" eaLnBrk="1" latinLnBrk="0" hangingPunct="1">
+        <a:spcBef>
+          <a:spcPts val="1000"/>
+        </a:spcBef>
+        <a:spcAft>
+          <a:spcPts val="0"/>
+        </a:spcAft>
+        <a:buClr>
+          <a:schemeClr val="accent1"/>
+        </a:buClr>
+        <a:buSzPct val="80000"/>
+        <a:buFont typeface="Wingdings 3" charset="2"/>
+        <a:buChar char=""/>
+        <a:defRPr sz="1200" kern="1200">
+          <a:solidFill>
+            <a:schemeClr val="tx1">
+              <a:lumMod val="75000"/>
+              <a:lumOff val="25000"/>
+            </a:schemeClr>
+          </a:solidFill>
+          <a:latin typeface="+mn-lt"/>
+          <a:ea typeface="+mn-ea"/>
+          <a:cs typeface="+mn-cs"/>
+        </a:defRPr>
+      </a:lvl7pPr>
+      <a:lvl8pPr marL="3429000" indent="-228600" algn="l" defTabSz="457200" rtl="0" eaLnBrk="1" latinLnBrk="0" hangingPunct="1">
+        <a:spcBef>
+          <a:spcPts val="1000"/>
+        </a:spcBef>
+        <a:spcAft>
+          <a:spcPts val="0"/>
+        </a:spcAft>
+        <a:buClr>
+          <a:schemeClr val="accent1"/>
+        </a:buClr>
+        <a:buSzPct val="80000"/>
+        <a:buFont typeface="Wingdings 3" charset="2"/>
+        <a:buChar char=""/>
+        <a:defRPr sz="1200" kern="1200">
+          <a:solidFill>
+            <a:schemeClr val="tx1">
+              <a:lumMod val="75000"/>
+              <a:lumOff val="25000"/>
+            </a:schemeClr>
+          </a:solidFill>
+          <a:latin typeface="+mn-lt"/>
+          <a:ea typeface="+mn-ea"/>
+          <a:cs typeface="+mn-cs"/>
+        </a:defRPr>
+      </a:lvl8pPr>
+      <a:lvl9pPr marL="3886200" indent="-228600" algn="l" defTabSz="457200" rtl="0" eaLnBrk="1" latinLnBrk="0" hangingPunct="1">
+        <a:spcBef>
+          <a:spcPts val="1000"/>
+        </a:spcBef>
+        <a:spcAft>
+          <a:spcPts val="0"/>
+        </a:spcAft>
+        <a:buClr>
+          <a:schemeClr val="accent1"/>
+        </a:buClr>
+        <a:buSzPct val="80000"/>
+        <a:buFont typeface="Wingdings 3" charset="2"/>
+        <a:buChar char=""/>
+        <a:defRPr sz="1200" kern="1200">
+          <a:solidFill>
+            <a:schemeClr val="tx1">
+              <a:lumMod val="75000"/>
+              <a:lumOff val="25000"/>
+            </a:schemeClr>
+          </a:solidFill>
+          <a:latin typeface="+mn-lt"/>
+          <a:ea typeface="+mn-ea"/>
+          <a:cs typeface="+mn-cs"/>
+        </a:defRPr>
+      </a:lvl9pPr>
+    </p:bodyStyle>
+    <p:otherStyle>
+      <a:defPPr>
+        <a:defRPr lang="en-US"/>
+      </a:defPPr>
+      <a:lvl1pPr marL="0" algn="l" defTabSz="457200" rtl="0" eaLnBrk="1" latinLnBrk="0" hangingPunct="1">
+        <a:defRPr sz="1800" kern="1200">
           <a:solidFill>
             <a:schemeClr val="tx1"/>
           </a:solidFill>
@@ -3090,16 +5731,8 @@
           <a:cs typeface="+mn-cs"/>
         </a:defRPr>
       </a:lvl1pPr>
-      <a:lvl2pPr marL="685800" indent="-228600" algn="l" defTabSz="914400" rtl="0" eaLnBrk="1" latinLnBrk="0" hangingPunct="1">
-        <a:lnSpc>
-          <a:spcPct val="90000"/>
-        </a:lnSpc>
-        <a:spcBef>
-          <a:spcPts val="500"/>
-        </a:spcBef>
-        <a:buFont typeface="Arial" panose="020B0604020202020204" pitchFamily="34" charset="0"/>
-        <a:buChar char="•"/>
-        <a:defRPr sz="2400" kern="1200">
+      <a:lvl2pPr marL="457200" algn="l" defTabSz="457200" rtl="0" eaLnBrk="1" latinLnBrk="0" hangingPunct="1">
+        <a:defRPr sz="1800" kern="1200">
           <a:solidFill>
             <a:schemeClr val="tx1"/>
           </a:solidFill>
@@ -3108,16 +5741,8 @@
           <a:cs typeface="+mn-cs"/>
         </a:defRPr>
       </a:lvl2pPr>
-      <a:lvl3pPr marL="1143000" indent="-228600" algn="l" defTabSz="914400" rtl="0" eaLnBrk="1" latinLnBrk="0" hangingPunct="1">
-        <a:lnSpc>
-          <a:spcPct val="90000"/>
-        </a:lnSpc>
-        <a:spcBef>
-          <a:spcPts val="500"/>
-        </a:spcBef>
-        <a:buFont typeface="Arial" panose="020B0604020202020204" pitchFamily="34" charset="0"/>
-        <a:buChar char="•"/>
-        <a:defRPr sz="2000" kern="1200">
+      <a:lvl3pPr marL="914400" algn="l" defTabSz="457200" rtl="0" eaLnBrk="1" latinLnBrk="0" hangingPunct="1">
+        <a:defRPr sz="1800" kern="1200">
           <a:solidFill>
             <a:schemeClr val="tx1"/>
           </a:solidFill>
@@ -3126,15 +5751,7 @@
           <a:cs typeface="+mn-cs"/>
         </a:defRPr>
       </a:lvl3pPr>
-      <a:lvl4pPr marL="1600200" indent="-228600" algn="l" defTabSz="914400" rtl="0" eaLnBrk="1" latinLnBrk="0" hangingPunct="1">
-        <a:lnSpc>
-          <a:spcPct val="90000"/>
-        </a:lnSpc>
-        <a:spcBef>
-          <a:spcPts val="500"/>
-        </a:spcBef>
-        <a:buFont typeface="Arial" panose="020B0604020202020204" pitchFamily="34" charset="0"/>
-        <a:buChar char="•"/>
+      <a:lvl4pPr marL="1371600" algn="l" defTabSz="457200" rtl="0" eaLnBrk="1" latinLnBrk="0" hangingPunct="1">
         <a:defRPr sz="1800" kern="1200">
           <a:solidFill>
             <a:schemeClr val="tx1"/>
@@ -3144,15 +5761,7 @@
           <a:cs typeface="+mn-cs"/>
         </a:defRPr>
       </a:lvl4pPr>
-      <a:lvl5pPr marL="2057400" indent="-228600" algn="l" defTabSz="914400" rtl="0" eaLnBrk="1" latinLnBrk="0" hangingPunct="1">
-        <a:lnSpc>
-          <a:spcPct val="90000"/>
-        </a:lnSpc>
-        <a:spcBef>
-          <a:spcPts val="500"/>
-        </a:spcBef>
-        <a:buFont typeface="Arial" panose="020B0604020202020204" pitchFamily="34" charset="0"/>
-        <a:buChar char="•"/>
+      <a:lvl5pPr marL="1828800" algn="l" defTabSz="457200" rtl="0" eaLnBrk="1" latinLnBrk="0" hangingPunct="1">
         <a:defRPr sz="1800" kern="1200">
           <a:solidFill>
             <a:schemeClr val="tx1"/>
@@ -3162,15 +5771,7 @@
           <a:cs typeface="+mn-cs"/>
         </a:defRPr>
       </a:lvl5pPr>
-      <a:lvl6pPr marL="2514600" indent="-228600" algn="l" defTabSz="914400" rtl="0" eaLnBrk="1" latinLnBrk="0" hangingPunct="1">
-        <a:lnSpc>
-          <a:spcPct val="90000"/>
-        </a:lnSpc>
-        <a:spcBef>
-          <a:spcPts val="500"/>
-        </a:spcBef>
-        <a:buFont typeface="Arial" panose="020B0604020202020204" pitchFamily="34" charset="0"/>
-        <a:buChar char="•"/>
+      <a:lvl6pPr marL="2286000" algn="l" defTabSz="457200" rtl="0" eaLnBrk="1" latinLnBrk="0" hangingPunct="1">
         <a:defRPr sz="1800" kern="1200">
           <a:solidFill>
             <a:schemeClr val="tx1"/>
@@ -3180,15 +5781,7 @@
           <a:cs typeface="+mn-cs"/>
         </a:defRPr>
       </a:lvl6pPr>
-      <a:lvl7pPr marL="2971800" indent="-228600" algn="l" defTabSz="914400" rtl="0" eaLnBrk="1" latinLnBrk="0" hangingPunct="1">
-        <a:lnSpc>
-          <a:spcPct val="90000"/>
-        </a:lnSpc>
-        <a:spcBef>
-          <a:spcPts val="500"/>
-        </a:spcBef>
-        <a:buFont typeface="Arial" panose="020B0604020202020204" pitchFamily="34" charset="0"/>
-        <a:buChar char="•"/>
+      <a:lvl7pPr marL="2743200" algn="l" defTabSz="457200" rtl="0" eaLnBrk="1" latinLnBrk="0" hangingPunct="1">
         <a:defRPr sz="1800" kern="1200">
           <a:solidFill>
             <a:schemeClr val="tx1"/>
@@ -3198,15 +5791,7 @@
           <a:cs typeface="+mn-cs"/>
         </a:defRPr>
       </a:lvl7pPr>
-      <a:lvl8pPr marL="3429000" indent="-228600" algn="l" defTabSz="914400" rtl="0" eaLnBrk="1" latinLnBrk="0" hangingPunct="1">
-        <a:lnSpc>
-          <a:spcPct val="90000"/>
-        </a:lnSpc>
-        <a:spcBef>
-          <a:spcPts val="500"/>
-        </a:spcBef>
-        <a:buFont typeface="Arial" panose="020B0604020202020204" pitchFamily="34" charset="0"/>
-        <a:buChar char="•"/>
+      <a:lvl8pPr marL="3200400" algn="l" defTabSz="457200" rtl="0" eaLnBrk="1" latinLnBrk="0" hangingPunct="1">
         <a:defRPr sz="1800" kern="1200">
           <a:solidFill>
             <a:schemeClr val="tx1"/>
@@ -3216,110 +5801,7 @@
           <a:cs typeface="+mn-cs"/>
         </a:defRPr>
       </a:lvl8pPr>
-      <a:lvl9pPr marL="3886200" indent="-228600" algn="l" defTabSz="914400" rtl="0" eaLnBrk="1" latinLnBrk="0" hangingPunct="1">
-        <a:lnSpc>
-          <a:spcPct val="90000"/>
-        </a:lnSpc>
-        <a:spcBef>
-          <a:spcPts val="500"/>
-        </a:spcBef>
-        <a:buFont typeface="Arial" panose="020B0604020202020204" pitchFamily="34" charset="0"/>
-        <a:buChar char="•"/>
-        <a:defRPr sz="1800" kern="1200">
-          <a:solidFill>
-            <a:schemeClr val="tx1"/>
-          </a:solidFill>
-          <a:latin typeface="+mn-lt"/>
-          <a:ea typeface="+mn-ea"/>
-          <a:cs typeface="+mn-cs"/>
-        </a:defRPr>
-      </a:lvl9pPr>
-    </p:bodyStyle>
-    <p:otherStyle>
-      <a:defPPr>
-        <a:defRPr lang="en-BE"/>
-      </a:defPPr>
-      <a:lvl1pPr marL="0" algn="l" defTabSz="914400" rtl="0" eaLnBrk="1" latinLnBrk="0" hangingPunct="1">
-        <a:defRPr sz="1800" kern="1200">
-          <a:solidFill>
-            <a:schemeClr val="tx1"/>
-          </a:solidFill>
-          <a:latin typeface="+mn-lt"/>
-          <a:ea typeface="+mn-ea"/>
-          <a:cs typeface="+mn-cs"/>
-        </a:defRPr>
-      </a:lvl1pPr>
-      <a:lvl2pPr marL="457200" algn="l" defTabSz="914400" rtl="0" eaLnBrk="1" latinLnBrk="0" hangingPunct="1">
-        <a:defRPr sz="1800" kern="1200">
-          <a:solidFill>
-            <a:schemeClr val="tx1"/>
-          </a:solidFill>
-          <a:latin typeface="+mn-lt"/>
-          <a:ea typeface="+mn-ea"/>
-          <a:cs typeface="+mn-cs"/>
-        </a:defRPr>
-      </a:lvl2pPr>
-      <a:lvl3pPr marL="914400" algn="l" defTabSz="914400" rtl="0" eaLnBrk="1" latinLnBrk="0" hangingPunct="1">
-        <a:defRPr sz="1800" kern="1200">
-          <a:solidFill>
-            <a:schemeClr val="tx1"/>
-          </a:solidFill>
-          <a:latin typeface="+mn-lt"/>
-          <a:ea typeface="+mn-ea"/>
-          <a:cs typeface="+mn-cs"/>
-        </a:defRPr>
-      </a:lvl3pPr>
-      <a:lvl4pPr marL="1371600" algn="l" defTabSz="914400" rtl="0" eaLnBrk="1" latinLnBrk="0" hangingPunct="1">
-        <a:defRPr sz="1800" kern="1200">
-          <a:solidFill>
-            <a:schemeClr val="tx1"/>
-          </a:solidFill>
-          <a:latin typeface="+mn-lt"/>
-          <a:ea typeface="+mn-ea"/>
-          <a:cs typeface="+mn-cs"/>
-        </a:defRPr>
-      </a:lvl4pPr>
-      <a:lvl5pPr marL="1828800" algn="l" defTabSz="914400" rtl="0" eaLnBrk="1" latinLnBrk="0" hangingPunct="1">
-        <a:defRPr sz="1800" kern="1200">
-          <a:solidFill>
-            <a:schemeClr val="tx1"/>
-          </a:solidFill>
-          <a:latin typeface="+mn-lt"/>
-          <a:ea typeface="+mn-ea"/>
-          <a:cs typeface="+mn-cs"/>
-        </a:defRPr>
-      </a:lvl5pPr>
-      <a:lvl6pPr marL="2286000" algn="l" defTabSz="914400" rtl="0" eaLnBrk="1" latinLnBrk="0" hangingPunct="1">
-        <a:defRPr sz="1800" kern="1200">
-          <a:solidFill>
-            <a:schemeClr val="tx1"/>
-          </a:solidFill>
-          <a:latin typeface="+mn-lt"/>
-          <a:ea typeface="+mn-ea"/>
-          <a:cs typeface="+mn-cs"/>
-        </a:defRPr>
-      </a:lvl6pPr>
-      <a:lvl7pPr marL="2743200" algn="l" defTabSz="914400" rtl="0" eaLnBrk="1" latinLnBrk="0" hangingPunct="1">
-        <a:defRPr sz="1800" kern="1200">
-          <a:solidFill>
-            <a:schemeClr val="tx1"/>
-          </a:solidFill>
-          <a:latin typeface="+mn-lt"/>
-          <a:ea typeface="+mn-ea"/>
-          <a:cs typeface="+mn-cs"/>
-        </a:defRPr>
-      </a:lvl7pPr>
-      <a:lvl8pPr marL="3200400" algn="l" defTabSz="914400" rtl="0" eaLnBrk="1" latinLnBrk="0" hangingPunct="1">
-        <a:defRPr sz="1800" kern="1200">
-          <a:solidFill>
-            <a:schemeClr val="tx1"/>
-          </a:solidFill>
-          <a:latin typeface="+mn-lt"/>
-          <a:ea typeface="+mn-ea"/>
-          <a:cs typeface="+mn-cs"/>
-        </a:defRPr>
-      </a:lvl8pPr>
-      <a:lvl9pPr marL="3657600" algn="l" defTabSz="914400" rtl="0" eaLnBrk="1" latinLnBrk="0" hangingPunct="1">
+      <a:lvl9pPr marL="3657600" algn="l" defTabSz="457200" rtl="0" eaLnBrk="1" latinLnBrk="0" hangingPunct="1">
         <a:defRPr sz="1800" kern="1200">
           <a:solidFill>
             <a:schemeClr val="tx1"/>
@@ -3527,7 +6009,7 @@
         </p:blipFill>
         <p:spPr>
           <a:xfrm>
-            <a:off x="10483712" y="4685505"/>
+            <a:off x="4543425" y="4355633"/>
             <a:ext cx="1400175" cy="2100263"/>
           </a:xfrm>
           <a:prstGeom prst="rect">
@@ -4154,7 +6636,9 @@
         </p:nvSpPr>
         <p:spPr/>
         <p:txBody>
-          <a:bodyPr/>
+          <a:bodyPr>
+            <a:normAutofit/>
+          </a:bodyPr>
           <a:lstStyle/>
           <a:p>
             <a:r>
@@ -4179,8 +6663,8 @@
         </p:nvSpPr>
         <p:spPr>
           <a:xfrm>
-            <a:off x="8929602" y="2823211"/>
-            <a:ext cx="1968520" cy="701261"/>
+            <a:off x="8929601" y="2814883"/>
+            <a:ext cx="2248607" cy="709590"/>
           </a:xfrm>
           <a:prstGeom prst="dodecagon">
             <a:avLst/>
@@ -4898,7 +7382,9 @@
         </p:nvSpPr>
         <p:spPr/>
         <p:txBody>
-          <a:bodyPr/>
+          <a:bodyPr>
+            <a:normAutofit/>
+          </a:bodyPr>
           <a:lstStyle/>
           <a:p>
             <a:r>
@@ -4909,672 +7395,36 @@
           </a:p>
         </p:txBody>
       </p:sp>
-      <p:sp>
-        <p:nvSpPr>
-          <p:cNvPr id="3" name="Content Placeholder 2">
+      <p:pic>
+        <p:nvPicPr>
+          <p:cNvPr id="7" name="Picture 6">
             <a:extLst>
               <a:ext uri="{FF2B5EF4-FFF2-40B4-BE49-F238E27FC236}">
-                <a16:creationId xmlns:a16="http://schemas.microsoft.com/office/drawing/2014/main" id="{125141B3-E59E-5277-F6B5-3D5A7FA59128}"/>
+                <a16:creationId xmlns:a16="http://schemas.microsoft.com/office/drawing/2014/main" id="{00607D73-27B7-7C18-8D23-90B76255A8EF}"/>
               </a:ext>
             </a:extLst>
           </p:cNvPr>
-          <p:cNvSpPr>
-            <a:spLocks noGrp="1"/>
-          </p:cNvSpPr>
-          <p:nvPr>
-            <p:ph idx="1"/>
-          </p:nvPr>
-        </p:nvSpPr>
+          <p:cNvPicPr>
+            <a:picLocks noChangeAspect="1"/>
+          </p:cNvPicPr>
+          <p:nvPr/>
+        </p:nvPicPr>
+        <p:blipFill>
+          <a:blip r:embed="rId2"/>
+          <a:stretch>
+            <a:fillRect/>
+          </a:stretch>
+        </p:blipFill>
         <p:spPr>
           <a:xfrm>
-            <a:off x="944217" y="1501845"/>
-            <a:ext cx="11247783" cy="6316111"/>
+            <a:off x="769030" y="1435253"/>
+            <a:ext cx="7811590" cy="4477375"/>
           </a:xfrm>
+          <a:prstGeom prst="rect">
+            <a:avLst/>
+          </a:prstGeom>
         </p:spPr>
-        <p:txBody>
-          <a:bodyPr>
-            <a:noAutofit/>
-          </a:bodyPr>
-          <a:lstStyle/>
-          <a:p>
-            <a:pPr marL="0" indent="0">
-              <a:buNone/>
-            </a:pPr>
-            <a:r>
-              <a:rPr lang="en-US" sz="1600" b="1" dirty="0" err="1">
-                <a:latin typeface="Consolas" panose="020B0609020204030204" pitchFamily="49" charset="0"/>
-              </a:rPr>
-              <a:t>builder.Services.Add</a:t>
-            </a:r>
-            <a:r>
-              <a:rPr lang="en-US" sz="1600" dirty="0" err="1">
-                <a:latin typeface="Consolas" panose="020B0609020204030204" pitchFamily="49" charset="0"/>
-              </a:rPr>
-              <a:t>BricksCbssPersons</a:t>
-            </a:r>
-            <a:r>
-              <a:rPr lang="en-US" sz="1600" dirty="0">
-                <a:latin typeface="Consolas" panose="020B0609020204030204" pitchFamily="49" charset="0"/>
-              </a:rPr>
-              <a:t>(</a:t>
-            </a:r>
-          </a:p>
-          <a:p>
-            <a:pPr marL="0" indent="0">
-              <a:buNone/>
-            </a:pPr>
-            <a:r>
-              <a:rPr lang="en-US" sz="1600" dirty="0">
-                <a:latin typeface="Consolas" panose="020B0609020204030204" pitchFamily="49" charset="0"/>
-              </a:rPr>
-              <a:t>    </a:t>
-            </a:r>
-            <a:r>
-              <a:rPr lang="en-US" sz="1600" b="1" dirty="0">
-                <a:latin typeface="Consolas" panose="020B0609020204030204" pitchFamily="49" charset="0"/>
-              </a:rPr>
-              <a:t>r</a:t>
-            </a:r>
-            <a:r>
-              <a:rPr lang="en-US" sz="1600" dirty="0">
-                <a:latin typeface="Consolas" panose="020B0609020204030204" pitchFamily="49" charset="0"/>
-              </a:rPr>
-              <a:t> =&gt; { </a:t>
-            </a:r>
-            <a:r>
-              <a:rPr lang="en-US" sz="1600" dirty="0" err="1">
-                <a:latin typeface="Consolas" panose="020B0609020204030204" pitchFamily="49" charset="0"/>
-              </a:rPr>
-              <a:t>r.UseReadStore</a:t>
-            </a:r>
-            <a:r>
-              <a:rPr lang="en-US" sz="1600" dirty="0">
-                <a:latin typeface="Consolas" panose="020B0609020204030204" pitchFamily="49" charset="0"/>
-              </a:rPr>
-              <a:t>&lt;</a:t>
-            </a:r>
-            <a:r>
-              <a:rPr lang="en-US" sz="1600" dirty="0" err="1">
-                <a:latin typeface="Consolas" panose="020B0609020204030204" pitchFamily="49" charset="0"/>
-              </a:rPr>
-              <a:t>DefaultEntityFrameworkCbssPersonStore</a:t>
-            </a:r>
-            <a:r>
-              <a:rPr lang="en-US" sz="1600" dirty="0">
-                <a:latin typeface="Consolas" panose="020B0609020204030204" pitchFamily="49" charset="0"/>
-              </a:rPr>
-              <a:t>&gt;(); },</a:t>
-            </a:r>
-          </a:p>
-          <a:p>
-            <a:pPr marL="0" indent="0">
-              <a:buNone/>
-            </a:pPr>
-            <a:r>
-              <a:rPr lang="en-US" sz="1600" dirty="0">
-                <a:latin typeface="Consolas" panose="020B0609020204030204" pitchFamily="49" charset="0"/>
-              </a:rPr>
-              <a:t>    w =&gt; </a:t>
-            </a:r>
-            <a:r>
-              <a:rPr lang="en-BE" sz="1600" dirty="0">
-                <a:latin typeface="Consolas" panose="020B0609020204030204" pitchFamily="49" charset="0"/>
-              </a:rPr>
-              <a:t>{</a:t>
-            </a:r>
-          </a:p>
-          <a:p>
-            <a:pPr marL="0" indent="0">
-              <a:buNone/>
-            </a:pPr>
-            <a:r>
-              <a:rPr lang="en-US" sz="1600" dirty="0">
-                <a:latin typeface="Consolas" panose="020B0609020204030204" pitchFamily="49" charset="0"/>
-              </a:rPr>
-              <a:t>        </a:t>
-            </a:r>
-            <a:r>
-              <a:rPr lang="en-US" sz="1600" dirty="0" err="1">
-                <a:latin typeface="Consolas" panose="020B0609020204030204" pitchFamily="49" charset="0"/>
-              </a:rPr>
-              <a:t>w.UseCountryStore</a:t>
-            </a:r>
-            <a:r>
-              <a:rPr lang="en-US" sz="1600" dirty="0">
-                <a:latin typeface="Consolas" panose="020B0609020204030204" pitchFamily="49" charset="0"/>
-              </a:rPr>
-              <a:t>&lt;</a:t>
-            </a:r>
-            <a:r>
-              <a:rPr lang="en-US" sz="1600" dirty="0" err="1">
-                <a:latin typeface="Consolas" panose="020B0609020204030204" pitchFamily="49" charset="0"/>
-              </a:rPr>
-              <a:t>DefaultBricksCountryStore</a:t>
-            </a:r>
-            <a:r>
-              <a:rPr lang="en-US" sz="1600" dirty="0">
-                <a:latin typeface="Consolas" panose="020B0609020204030204" pitchFamily="49" charset="0"/>
-              </a:rPr>
-              <a:t>&gt;();</a:t>
-            </a:r>
-          </a:p>
-          <a:p>
-            <a:pPr marL="0" indent="0">
-              <a:buNone/>
-            </a:pPr>
-            <a:r>
-              <a:rPr lang="en-US" sz="1600" dirty="0">
-                <a:latin typeface="Consolas" panose="020B0609020204030204" pitchFamily="49" charset="0"/>
-              </a:rPr>
-              <a:t>        </a:t>
-            </a:r>
-            <a:r>
-              <a:rPr lang="en-US" sz="1600" dirty="0" err="1">
-                <a:latin typeface="Consolas" panose="020B0609020204030204" pitchFamily="49" charset="0"/>
-              </a:rPr>
-              <a:t>w.UseKeyValueStore</a:t>
-            </a:r>
-            <a:r>
-              <a:rPr lang="en-US" sz="1600" dirty="0">
-                <a:latin typeface="Consolas" panose="020B0609020204030204" pitchFamily="49" charset="0"/>
-              </a:rPr>
-              <a:t>&lt;</a:t>
-            </a:r>
-            <a:r>
-              <a:rPr lang="en-US" sz="1600" dirty="0" err="1">
-                <a:latin typeface="Consolas" panose="020B0609020204030204" pitchFamily="49" charset="0"/>
-              </a:rPr>
-              <a:t>DefaultEntityFrameworkBricksKeyValueStore</a:t>
-            </a:r>
-            <a:r>
-              <a:rPr lang="en-US" sz="1600" dirty="0">
-                <a:latin typeface="Consolas" panose="020B0609020204030204" pitchFamily="49" charset="0"/>
-              </a:rPr>
-              <a:t>&gt;();</a:t>
-            </a:r>
-          </a:p>
-          <a:p>
-            <a:pPr marL="0" indent="0">
-              <a:buNone/>
-            </a:pPr>
-            <a:r>
-              <a:rPr lang="en-US" sz="1600" dirty="0">
-                <a:latin typeface="Consolas" panose="020B0609020204030204" pitchFamily="49" charset="0"/>
-              </a:rPr>
-              <a:t>        </a:t>
-            </a:r>
-            <a:r>
-              <a:rPr lang="en-US" sz="1600" dirty="0" err="1">
-                <a:latin typeface="Consolas" panose="020B0609020204030204" pitchFamily="49" charset="0"/>
-              </a:rPr>
-              <a:t>w.UseAuditLogStore</a:t>
-            </a:r>
-            <a:r>
-              <a:rPr lang="en-US" sz="1600" dirty="0">
-                <a:latin typeface="Consolas" panose="020B0609020204030204" pitchFamily="49" charset="0"/>
-              </a:rPr>
-              <a:t>&lt;</a:t>
-            </a:r>
-            <a:r>
-              <a:rPr lang="en-US" sz="1600" dirty="0" err="1">
-                <a:latin typeface="Consolas" panose="020B0609020204030204" pitchFamily="49" charset="0"/>
-              </a:rPr>
-              <a:t>DefaultEntityFrameworkBricksAuditLogStore</a:t>
-            </a:r>
-            <a:r>
-              <a:rPr lang="en-US" sz="1600" dirty="0">
-                <a:latin typeface="Consolas" panose="020B0609020204030204" pitchFamily="49" charset="0"/>
-              </a:rPr>
-              <a:t>&gt;();</a:t>
-            </a:r>
-          </a:p>
-          <a:p>
-            <a:pPr marL="0" indent="0">
-              <a:buNone/>
-            </a:pPr>
-            <a:r>
-              <a:rPr lang="en-GB" sz="1600" dirty="0">
-                <a:latin typeface="Consolas" panose="020B0609020204030204" pitchFamily="49" charset="0"/>
-              </a:rPr>
-              <a:t>        </a:t>
-            </a:r>
-            <a:r>
-              <a:rPr lang="en-GB" sz="1600" dirty="0" err="1">
-                <a:latin typeface="Consolas" panose="020B0609020204030204" pitchFamily="49" charset="0"/>
-              </a:rPr>
-              <a:t>w.UseDistributedLockStore</a:t>
-            </a:r>
-            <a:r>
-              <a:rPr lang="en-GB" sz="1600" dirty="0">
-                <a:latin typeface="Consolas" panose="020B0609020204030204" pitchFamily="49" charset="0"/>
-              </a:rPr>
-              <a:t>(</a:t>
-            </a:r>
-            <a:r>
-              <a:rPr lang="en-GB" sz="1600" dirty="0" err="1">
-                <a:latin typeface="Consolas" panose="020B0609020204030204" pitchFamily="49" charset="0"/>
-              </a:rPr>
-              <a:t>sp</a:t>
-            </a:r>
-            <a:r>
-              <a:rPr lang="en-GB" sz="1600" dirty="0">
-                <a:latin typeface="Consolas" panose="020B0609020204030204" pitchFamily="49" charset="0"/>
-              </a:rPr>
-              <a:t> =&gt; new </a:t>
-            </a:r>
-            <a:r>
-              <a:rPr lang="en-GB" sz="1600" dirty="0" err="1">
-                <a:latin typeface="Consolas" panose="020B0609020204030204" pitchFamily="49" charset="0"/>
-              </a:rPr>
-              <a:t>BricksSqlServerDistributedLockStore</a:t>
-            </a:r>
-            <a:r>
-              <a:rPr lang="en-GB" sz="1600" dirty="0">
-                <a:latin typeface="Consolas" panose="020B0609020204030204" pitchFamily="49" charset="0"/>
-              </a:rPr>
-              <a:t>());</a:t>
-            </a:r>
-          </a:p>
-          <a:p>
-            <a:pPr marL="0" indent="0">
-              <a:buNone/>
-            </a:pPr>
-            <a:r>
-              <a:rPr lang="en-US" sz="1600" dirty="0">
-                <a:latin typeface="Consolas" panose="020B0609020204030204" pitchFamily="49" charset="0"/>
-              </a:rPr>
-              <a:t>        </a:t>
-            </a:r>
-            <a:r>
-              <a:rPr lang="en-US" sz="1600" dirty="0" err="1">
-                <a:latin typeface="Consolas" panose="020B0609020204030204" pitchFamily="49" charset="0"/>
-              </a:rPr>
-              <a:t>w.UseSystemTransactionScope</a:t>
-            </a:r>
-            <a:r>
-              <a:rPr lang="en-US" sz="1600" dirty="0">
-                <a:latin typeface="Consolas" panose="020B0609020204030204" pitchFamily="49" charset="0"/>
-              </a:rPr>
-              <a:t>();</a:t>
-            </a:r>
-          </a:p>
-          <a:p>
-            <a:pPr marL="0" indent="0">
-              <a:buNone/>
-            </a:pPr>
-            <a:r>
-              <a:rPr lang="en-US" sz="1600" dirty="0">
-                <a:latin typeface="Consolas" panose="020B0609020204030204" pitchFamily="49" charset="0"/>
-              </a:rPr>
-              <a:t>        </a:t>
-            </a:r>
-            <a:r>
-              <a:rPr lang="en-US" sz="1600" dirty="0" err="1">
-                <a:latin typeface="Consolas" panose="020B0609020204030204" pitchFamily="49" charset="0"/>
-              </a:rPr>
-              <a:t>w.UseWriteStore</a:t>
-            </a:r>
-            <a:r>
-              <a:rPr lang="en-US" sz="1600" dirty="0">
-                <a:latin typeface="Consolas" panose="020B0609020204030204" pitchFamily="49" charset="0"/>
-              </a:rPr>
-              <a:t>&lt;</a:t>
-            </a:r>
-            <a:r>
-              <a:rPr lang="en-US" sz="1600" dirty="0" err="1">
-                <a:latin typeface="Consolas" panose="020B0609020204030204" pitchFamily="49" charset="0"/>
-              </a:rPr>
-              <a:t>DefaultEntityFrameworkCbssPersonStore</a:t>
-            </a:r>
-            <a:r>
-              <a:rPr lang="en-US" sz="1600" dirty="0">
-                <a:latin typeface="Consolas" panose="020B0609020204030204" pitchFamily="49" charset="0"/>
-              </a:rPr>
-              <a:t>&gt;();</a:t>
-            </a:r>
-          </a:p>
-          <a:p>
-            <a:pPr marL="0" indent="0">
-              <a:buNone/>
-            </a:pPr>
-            <a:r>
-              <a:rPr lang="en-US" sz="1600" dirty="0">
-                <a:latin typeface="Consolas" panose="020B0609020204030204" pitchFamily="49" charset="0"/>
-              </a:rPr>
-              <a:t>        </a:t>
-            </a:r>
-            <a:r>
-              <a:rPr lang="en-US" sz="1600" dirty="0" err="1">
-                <a:latin typeface="Consolas" panose="020B0609020204030204" pitchFamily="49" charset="0"/>
-              </a:rPr>
-              <a:t>w.UseOriginalDataWriteStore</a:t>
-            </a:r>
-            <a:r>
-              <a:rPr lang="en-US" sz="1600" dirty="0">
-                <a:latin typeface="Consolas" panose="020B0609020204030204" pitchFamily="49" charset="0"/>
-              </a:rPr>
-              <a:t>&lt;</a:t>
-            </a:r>
-            <a:r>
-              <a:rPr lang="en-US" sz="1600" dirty="0" err="1">
-                <a:latin typeface="Consolas" panose="020B0609020204030204" pitchFamily="49" charset="0"/>
-              </a:rPr>
-              <a:t>DefaultEntityFrameworkCbssPersonOriginalDataStore</a:t>
-            </a:r>
-            <a:r>
-              <a:rPr lang="en-US" sz="1600" dirty="0">
-                <a:latin typeface="Consolas" panose="020B0609020204030204" pitchFamily="49" charset="0"/>
-              </a:rPr>
-              <a:t>&gt;();</a:t>
-            </a:r>
-          </a:p>
-          <a:p>
-            <a:pPr marL="0" indent="0">
-              <a:buNone/>
-            </a:pPr>
-            <a:r>
-              <a:rPr lang="en-US" sz="1600" dirty="0">
-                <a:latin typeface="Consolas" panose="020B0609020204030204" pitchFamily="49" charset="0"/>
-              </a:rPr>
-              <a:t>        </a:t>
-            </a:r>
-            <a:r>
-              <a:rPr lang="en-US" sz="1600" dirty="0" err="1">
-                <a:latin typeface="Consolas" panose="020B0609020204030204" pitchFamily="49" charset="0"/>
-              </a:rPr>
-              <a:t>w.UseFetchOptions</a:t>
-            </a:r>
-            <a:r>
-              <a:rPr lang="en-US" sz="1600" dirty="0">
-                <a:latin typeface="Consolas" panose="020B0609020204030204" pitchFamily="49" charset="0"/>
-              </a:rPr>
-              <a:t>(new </a:t>
-            </a:r>
-            <a:r>
-              <a:rPr lang="en-US" sz="1600" dirty="0" err="1">
-                <a:latin typeface="Consolas" panose="020B0609020204030204" pitchFamily="49" charset="0"/>
-              </a:rPr>
-              <a:t>CbssPersonFetchOptions</a:t>
-            </a:r>
-            <a:r>
-              <a:rPr lang="en-US" sz="1600" dirty="0">
-                <a:latin typeface="Consolas" panose="020B0609020204030204" pitchFamily="49" charset="0"/>
-              </a:rPr>
-              <a:t> { </a:t>
-            </a:r>
-            <a:r>
-              <a:rPr lang="en-US" sz="1600" dirty="0" err="1">
-                <a:latin typeface="Consolas" panose="020B0609020204030204" pitchFamily="49" charset="0"/>
-              </a:rPr>
-              <a:t>UseVoucherAndZipFiles</a:t>
-            </a:r>
-            <a:r>
-              <a:rPr lang="en-US" sz="1600" dirty="0">
-                <a:latin typeface="Consolas" panose="020B0609020204030204" pitchFamily="49" charset="0"/>
-              </a:rPr>
-              <a:t> = false });</a:t>
-            </a:r>
-          </a:p>
-          <a:p>
-            <a:pPr marL="0" indent="0">
-              <a:buNone/>
-            </a:pPr>
-            <a:r>
-              <a:rPr lang="en-US" sz="1600" dirty="0">
-                <a:latin typeface="Consolas" panose="020B0609020204030204" pitchFamily="49" charset="0"/>
-              </a:rPr>
-              <a:t>        </a:t>
-            </a:r>
-            <a:r>
-              <a:rPr lang="en-US" sz="1600" dirty="0" err="1">
-                <a:latin typeface="Consolas" panose="020B0609020204030204" pitchFamily="49" charset="0"/>
-              </a:rPr>
-              <a:t>w.UseFileStore</a:t>
-            </a:r>
-            <a:r>
-              <a:rPr lang="en-US" sz="1600" dirty="0">
-                <a:latin typeface="Consolas" panose="020B0609020204030204" pitchFamily="49" charset="0"/>
-              </a:rPr>
-              <a:t>(new </a:t>
-            </a:r>
-            <a:r>
-              <a:rPr lang="en-US" sz="1600" dirty="0" err="1">
-                <a:latin typeface="Consolas" panose="020B0609020204030204" pitchFamily="49" charset="0"/>
-              </a:rPr>
-              <a:t>ShowcaseFluentStorageFileStore</a:t>
-            </a:r>
-            <a:r>
-              <a:rPr lang="en-US" sz="1600" dirty="0">
-                <a:latin typeface="Consolas" panose="020B0609020204030204" pitchFamily="49" charset="0"/>
-              </a:rPr>
-              <a:t>(</a:t>
-            </a:r>
-            <a:r>
-              <a:rPr lang="en-US" sz="1600" dirty="0" err="1">
-                <a:latin typeface="Consolas" panose="020B0609020204030204" pitchFamily="49" charset="0"/>
-              </a:rPr>
-              <a:t>personStorage</a:t>
-            </a:r>
-            <a:r>
-              <a:rPr lang="en-US" sz="1600" dirty="0">
-                <a:latin typeface="Consolas" panose="020B0609020204030204" pitchFamily="49" charset="0"/>
-              </a:rPr>
-              <a:t>,  </a:t>
-            </a:r>
-            <a:r>
-              <a:rPr lang="en-US" sz="1600" dirty="0" err="1">
-                <a:latin typeface="Consolas" panose="020B0609020204030204" pitchFamily="49" charset="0"/>
-              </a:rPr>
-              <a:t>options.CbssPersonsDir</a:t>
-            </a:r>
-            <a:r>
-              <a:rPr lang="en-US" sz="1600" dirty="0">
-                <a:latin typeface="Consolas" panose="020B0609020204030204" pitchFamily="49" charset="0"/>
-              </a:rPr>
-              <a:t>));</a:t>
-            </a:r>
-          </a:p>
-          <a:p>
-            <a:pPr marL="0" indent="0">
-              <a:buNone/>
-            </a:pPr>
-            <a:r>
-              <a:rPr lang="en-US" sz="1600" dirty="0">
-                <a:latin typeface="Consolas" panose="020B0609020204030204" pitchFamily="49" charset="0"/>
-              </a:rPr>
-              <a:t>        </a:t>
-            </a:r>
-            <a:r>
-              <a:rPr lang="en-US" sz="1600" dirty="0" err="1">
-                <a:latin typeface="Consolas" panose="020B0609020204030204" pitchFamily="49" charset="0"/>
-              </a:rPr>
-              <a:t>w.UseRemoteFileStore</a:t>
-            </a:r>
-            <a:r>
-              <a:rPr lang="en-US" sz="1600" dirty="0">
-                <a:latin typeface="Consolas" panose="020B0609020204030204" pitchFamily="49" charset="0"/>
-              </a:rPr>
-              <a:t>(new </a:t>
-            </a:r>
-            <a:r>
-              <a:rPr lang="en-US" sz="1600" dirty="0" err="1">
-                <a:latin typeface="Consolas" panose="020B0609020204030204" pitchFamily="49" charset="0"/>
-              </a:rPr>
-              <a:t>ShowcaseFluentStorageRemoteFileStore</a:t>
-            </a:r>
-            <a:r>
-              <a:rPr lang="en-US" sz="1600" dirty="0">
-                <a:latin typeface="Consolas" panose="020B0609020204030204" pitchFamily="49" charset="0"/>
-              </a:rPr>
-              <a:t>(</a:t>
-            </a:r>
-            <a:r>
-              <a:rPr lang="en-US" sz="1600" dirty="0" err="1">
-                <a:latin typeface="Consolas" panose="020B0609020204030204" pitchFamily="49" charset="0"/>
-              </a:rPr>
-              <a:t>personFtp</a:t>
-            </a:r>
-            <a:r>
-              <a:rPr lang="en-US" sz="1600" dirty="0">
-                <a:latin typeface="Consolas" panose="020B0609020204030204" pitchFamily="49" charset="0"/>
-              </a:rPr>
-              <a:t>, $"{</a:t>
-            </a:r>
-            <a:r>
-              <a:rPr lang="en-US" sz="1600" dirty="0" err="1">
-                <a:latin typeface="Consolas" panose="020B0609020204030204" pitchFamily="49" charset="0"/>
-              </a:rPr>
-              <a:t>options.Basedir</a:t>
-            </a:r>
-            <a:r>
-              <a:rPr lang="en-US" sz="1600" dirty="0">
-                <a:latin typeface="Consolas" panose="020B0609020204030204" pitchFamily="49" charset="0"/>
-              </a:rPr>
-              <a:t>}/</a:t>
-            </a:r>
-            <a:r>
-              <a:rPr lang="en-US" sz="1600" dirty="0" err="1">
-                <a:latin typeface="Consolas" panose="020B0609020204030204" pitchFamily="49" charset="0"/>
-              </a:rPr>
-              <a:t>cbsspersons</a:t>
-            </a:r>
-            <a:r>
-              <a:rPr lang="en-US" sz="1600" dirty="0">
-                <a:latin typeface="Consolas" panose="020B0609020204030204" pitchFamily="49" charset="0"/>
-              </a:rPr>
-              <a:t>"));</a:t>
-            </a:r>
-          </a:p>
-          <a:p>
-            <a:pPr marL="0" indent="0">
-              <a:buNone/>
-            </a:pPr>
-            <a:r>
-              <a:rPr lang="en-US" sz="1600" dirty="0">
-                <a:latin typeface="Consolas" panose="020B0609020204030204" pitchFamily="49" charset="0"/>
-              </a:rPr>
-              <a:t>        </a:t>
-            </a:r>
-            <a:r>
-              <a:rPr lang="en-US" sz="1600" dirty="0" err="1">
-                <a:latin typeface="Consolas" panose="020B0609020204030204" pitchFamily="49" charset="0"/>
-              </a:rPr>
-              <a:t>w.UseListener</a:t>
-            </a:r>
-            <a:r>
-              <a:rPr lang="en-US" sz="1600" dirty="0">
-                <a:latin typeface="Consolas" panose="020B0609020204030204" pitchFamily="49" charset="0"/>
-              </a:rPr>
-              <a:t>&lt;</a:t>
-            </a:r>
-            <a:r>
-              <a:rPr lang="en-US" sz="1600" dirty="0" err="1">
-                <a:latin typeface="Consolas" panose="020B0609020204030204" pitchFamily="49" charset="0"/>
-              </a:rPr>
-              <a:t>BricksCbssPersonUpdatedNotification</a:t>
-            </a:r>
-            <a:r>
-              <a:rPr lang="en-US" sz="1600" dirty="0">
-                <a:latin typeface="Consolas" panose="020B0609020204030204" pitchFamily="49" charset="0"/>
-              </a:rPr>
-              <a:t>, </a:t>
-            </a:r>
-            <a:r>
-              <a:rPr lang="en-US" sz="1600" dirty="0" err="1">
-                <a:latin typeface="Consolas" panose="020B0609020204030204" pitchFamily="49" charset="0"/>
-              </a:rPr>
-              <a:t>MyCbssPersonUpdatedListener</a:t>
-            </a:r>
-            <a:r>
-              <a:rPr lang="en-US" sz="1600" dirty="0">
-                <a:latin typeface="Consolas" panose="020B0609020204030204" pitchFamily="49" charset="0"/>
-              </a:rPr>
-              <a:t>&gt;();</a:t>
-            </a:r>
-            <a:r>
-              <a:rPr lang="en-BE" sz="1600" dirty="0">
-                <a:latin typeface="Consolas" panose="020B0609020204030204" pitchFamily="49" charset="0"/>
-              </a:rPr>
-              <a:t> </a:t>
-            </a:r>
-            <a:endParaRPr lang="en-US" sz="1600" dirty="0">
-              <a:latin typeface="Consolas" panose="020B0609020204030204" pitchFamily="49" charset="0"/>
-            </a:endParaRPr>
-          </a:p>
-          <a:p>
-            <a:pPr marL="0" indent="0">
-              <a:buNone/>
-            </a:pPr>
-            <a:r>
-              <a:rPr lang="en-BE" sz="1600" dirty="0">
-                <a:latin typeface="Consolas" panose="020B0609020204030204" pitchFamily="49" charset="0"/>
-              </a:rPr>
-              <a:t>})</a:t>
-            </a:r>
-          </a:p>
-          <a:p>
-            <a:pPr marL="0" indent="0">
-              <a:buNone/>
-            </a:pPr>
-            <a:r>
-              <a:rPr lang="en-US" sz="1600" dirty="0">
-                <a:latin typeface="Consolas" panose="020B0609020204030204" pitchFamily="49" charset="0"/>
-              </a:rPr>
-              <a:t>    .</a:t>
-            </a:r>
-            <a:r>
-              <a:rPr lang="en-US" sz="1600" dirty="0" err="1">
-                <a:latin typeface="Consolas" panose="020B0609020204030204" pitchFamily="49" charset="0"/>
-              </a:rPr>
-              <a:t>UseDefaultBricksJobService</a:t>
-            </a:r>
-            <a:r>
-              <a:rPr lang="en-US" sz="1600" dirty="0">
-                <a:latin typeface="Consolas" panose="020B0609020204030204" pitchFamily="49" charset="0"/>
-              </a:rPr>
-              <a:t>()</a:t>
-            </a:r>
-          </a:p>
-          <a:p>
-            <a:pPr marL="0" indent="0">
-              <a:buNone/>
-            </a:pPr>
-            <a:r>
-              <a:rPr lang="en-US" sz="1600" dirty="0">
-                <a:latin typeface="Consolas" panose="020B0609020204030204" pitchFamily="49" charset="0"/>
-              </a:rPr>
-              <a:t>    .</a:t>
-            </a:r>
-            <a:r>
-              <a:rPr lang="en-US" sz="1600" dirty="0" err="1">
-                <a:latin typeface="Consolas" panose="020B0609020204030204" pitchFamily="49" charset="0"/>
-              </a:rPr>
-              <a:t>UseDbContext</a:t>
-            </a:r>
-            <a:r>
-              <a:rPr lang="en-US" sz="1600" dirty="0">
-                <a:latin typeface="Consolas" panose="020B0609020204030204" pitchFamily="49" charset="0"/>
-              </a:rPr>
-              <a:t>&lt;</a:t>
-            </a:r>
-            <a:r>
-              <a:rPr lang="en-US" sz="1600" dirty="0" err="1">
-                <a:latin typeface="Consolas" panose="020B0609020204030204" pitchFamily="49" charset="0"/>
-              </a:rPr>
-              <a:t>ShowcaseDbContext</a:t>
-            </a:r>
-            <a:r>
-              <a:rPr lang="en-US" sz="1600" dirty="0">
-                <a:latin typeface="Consolas" panose="020B0609020204030204" pitchFamily="49" charset="0"/>
-              </a:rPr>
-              <a:t>&gt;();</a:t>
-            </a:r>
-            <a:endParaRPr lang="en-BE" sz="1600" dirty="0">
-              <a:latin typeface="Consolas" panose="020B0609020204030204" pitchFamily="49" charset="0"/>
-            </a:endParaRPr>
-          </a:p>
-        </p:txBody>
-      </p:sp>
+      </p:pic>
     </p:spTree>
     <p:extLst>
       <p:ext uri="{BB962C8B-B14F-4D97-AF65-F5344CB8AC3E}">
@@ -5689,9 +7539,9 @@
 </file>
 
 <file path=ppt/theme/theme1.xml><?xml version="1.0" encoding="utf-8"?>
-<a:theme xmlns:a="http://schemas.openxmlformats.org/drawingml/2006/main" name="Office Theme">
+<a:theme xmlns:a="http://schemas.openxmlformats.org/drawingml/2006/main" name="Facet">
   <a:themeElements>
-    <a:clrScheme name="Office">
+    <a:clrScheme name="Facet">
       <a:dk1>
         <a:sysClr val="windowText" lastClr="000000"/>
       </a:dk1>
@@ -5699,52 +7549,52 @@
         <a:sysClr val="window" lastClr="FFFFFF"/>
       </a:lt1>
       <a:dk2>
-        <a:srgbClr val="0E2841"/>
+        <a:srgbClr val="2C3C43"/>
       </a:dk2>
       <a:lt2>
-        <a:srgbClr val="E8E8E8"/>
+        <a:srgbClr val="EBEBEB"/>
       </a:lt2>
       <a:accent1>
-        <a:srgbClr val="156082"/>
+        <a:srgbClr val="90C226"/>
       </a:accent1>
       <a:accent2>
-        <a:srgbClr val="E97132"/>
+        <a:srgbClr val="54A021"/>
       </a:accent2>
       <a:accent3>
-        <a:srgbClr val="196B24"/>
+        <a:srgbClr val="E6B91E"/>
       </a:accent3>
       <a:accent4>
-        <a:srgbClr val="0F9ED5"/>
+        <a:srgbClr val="E76618"/>
       </a:accent4>
       <a:accent5>
-        <a:srgbClr val="A02B93"/>
+        <a:srgbClr val="C42F1A"/>
       </a:accent5>
       <a:accent6>
-        <a:srgbClr val="4EA72E"/>
+        <a:srgbClr val="918655"/>
       </a:accent6>
       <a:hlink>
-        <a:srgbClr val="467886"/>
+        <a:srgbClr val="99CA3C"/>
       </a:hlink>
       <a:folHlink>
-        <a:srgbClr val="96607D"/>
+        <a:srgbClr val="B9D181"/>
       </a:folHlink>
     </a:clrScheme>
-    <a:fontScheme name="Office">
+    <a:fontScheme name="Facet">
       <a:majorFont>
-        <a:latin typeface="Aptos Display" panose="02110004020202020204"/>
+        <a:latin typeface="Trebuchet MS" panose="020B0603020202020204"/>
         <a:ea typeface=""/>
         <a:cs typeface=""/>
-        <a:font script="Jpan" typeface="游ゴシック Light"/>
+        <a:font script="Jpan" typeface="メイリオ"/>
         <a:font script="Hang" typeface="맑은 고딕"/>
-        <a:font script="Hans" typeface="等线 Light"/>
-        <a:font script="Hant" typeface="新細明體"/>
-        <a:font script="Arab" typeface="Times New Roman"/>
-        <a:font script="Hebr" typeface="Times New Roman"/>
-        <a:font script="Thai" typeface="Angsana New"/>
+        <a:font script="Hans" typeface="方正姚体"/>
+        <a:font script="Hant" typeface="微軟正黑體"/>
+        <a:font script="Arab" typeface="Tahoma"/>
+        <a:font script="Hebr" typeface="Arial"/>
+        <a:font script="Thai" typeface="Cordia New"/>
         <a:font script="Ethi" typeface="Nyala"/>
         <a:font script="Beng" typeface="Vrinda"/>
         <a:font script="Gujr" typeface="Shruti"/>
-        <a:font script="Khmr" typeface="MoolBoran"/>
+        <a:font script="Khmr" typeface="DaunPenh"/>
         <a:font script="Knda" typeface="Tunga"/>
         <a:font script="Guru" typeface="Raavi"/>
         <a:font script="Cans" typeface="Euphemia"/>
@@ -5761,38 +7611,21 @@
         <a:font script="Laoo" typeface="DokChampa"/>
         <a:font script="Sinh" typeface="Iskoola Pota"/>
         <a:font script="Mong" typeface="Mongolian Baiti"/>
-        <a:font script="Viet" typeface="Times New Roman"/>
+        <a:font script="Viet" typeface="Tahoma"/>
         <a:font script="Uigh" typeface="Microsoft Uighur"/>
         <a:font script="Geor" typeface="Sylfaen"/>
-        <a:font script="Armn" typeface="Arial"/>
-        <a:font script="Bugi" typeface="Leelawadee UI"/>
-        <a:font script="Bopo" typeface="Microsoft JhengHei"/>
-        <a:font script="Java" typeface="Javanese Text"/>
-        <a:font script="Lisu" typeface="Segoe UI"/>
-        <a:font script="Mymr" typeface="Myanmar Text"/>
-        <a:font script="Nkoo" typeface="Ebrima"/>
-        <a:font script="Olck" typeface="Nirmala UI"/>
-        <a:font script="Osma" typeface="Ebrima"/>
-        <a:font script="Phag" typeface="Phagspa"/>
-        <a:font script="Syrn" typeface="Estrangelo Edessa"/>
-        <a:font script="Syrj" typeface="Estrangelo Edessa"/>
-        <a:font script="Syre" typeface="Estrangelo Edessa"/>
-        <a:font script="Sora" typeface="Nirmala UI"/>
-        <a:font script="Tale" typeface="Microsoft Tai Le"/>
-        <a:font script="Talu" typeface="Microsoft New Tai Lue"/>
-        <a:font script="Tfng" typeface="Ebrima"/>
       </a:majorFont>
       <a:minorFont>
-        <a:latin typeface="Aptos" panose="02110004020202020204"/>
+        <a:latin typeface="Trebuchet MS" panose="020B0603020202020204"/>
         <a:ea typeface=""/>
         <a:cs typeface=""/>
-        <a:font script="Jpan" typeface="游ゴシック"/>
-        <a:font script="Hang" typeface="맑은 고딕"/>
-        <a:font script="Hans" typeface="等线"/>
-        <a:font script="Hant" typeface="新細明體"/>
-        <a:font script="Arab" typeface="Arial"/>
-        <a:font script="Hebr" typeface="Arial"/>
-        <a:font script="Thai" typeface="Cordia New"/>
+        <a:font script="Jpan" typeface="メイリオ"/>
+        <a:font script="Hang" typeface="HY그래픽M"/>
+        <a:font script="Hans" typeface="华文新魏"/>
+        <a:font script="Hant" typeface="微軟正黑體"/>
+        <a:font script="Arab" typeface="Tahoma"/>
+        <a:font script="Hebr" typeface="Gisha"/>
+        <a:font script="Thai" typeface="IrisUPC"/>
         <a:font script="Ethi" typeface="Nyala"/>
         <a:font script="Beng" typeface="Vrinda"/>
         <a:font script="Gujr" typeface="Shruti"/>
@@ -5816,26 +7649,9 @@
         <a:font script="Viet" typeface="Arial"/>
         <a:font script="Uigh" typeface="Microsoft Uighur"/>
         <a:font script="Geor" typeface="Sylfaen"/>
-        <a:font script="Armn" typeface="Arial"/>
-        <a:font script="Bugi" typeface="Leelawadee UI"/>
-        <a:font script="Bopo" typeface="Microsoft JhengHei"/>
-        <a:font script="Java" typeface="Javanese Text"/>
-        <a:font script="Lisu" typeface="Segoe UI"/>
-        <a:font script="Mymr" typeface="Myanmar Text"/>
-        <a:font script="Nkoo" typeface="Ebrima"/>
-        <a:font script="Olck" typeface="Nirmala UI"/>
-        <a:font script="Osma" typeface="Ebrima"/>
-        <a:font script="Phag" typeface="Phagspa"/>
-        <a:font script="Syrn" typeface="Estrangelo Edessa"/>
-        <a:font script="Syrj" typeface="Estrangelo Edessa"/>
-        <a:font script="Syre" typeface="Estrangelo Edessa"/>
-        <a:font script="Sora" typeface="Nirmala UI"/>
-        <a:font script="Tale" typeface="Microsoft Tai Le"/>
-        <a:font script="Talu" typeface="Microsoft New Tai Lue"/>
-        <a:font script="Tfng" typeface="Ebrima"/>
       </a:minorFont>
     </a:fontScheme>
-    <a:fmtScheme name="Office">
+    <a:fmtScheme name="Facet">
       <a:fillStyleLst>
         <a:solidFill>
           <a:schemeClr val="phClr"/>
@@ -5844,23 +7660,13 @@
           <a:gsLst>
             <a:gs pos="0">
               <a:schemeClr val="phClr">
+                <a:tint val="65000"/>
                 <a:lumMod val="110000"/>
-                <a:satMod val="105000"/>
-                <a:tint val="67000"/>
               </a:schemeClr>
             </a:gs>
-            <a:gs pos="50000">
+            <a:gs pos="88000">
               <a:schemeClr val="phClr">
-                <a:lumMod val="105000"/>
-                <a:satMod val="103000"/>
-                <a:tint val="73000"/>
-              </a:schemeClr>
-            </a:gs>
-            <a:gs pos="100000">
-              <a:schemeClr val="phClr">
-                <a:lumMod val="105000"/>
-                <a:satMod val="109000"/>
-                <a:tint val="81000"/>
+                <a:tint val="90000"/>
               </a:schemeClr>
             </a:gs>
           </a:gsLst>
@@ -5870,23 +7676,14 @@
           <a:gsLst>
             <a:gs pos="0">
               <a:schemeClr val="phClr">
-                <a:satMod val="103000"/>
-                <a:lumMod val="102000"/>
-                <a:tint val="94000"/>
+                <a:tint val="96000"/>
+                <a:lumMod val="100000"/>
               </a:schemeClr>
             </a:gs>
-            <a:gs pos="50000">
+            <a:gs pos="78000">
               <a:schemeClr val="phClr">
-                <a:satMod val="110000"/>
-                <a:lumMod val="100000"/>
-                <a:shade val="100000"/>
-              </a:schemeClr>
-            </a:gs>
-            <a:gs pos="100000">
-              <a:schemeClr val="phClr">
-                <a:lumMod val="99000"/>
-                <a:satMod val="120000"/>
-                <a:shade val="78000"/>
+                <a:shade val="94000"/>
+                <a:lumMod val="94000"/>
               </a:schemeClr>
             </a:gs>
           </a:gsLst>
@@ -5894,26 +7691,23 @@
         </a:gradFill>
       </a:fillStyleLst>
       <a:lnStyleLst>
-        <a:ln w="12700" cap="flat" cmpd="sng" algn="ctr">
+        <a:ln w="12700" cap="rnd" cmpd="sng" algn="ctr">
           <a:solidFill>
             <a:schemeClr val="phClr"/>
           </a:solidFill>
           <a:prstDash val="solid"/>
-          <a:miter lim="800000"/>
         </a:ln>
-        <a:ln w="19050" cap="flat" cmpd="sng" algn="ctr">
+        <a:ln w="19050" cap="rnd" cmpd="sng" algn="ctr">
           <a:solidFill>
             <a:schemeClr val="phClr"/>
           </a:solidFill>
           <a:prstDash val="solid"/>
-          <a:miter lim="800000"/>
         </a:ln>
-        <a:ln w="25400" cap="flat" cmpd="sng" algn="ctr">
+        <a:ln w="25400" cap="rnd" cmpd="sng" algn="ctr">
           <a:solidFill>
             <a:schemeClr val="phClr"/>
           </a:solidFill>
           <a:prstDash val="solid"/>
-          <a:miter lim="800000"/>
         </a:ln>
       </a:lnStyleLst>
       <a:effectStyleLst>
@@ -5921,83 +7715,81 @@
           <a:effectLst/>
         </a:effectStyle>
         <a:effectStyle>
-          <a:effectLst/>
+          <a:effectLst>
+            <a:outerShdw blurRad="38100" dist="25400" dir="5400000" rotWithShape="0">
+              <a:srgbClr val="000000">
+                <a:alpha val="35000"/>
+              </a:srgbClr>
+            </a:outerShdw>
+          </a:effectLst>
         </a:effectStyle>
         <a:effectStyle>
           <a:effectLst>
-            <a:outerShdw blurRad="57150" dist="19050" dir="5400000" algn="ctr" rotWithShape="0">
+            <a:outerShdw blurRad="50800" dist="38100" dir="5400000" rotWithShape="0">
               <a:srgbClr val="000000">
-                <a:alpha val="63000"/>
+                <a:alpha val="35000"/>
               </a:srgbClr>
             </a:outerShdw>
           </a:effectLst>
+          <a:scene3d>
+            <a:camera prst="orthographicFront">
+              <a:rot lat="0" lon="0" rev="0"/>
+            </a:camera>
+            <a:lightRig rig="threePt" dir="tl"/>
+          </a:scene3d>
+          <a:sp3d prstMaterial="plastic">
+            <a:bevelT w="0" h="0"/>
+          </a:sp3d>
         </a:effectStyle>
       </a:effectStyleLst>
       <a:bgFillStyleLst>
         <a:solidFill>
           <a:schemeClr val="phClr"/>
         </a:solidFill>
-        <a:solidFill>
-          <a:schemeClr val="phClr">
-            <a:tint val="95000"/>
-            <a:satMod val="170000"/>
-          </a:schemeClr>
-        </a:solidFill>
         <a:gradFill rotWithShape="1">
           <a:gsLst>
             <a:gs pos="0">
               <a:schemeClr val="phClr">
-                <a:tint val="93000"/>
-                <a:satMod val="150000"/>
-                <a:shade val="98000"/>
-                <a:lumMod val="102000"/>
+                <a:tint val="90000"/>
+                <a:lumMod val="104000"/>
               </a:schemeClr>
             </a:gs>
-            <a:gs pos="50000">
+            <a:gs pos="94000">
               <a:schemeClr val="phClr">
-                <a:tint val="98000"/>
-                <a:satMod val="130000"/>
-                <a:shade val="90000"/>
-                <a:lumMod val="103000"/>
-              </a:schemeClr>
-            </a:gs>
-            <a:gs pos="100000">
-              <a:schemeClr val="phClr">
-                <a:shade val="63000"/>
-                <a:satMod val="120000"/>
+                <a:shade val="96000"/>
+                <a:lumMod val="82000"/>
               </a:schemeClr>
             </a:gs>
           </a:gsLst>
           <a:lin ang="5400000" scaled="0"/>
         </a:gradFill>
+        <a:gradFill rotWithShape="1">
+          <a:gsLst>
+            <a:gs pos="0">
+              <a:schemeClr val="phClr">
+                <a:tint val="90000"/>
+                <a:lumMod val="110000"/>
+              </a:schemeClr>
+            </a:gs>
+            <a:gs pos="100000">
+              <a:schemeClr val="phClr">
+                <a:shade val="94000"/>
+                <a:lumMod val="96000"/>
+              </a:schemeClr>
+            </a:gs>
+          </a:gsLst>
+          <a:path path="circle">
+            <a:fillToRect l="50000" t="50000" r="100000" b="100000"/>
+          </a:path>
+        </a:gradFill>
       </a:bgFillStyleLst>
     </a:fmtScheme>
   </a:themeElements>
-  <a:objectDefaults>
-    <a:lnDef>
-      <a:spPr/>
-      <a:bodyPr/>
-      <a:lstStyle/>
-      <a:style>
-        <a:lnRef idx="2">
-          <a:schemeClr val="accent1"/>
-        </a:lnRef>
-        <a:fillRef idx="0">
-          <a:schemeClr val="accent1"/>
-        </a:fillRef>
-        <a:effectRef idx="1">
-          <a:schemeClr val="accent1"/>
-        </a:effectRef>
-        <a:fontRef idx="minor">
-          <a:schemeClr val="tx1"/>
-        </a:fontRef>
-      </a:style>
-    </a:lnDef>
-  </a:objectDefaults>
+  <a:objectDefaults/>
   <a:extraClrSchemeLst/>
   <a:extLst>
     <a:ext uri="{05A4C25C-085E-4340-85A3-A5531E510DB2}">
-      <thm15:themeFamily xmlns:thm15="http://schemas.microsoft.com/office/thememl/2012/main" name="Office Theme" id="{2E142A2C-CD16-42D6-873A-C26D2A0506FA}" vid="{1BDDFF52-6CD6-40A5-AB3C-68EB2F1E4D0A}"/>
+      <thm15:themeFamily xmlns:thm15="http://schemas.microsoft.com/office/thememl/2012/main" name="Facet" id="{C0C680CD-088A-49FC-A102-D699147F32B2}" vid="{CFBC31BA-B70F-4F30-BCAA-4F3011E16C4D}"/>
     </a:ext>
   </a:extLst>
 </a:theme>

--- a/workshop.pptx
+++ b/workshop.pptx
@@ -283,6 +283,13 @@
               <a:schemeClr val="lt1"/>
             </a:fontRef>
           </p:style>
+          <p:txBody>
+            <a:bodyPr/>
+            <a:lstStyle/>
+            <a:p>
+              <a:endParaRPr lang="en-BE"/>
+            </a:p>
+          </p:txBody>
         </p:sp>
         <p:sp>
           <p:nvSpPr>
@@ -346,6 +353,13 @@
               <a:schemeClr val="lt1"/>
             </a:fontRef>
           </p:style>
+          <p:txBody>
+            <a:bodyPr/>
+            <a:lstStyle/>
+            <a:p>
+              <a:endParaRPr lang="en-BE"/>
+            </a:p>
+          </p:txBody>
         </p:sp>
         <p:sp>
           <p:nvSpPr>
@@ -387,6 +401,13 @@
               <a:schemeClr val="lt1"/>
             </a:fontRef>
           </p:style>
+          <p:txBody>
+            <a:bodyPr/>
+            <a:lstStyle/>
+            <a:p>
+              <a:endParaRPr lang="en-BE"/>
+            </a:p>
+          </p:txBody>
         </p:sp>
         <p:sp>
           <p:nvSpPr>
@@ -451,6 +472,13 @@
               <a:schemeClr val="lt1"/>
             </a:fontRef>
           </p:style>
+          <p:txBody>
+            <a:bodyPr/>
+            <a:lstStyle/>
+            <a:p>
+              <a:endParaRPr lang="en-BE"/>
+            </a:p>
+          </p:txBody>
         </p:sp>
         <p:sp>
           <p:nvSpPr>
@@ -516,6 +544,13 @@
               <a:schemeClr val="lt1"/>
             </a:fontRef>
           </p:style>
+          <p:txBody>
+            <a:bodyPr/>
+            <a:lstStyle/>
+            <a:p>
+              <a:endParaRPr lang="en-BE"/>
+            </a:p>
+          </p:txBody>
         </p:sp>
         <p:sp>
           <p:nvSpPr>
@@ -579,6 +614,13 @@
               <a:schemeClr val="lt1"/>
             </a:fontRef>
           </p:style>
+          <p:txBody>
+            <a:bodyPr/>
+            <a:lstStyle/>
+            <a:p>
+              <a:endParaRPr lang="en-BE"/>
+            </a:p>
+          </p:txBody>
         </p:sp>
         <p:sp>
           <p:nvSpPr>
@@ -620,6 +662,13 @@
               <a:schemeClr val="lt1"/>
             </a:fontRef>
           </p:style>
+          <p:txBody>
+            <a:bodyPr/>
+            <a:lstStyle/>
+            <a:p>
+              <a:endParaRPr lang="en-BE"/>
+            </a:p>
+          </p:txBody>
         </p:sp>
         <p:sp>
           <p:nvSpPr>
@@ -661,6 +710,13 @@
               <a:schemeClr val="lt1"/>
             </a:fontRef>
           </p:style>
+          <p:txBody>
+            <a:bodyPr/>
+            <a:lstStyle/>
+            <a:p>
+              <a:endParaRPr lang="en-BE"/>
+            </a:p>
+          </p:txBody>
         </p:sp>
       </p:grpSp>
       <p:sp>
@@ -838,7 +894,7 @@
           <a:p>
             <a:fld id="{C70E5D01-44FA-40AF-8633-6FC63E8CF416}" type="datetimeFigureOut">
               <a:rPr lang="en-BE" smtClean="0"/>
-              <a:t>12/03/2026</a:t>
+              <a:t>18/03/2026</a:t>
             </a:fld>
             <a:endParaRPr lang="en-BE"/>
           </a:p>
@@ -1089,7 +1145,7 @@
           <a:p>
             <a:fld id="{C70E5D01-44FA-40AF-8633-6FC63E8CF416}" type="datetimeFigureOut">
               <a:rPr lang="en-BE" smtClean="0"/>
-              <a:t>12/03/2026</a:t>
+              <a:t>18/03/2026</a:t>
             </a:fld>
             <a:endParaRPr lang="en-BE"/>
           </a:p>
@@ -1403,7 +1459,7 @@
           <a:p>
             <a:fld id="{C70E5D01-44FA-40AF-8633-6FC63E8CF416}" type="datetimeFigureOut">
               <a:rPr lang="en-BE" smtClean="0"/>
-              <a:t>12/03/2026</a:t>
+              <a:t>18/03/2026</a:t>
             </a:fld>
             <a:endParaRPr lang="en-BE"/>
           </a:p>
@@ -1744,7 +1800,7 @@
           <a:p>
             <a:fld id="{C70E5D01-44FA-40AF-8633-6FC63E8CF416}" type="datetimeFigureOut">
               <a:rPr lang="en-BE" smtClean="0"/>
-              <a:t>12/03/2026</a:t>
+              <a:t>18/03/2026</a:t>
             </a:fld>
             <a:endParaRPr lang="en-BE"/>
           </a:p>
@@ -2058,7 +2114,7 @@
           <a:p>
             <a:fld id="{C70E5D01-44FA-40AF-8633-6FC63E8CF416}" type="datetimeFigureOut">
               <a:rPr lang="en-BE" smtClean="0"/>
-              <a:t>12/03/2026</a:t>
+              <a:t>18/03/2026</a:t>
             </a:fld>
             <a:endParaRPr lang="en-BE"/>
           </a:p>
@@ -2451,7 +2507,7 @@
           <a:p>
             <a:fld id="{C70E5D01-44FA-40AF-8633-6FC63E8CF416}" type="datetimeFigureOut">
               <a:rPr lang="en-BE" smtClean="0"/>
-              <a:t>12/03/2026</a:t>
+              <a:t>18/03/2026</a:t>
             </a:fld>
             <a:endParaRPr lang="en-BE"/>
           </a:p>
@@ -2621,7 +2677,7 @@
           <a:p>
             <a:fld id="{C70E5D01-44FA-40AF-8633-6FC63E8CF416}" type="datetimeFigureOut">
               <a:rPr lang="en-BE" smtClean="0"/>
-              <a:t>12/03/2026</a:t>
+              <a:t>18/03/2026</a:t>
             </a:fld>
             <a:endParaRPr lang="en-BE"/>
           </a:p>
@@ -2801,7 +2857,7 @@
           <a:p>
             <a:fld id="{C70E5D01-44FA-40AF-8633-6FC63E8CF416}" type="datetimeFigureOut">
               <a:rPr lang="en-BE" smtClean="0"/>
-              <a:t>12/03/2026</a:t>
+              <a:t>18/03/2026</a:t>
             </a:fld>
             <a:endParaRPr lang="en-BE"/>
           </a:p>
@@ -2977,7 +3033,7 @@
           <a:p>
             <a:fld id="{C70E5D01-44FA-40AF-8633-6FC63E8CF416}" type="datetimeFigureOut">
               <a:rPr lang="en-BE" smtClean="0"/>
-              <a:t>12/03/2026</a:t>
+              <a:t>18/03/2026</a:t>
             </a:fld>
             <a:endParaRPr lang="en-BE"/>
           </a:p>
@@ -3224,7 +3280,7 @@
           <a:p>
             <a:fld id="{C70E5D01-44FA-40AF-8633-6FC63E8CF416}" type="datetimeFigureOut">
               <a:rPr lang="en-BE" smtClean="0"/>
-              <a:t>12/03/2026</a:t>
+              <a:t>18/03/2026</a:t>
             </a:fld>
             <a:endParaRPr lang="en-BE"/>
           </a:p>
@@ -3456,7 +3512,7 @@
           <a:p>
             <a:fld id="{C70E5D01-44FA-40AF-8633-6FC63E8CF416}" type="datetimeFigureOut">
               <a:rPr lang="en-BE" smtClean="0"/>
-              <a:t>12/03/2026</a:t>
+              <a:t>18/03/2026</a:t>
             </a:fld>
             <a:endParaRPr lang="en-BE"/>
           </a:p>
@@ -3830,7 +3886,7 @@
           <a:p>
             <a:fld id="{C70E5D01-44FA-40AF-8633-6FC63E8CF416}" type="datetimeFigureOut">
               <a:rPr lang="en-BE" smtClean="0"/>
-              <a:t>12/03/2026</a:t>
+              <a:t>18/03/2026</a:t>
             </a:fld>
             <a:endParaRPr lang="en-BE"/>
           </a:p>
@@ -3953,7 +4009,7 @@
           <a:p>
             <a:fld id="{C70E5D01-44FA-40AF-8633-6FC63E8CF416}" type="datetimeFigureOut">
               <a:rPr lang="en-BE" smtClean="0"/>
-              <a:t>12/03/2026</a:t>
+              <a:t>18/03/2026</a:t>
             </a:fld>
             <a:endParaRPr lang="en-BE"/>
           </a:p>
@@ -4048,7 +4104,7 @@
           <a:p>
             <a:fld id="{C70E5D01-44FA-40AF-8633-6FC63E8CF416}" type="datetimeFigureOut">
               <a:rPr lang="en-BE" smtClean="0"/>
-              <a:t>12/03/2026</a:t>
+              <a:t>18/03/2026</a:t>
             </a:fld>
             <a:endParaRPr lang="en-BE"/>
           </a:p>
@@ -4303,7 +4359,7 @@
           <a:p>
             <a:fld id="{C70E5D01-44FA-40AF-8633-6FC63E8CF416}" type="datetimeFigureOut">
               <a:rPr lang="en-BE" smtClean="0"/>
-              <a:t>12/03/2026</a:t>
+              <a:t>18/03/2026</a:t>
             </a:fld>
             <a:endParaRPr lang="en-BE"/>
           </a:p>
@@ -4566,7 +4622,7 @@
           <a:p>
             <a:fld id="{C70E5D01-44FA-40AF-8633-6FC63E8CF416}" type="datetimeFigureOut">
               <a:rPr lang="en-BE" smtClean="0"/>
-              <a:t>12/03/2026</a:t>
+              <a:t>18/03/2026</a:t>
             </a:fld>
             <a:endParaRPr lang="en-BE"/>
           </a:p>
@@ -4799,6 +4855,13 @@
               <a:schemeClr val="lt1"/>
             </a:fontRef>
           </p:style>
+          <p:txBody>
+            <a:bodyPr/>
+            <a:lstStyle/>
+            <a:p>
+              <a:endParaRPr lang="en-BE"/>
+            </a:p>
+          </p:txBody>
         </p:sp>
         <p:sp>
           <p:nvSpPr>
@@ -4862,6 +4925,13 @@
               <a:schemeClr val="lt1"/>
             </a:fontRef>
           </p:style>
+          <p:txBody>
+            <a:bodyPr/>
+            <a:lstStyle/>
+            <a:p>
+              <a:endParaRPr lang="en-BE"/>
+            </a:p>
+          </p:txBody>
         </p:sp>
         <p:sp>
           <p:nvSpPr>
@@ -4903,6 +4973,13 @@
               <a:schemeClr val="lt1"/>
             </a:fontRef>
           </p:style>
+          <p:txBody>
+            <a:bodyPr/>
+            <a:lstStyle/>
+            <a:p>
+              <a:endParaRPr lang="en-BE"/>
+            </a:p>
+          </p:txBody>
         </p:sp>
         <p:sp>
           <p:nvSpPr>
@@ -4967,6 +5044,13 @@
               <a:schemeClr val="lt1"/>
             </a:fontRef>
           </p:style>
+          <p:txBody>
+            <a:bodyPr/>
+            <a:lstStyle/>
+            <a:p>
+              <a:endParaRPr lang="en-BE"/>
+            </a:p>
+          </p:txBody>
         </p:sp>
         <p:sp>
           <p:nvSpPr>
@@ -5032,6 +5116,13 @@
               <a:schemeClr val="lt1"/>
             </a:fontRef>
           </p:style>
+          <p:txBody>
+            <a:bodyPr/>
+            <a:lstStyle/>
+            <a:p>
+              <a:endParaRPr lang="en-BE"/>
+            </a:p>
+          </p:txBody>
         </p:sp>
         <p:sp>
           <p:nvSpPr>
@@ -5095,6 +5186,13 @@
               <a:schemeClr val="lt1"/>
             </a:fontRef>
           </p:style>
+          <p:txBody>
+            <a:bodyPr/>
+            <a:lstStyle/>
+            <a:p>
+              <a:endParaRPr lang="en-BE"/>
+            </a:p>
+          </p:txBody>
         </p:sp>
         <p:sp>
           <p:nvSpPr>
@@ -5136,6 +5234,13 @@
               <a:schemeClr val="lt1"/>
             </a:fontRef>
           </p:style>
+          <p:txBody>
+            <a:bodyPr/>
+            <a:lstStyle/>
+            <a:p>
+              <a:endParaRPr lang="en-BE"/>
+            </a:p>
+          </p:txBody>
         </p:sp>
         <p:sp>
           <p:nvSpPr>
@@ -5177,6 +5282,13 @@
               <a:schemeClr val="lt1"/>
             </a:fontRef>
           </p:style>
+          <p:txBody>
+            <a:bodyPr/>
+            <a:lstStyle/>
+            <a:p>
+              <a:endParaRPr lang="en-BE"/>
+            </a:p>
+          </p:txBody>
         </p:sp>
       </p:grpSp>
       <p:sp>
@@ -5309,7 +5421,7 @@
           <a:p>
             <a:fld id="{C70E5D01-44FA-40AF-8633-6FC63E8CF416}" type="datetimeFigureOut">
               <a:rPr lang="en-BE" smtClean="0"/>
-              <a:t>12/03/2026</a:t>
+              <a:t>18/03/2026</a:t>
             </a:fld>
             <a:endParaRPr lang="en-BE"/>
           </a:p>
@@ -7502,8 +7614,8 @@
         </p:nvSpPr>
         <p:spPr>
           <a:xfrm>
-            <a:off x="838200" y="3360462"/>
-            <a:ext cx="10515600" cy="1325563"/>
+            <a:off x="583301" y="4849396"/>
+            <a:ext cx="9220200" cy="1325563"/>
           </a:xfrm>
         </p:spPr>
         <p:txBody>
@@ -7522,6 +7634,80 @@
               <a:t>https://github.com/casperdon/Bricks-Workshop</a:t>
             </a:r>
             <a:endParaRPr lang="en-BE" sz="3600" dirty="0"/>
+          </a:p>
+        </p:txBody>
+      </p:sp>
+      <p:sp>
+        <p:nvSpPr>
+          <p:cNvPr id="4" name="TextBox 3">
+            <a:extLst>
+              <a:ext uri="{FF2B5EF4-FFF2-40B4-BE49-F238E27FC236}">
+                <a16:creationId xmlns:a16="http://schemas.microsoft.com/office/drawing/2014/main" id="{42BA6F9E-E7DF-400F-3F38-5A034A2BB8DA}"/>
+              </a:ext>
+            </a:extLst>
+          </p:cNvPr>
+          <p:cNvSpPr txBox="1"/>
+          <p:nvPr/>
+        </p:nvSpPr>
+        <p:spPr>
+          <a:xfrm>
+            <a:off x="935259" y="1865376"/>
+            <a:ext cx="5160741" cy="1477328"/>
+          </a:xfrm>
+          <a:prstGeom prst="rect">
+            <a:avLst/>
+          </a:prstGeom>
+          <a:noFill/>
+        </p:spPr>
+        <p:txBody>
+          <a:bodyPr wrap="square" rtlCol="0">
+            <a:spAutoFit/>
+          </a:bodyPr>
+          <a:lstStyle/>
+          <a:p>
+            <a:pPr marL="285750" indent="-285750">
+              <a:buFont typeface="Arial" panose="020B0604020202020204" pitchFamily="34" charset="0"/>
+              <a:buChar char="•"/>
+            </a:pPr>
+            <a:r>
+              <a:rPr lang="en-US" dirty="0"/>
+              <a:t>Making our own customizable Library</a:t>
+            </a:r>
+          </a:p>
+          <a:p>
+            <a:pPr marL="285750" indent="-285750">
+              <a:buFont typeface="Arial" panose="020B0604020202020204" pitchFamily="34" charset="0"/>
+              <a:buChar char="•"/>
+            </a:pPr>
+            <a:endParaRPr lang="en-US" dirty="0"/>
+          </a:p>
+          <a:p>
+            <a:pPr marL="285750" indent="-285750">
+              <a:buFont typeface="Arial" panose="020B0604020202020204" pitchFamily="34" charset="0"/>
+              <a:buChar char="•"/>
+            </a:pPr>
+            <a:r>
+              <a:rPr lang="en-US" dirty="0"/>
+              <a:t>Read the README.md, UserStories.md</a:t>
+            </a:r>
+          </a:p>
+          <a:p>
+            <a:pPr marL="285750" indent="-285750">
+              <a:buFont typeface="Arial" panose="020B0604020202020204" pitchFamily="34" charset="0"/>
+              <a:buChar char="•"/>
+            </a:pPr>
+            <a:endParaRPr lang="en-US" dirty="0"/>
+          </a:p>
+          <a:p>
+            <a:pPr marL="285750" indent="-285750">
+              <a:buFont typeface="Arial" panose="020B0604020202020204" pitchFamily="34" charset="0"/>
+              <a:buChar char="•"/>
+            </a:pPr>
+            <a:r>
+              <a:rPr lang="en-US" dirty="0"/>
+              <a:t>Ask Questions, we are here to help!</a:t>
+            </a:r>
+            <a:endParaRPr lang="en-BE" dirty="0"/>
           </a:p>
         </p:txBody>
       </p:sp>

--- a/workshop.pptx
+++ b/workshop.pptx
@@ -6831,7 +6831,7 @@
         <p:spPr>
           <a:xfrm>
             <a:off x="1013791" y="1868556"/>
-            <a:ext cx="4671392" cy="2862322"/>
+            <a:ext cx="4671392" cy="3693319"/>
           </a:xfrm>
           <a:prstGeom prst="rect">
             <a:avLst/>
@@ -6914,6 +6914,26 @@
               <a:rPr lang="en-US" dirty="0"/>
               <a:t>Provide interface for get / find</a:t>
             </a:r>
+          </a:p>
+          <a:p>
+            <a:pPr marL="285750" indent="-285750">
+              <a:buFont typeface="Arial" panose="020B0604020202020204" pitchFamily="34" charset="0"/>
+              <a:buChar char="•"/>
+            </a:pPr>
+            <a:endParaRPr lang="en-US" dirty="0"/>
+          </a:p>
+          <a:p>
+            <a:pPr marL="285750" indent="-285750">
+              <a:buFont typeface="Arial" panose="020B0604020202020204" pitchFamily="34" charset="0"/>
+              <a:buChar char="•"/>
+            </a:pPr>
+            <a:r>
+              <a:rPr lang="en-US" dirty="0">
+                <a:hlinkClick r:id="rId2"/>
+              </a:rPr>
+              <a:t>Packages · Global Technology Applications</a:t>
+            </a:r>
+            <a:endParaRPr lang="en-US" dirty="0"/>
           </a:p>
           <a:p>
             <a:pPr marL="285750" indent="-285750">
